--- a/kyverno-demo.pptx
+++ b/kyverno-demo.pptx
@@ -5,33 +5,33 @@
     <p:sldMasterId id="2147483648" r:id="rId1"/>
   </p:sldMasterIdLst>
   <p:sldIdLst>
-    <p:sldId id="256" r:id="rId7"/>
-    <p:sldId id="257" r:id="rId8"/>
-    <p:sldId id="258" r:id="rId9"/>
-    <p:sldId id="259" r:id="rId10"/>
-    <p:sldId id="260" r:id="rId11"/>
-    <p:sldId id="261" r:id="rId12"/>
-    <p:sldId id="262" r:id="rId13"/>
-    <p:sldId id="263" r:id="rId14"/>
-    <p:sldId id="264" r:id="rId15"/>
-    <p:sldId id="265" r:id="rId16"/>
-    <p:sldId id="266" r:id="rId17"/>
-    <p:sldId id="267" r:id="rId18"/>
-    <p:sldId id="268" r:id="rId19"/>
-    <p:sldId id="269" r:id="rId20"/>
-    <p:sldId id="270" r:id="rId21"/>
-    <p:sldId id="271" r:id="rId22"/>
-    <p:sldId id="272" r:id="rId23"/>
-    <p:sldId id="273" r:id="rId24"/>
-    <p:sldId id="274" r:id="rId25"/>
-    <p:sldId id="275" r:id="rId26"/>
-    <p:sldId id="276" r:id="rId27"/>
-    <p:sldId id="277" r:id="rId28"/>
-    <p:sldId id="278" r:id="rId29"/>
-    <p:sldId id="279" r:id="rId30"/>
-    <p:sldId id="280" r:id="rId31"/>
+    <p:sldId id="256" r:id="rId2"/>
+    <p:sldId id="257" r:id="rId3"/>
+    <p:sldId id="258" r:id="rId4"/>
+    <p:sldId id="259" r:id="rId5"/>
+    <p:sldId id="260" r:id="rId6"/>
+    <p:sldId id="261" r:id="rId7"/>
+    <p:sldId id="262" r:id="rId8"/>
+    <p:sldId id="263" r:id="rId9"/>
+    <p:sldId id="264" r:id="rId10"/>
+    <p:sldId id="265" r:id="rId11"/>
+    <p:sldId id="266" r:id="rId12"/>
+    <p:sldId id="267" r:id="rId13"/>
+    <p:sldId id="268" r:id="rId14"/>
+    <p:sldId id="269" r:id="rId15"/>
+    <p:sldId id="270" r:id="rId16"/>
+    <p:sldId id="271" r:id="rId17"/>
+    <p:sldId id="272" r:id="rId18"/>
+    <p:sldId id="273" r:id="rId19"/>
+    <p:sldId id="274" r:id="rId20"/>
+    <p:sldId id="275" r:id="rId21"/>
+    <p:sldId id="276" r:id="rId22"/>
+    <p:sldId id="277" r:id="rId23"/>
+    <p:sldId id="278" r:id="rId24"/>
+    <p:sldId id="279" r:id="rId25"/>
+    <p:sldId id="280" r:id="rId26"/>
   </p:sldIdLst>
-  <p:sldSz cx="12191695" cy="6858000" type="screen4x3"/>
+  <p:sldSz cx="12192000" cy="6858000"/>
   <p:notesSz cx="6858000" cy="9144000"/>
   <p:defaultTextStyle>
     <a:defPPr>
@@ -128,7 +128,31 @@
       </a:defRPr>
     </a:lvl9pPr>
   </p:defaultTextStyle>
+  <p:extLst>
+    <p:ext uri="{EFAFB233-063F-42B5-8137-9DF3F51BA10A}">
+      <p15:sldGuideLst xmlns:p15="http://schemas.microsoft.com/office/powerpoint/2012/main">
+        <p15:guide id="1" orient="horz" pos="2160">
+          <p15:clr>
+            <a:srgbClr val="A4A3A4"/>
+          </p15:clr>
+        </p15:guide>
+        <p15:guide id="2" pos="2880">
+          <p15:clr>
+            <a:srgbClr val="A4A3A4"/>
+          </p15:clr>
+        </p15:guide>
+      </p15:sldGuideLst>
+    </p:ext>
+  </p:extLst>
 </p:presentation>
+</file>
+
+<file path=ppt/revisionInfo.xml><?xml version="1.0" encoding="utf-8"?>
+<p1510:revInfo xmlns:a="http://schemas.openxmlformats.org/drawingml/2006/main" xmlns:r="http://schemas.openxmlformats.org/officeDocument/2006/relationships" xmlns:p1510="http://schemas.microsoft.com/office/powerpoint/2015/10/main">
+  <p1510:revLst>
+    <p1510:client id="{5C7A7C19-17A7-2556-668E-9128A0750CC5}" v="65" dt="2026-10-29T15:29:00.119"/>
+  </p1510:revLst>
+</p1510:revInfo>
 </file>
 
 <file path=ppt/slideLayouts/slideLayout1.xml><?xml version="1.0" encoding="utf-8"?>
@@ -169,10 +193,9 @@
           <a:lstStyle/>
           <a:p>
             <a:r>
-              <a:rPr lang="en-US" smtClean="0"/>
+              <a:rPr lang="en-US"/>
               <a:t>Click to edit Master title style</a:t>
             </a:r>
-            <a:endParaRPr lang="en-US"/>
           </a:p>
         </p:txBody>
       </p:sp>
@@ -288,10 +311,9 @@
           </a:lstStyle>
           <a:p>
             <a:r>
-              <a:rPr lang="en-US" smtClean="0"/>
+              <a:rPr lang="en-US"/>
               <a:t>Click to edit Master subtitle style</a:t>
             </a:r>
-            <a:endParaRPr lang="en-US"/>
           </a:p>
         </p:txBody>
       </p:sp>
@@ -312,7 +334,7 @@
           <a:p>
             <a:fld id="{5BCAD085-E8A6-8845-BD4E-CB4CCA059FC4}" type="datetimeFigureOut">
               <a:rPr lang="en-US" smtClean="0"/>
-              <a:t>1/27/13</a:t>
+              <a:t>10/29/2026</a:t>
             </a:fld>
             <a:endParaRPr lang="en-US"/>
           </a:p>
@@ -406,10 +428,9 @@
           <a:lstStyle/>
           <a:p>
             <a:r>
-              <a:rPr lang="en-US" smtClean="0"/>
+              <a:rPr lang="en-US"/>
               <a:t>Click to edit Master title style</a:t>
             </a:r>
-            <a:endParaRPr lang="en-US"/>
           </a:p>
         </p:txBody>
       </p:sp>
@@ -430,38 +451,37 @@
           <a:p>
             <a:pPr lvl="0"/>
             <a:r>
-              <a:rPr lang="en-US" smtClean="0"/>
+              <a:rPr lang="en-US"/>
               <a:t>Click to edit Master text styles</a:t>
             </a:r>
           </a:p>
           <a:p>
             <a:pPr lvl="1"/>
             <a:r>
-              <a:rPr lang="en-US" smtClean="0"/>
+              <a:rPr lang="en-US"/>
               <a:t>Second level</a:t>
             </a:r>
           </a:p>
           <a:p>
             <a:pPr lvl="2"/>
             <a:r>
-              <a:rPr lang="en-US" smtClean="0"/>
+              <a:rPr lang="en-US"/>
               <a:t>Third level</a:t>
             </a:r>
           </a:p>
           <a:p>
             <a:pPr lvl="3"/>
             <a:r>
-              <a:rPr lang="en-US" smtClean="0"/>
+              <a:rPr lang="en-US"/>
               <a:t>Fourth level</a:t>
             </a:r>
           </a:p>
           <a:p>
             <a:pPr lvl="4"/>
             <a:r>
-              <a:rPr lang="en-US" smtClean="0"/>
+              <a:rPr lang="en-US"/>
               <a:t>Fifth level</a:t>
             </a:r>
-            <a:endParaRPr lang="en-US"/>
           </a:p>
         </p:txBody>
       </p:sp>
@@ -482,7 +502,7 @@
           <a:p>
             <a:fld id="{5BCAD085-E8A6-8845-BD4E-CB4CCA059FC4}" type="datetimeFigureOut">
               <a:rPr lang="en-US" smtClean="0"/>
-              <a:t>1/27/13</a:t>
+              <a:t>10/29/2026</a:t>
             </a:fld>
             <a:endParaRPr lang="en-US"/>
           </a:p>
@@ -581,10 +601,9 @@
           <a:lstStyle/>
           <a:p>
             <a:r>
-              <a:rPr lang="en-US" smtClean="0"/>
+              <a:rPr lang="en-US"/>
               <a:t>Click to edit Master title style</a:t>
             </a:r>
-            <a:endParaRPr lang="en-US"/>
           </a:p>
         </p:txBody>
       </p:sp>
@@ -610,38 +629,37 @@
           <a:p>
             <a:pPr lvl="0"/>
             <a:r>
-              <a:rPr lang="en-US" smtClean="0"/>
+              <a:rPr lang="en-US"/>
               <a:t>Click to edit Master text styles</a:t>
             </a:r>
           </a:p>
           <a:p>
             <a:pPr lvl="1"/>
             <a:r>
-              <a:rPr lang="en-US" smtClean="0"/>
+              <a:rPr lang="en-US"/>
               <a:t>Second level</a:t>
             </a:r>
           </a:p>
           <a:p>
             <a:pPr lvl="2"/>
             <a:r>
-              <a:rPr lang="en-US" smtClean="0"/>
+              <a:rPr lang="en-US"/>
               <a:t>Third level</a:t>
             </a:r>
           </a:p>
           <a:p>
             <a:pPr lvl="3"/>
             <a:r>
-              <a:rPr lang="en-US" smtClean="0"/>
+              <a:rPr lang="en-US"/>
               <a:t>Fourth level</a:t>
             </a:r>
           </a:p>
           <a:p>
             <a:pPr lvl="4"/>
             <a:r>
-              <a:rPr lang="en-US" smtClean="0"/>
+              <a:rPr lang="en-US"/>
               <a:t>Fifth level</a:t>
             </a:r>
-            <a:endParaRPr lang="en-US"/>
           </a:p>
         </p:txBody>
       </p:sp>
@@ -662,7 +680,7 @@
           <a:p>
             <a:fld id="{5BCAD085-E8A6-8845-BD4E-CB4CCA059FC4}" type="datetimeFigureOut">
               <a:rPr lang="en-US" smtClean="0"/>
-              <a:t>1/27/13</a:t>
+              <a:t>10/29/2026</a:t>
             </a:fld>
             <a:endParaRPr lang="en-US"/>
           </a:p>
@@ -756,10 +774,9 @@
           <a:lstStyle/>
           <a:p>
             <a:r>
-              <a:rPr lang="en-US" smtClean="0"/>
+              <a:rPr lang="en-US"/>
               <a:t>Click to edit Master title style</a:t>
             </a:r>
-            <a:endParaRPr lang="en-US"/>
           </a:p>
         </p:txBody>
       </p:sp>
@@ -780,38 +797,37 @@
           <a:p>
             <a:pPr lvl="0"/>
             <a:r>
-              <a:rPr lang="en-US" smtClean="0"/>
+              <a:rPr lang="en-US"/>
               <a:t>Click to edit Master text styles</a:t>
             </a:r>
           </a:p>
           <a:p>
             <a:pPr lvl="1"/>
             <a:r>
-              <a:rPr lang="en-US" smtClean="0"/>
+              <a:rPr lang="en-US"/>
               <a:t>Second level</a:t>
             </a:r>
           </a:p>
           <a:p>
             <a:pPr lvl="2"/>
             <a:r>
-              <a:rPr lang="en-US" smtClean="0"/>
+              <a:rPr lang="en-US"/>
               <a:t>Third level</a:t>
             </a:r>
           </a:p>
           <a:p>
             <a:pPr lvl="3"/>
             <a:r>
-              <a:rPr lang="en-US" smtClean="0"/>
+              <a:rPr lang="en-US"/>
               <a:t>Fourth level</a:t>
             </a:r>
           </a:p>
           <a:p>
             <a:pPr lvl="4"/>
             <a:r>
-              <a:rPr lang="en-US" smtClean="0"/>
+              <a:rPr lang="en-US"/>
               <a:t>Fifth level</a:t>
             </a:r>
-            <a:endParaRPr lang="en-US"/>
           </a:p>
         </p:txBody>
       </p:sp>
@@ -832,7 +848,7 @@
           <a:p>
             <a:fld id="{5BCAD085-E8A6-8845-BD4E-CB4CCA059FC4}" type="datetimeFigureOut">
               <a:rPr lang="en-US" smtClean="0"/>
-              <a:t>1/27/13</a:t>
+              <a:t>10/29/2026</a:t>
             </a:fld>
             <a:endParaRPr lang="en-US"/>
           </a:p>
@@ -935,10 +951,9 @@
           </a:lstStyle>
           <a:p>
             <a:r>
-              <a:rPr lang="en-US" smtClean="0"/>
+              <a:rPr lang="en-US"/>
               <a:t>Click to edit Master title style</a:t>
             </a:r>
-            <a:endParaRPr lang="en-US"/>
           </a:p>
         </p:txBody>
       </p:sp>
@@ -1055,7 +1070,7 @@
           <a:p>
             <a:pPr lvl="0"/>
             <a:r>
-              <a:rPr lang="en-US" smtClean="0"/>
+              <a:rPr lang="en-US"/>
               <a:t>Click to edit Master text styles</a:t>
             </a:r>
           </a:p>
@@ -1078,7 +1093,7 @@
           <a:p>
             <a:fld id="{5BCAD085-E8A6-8845-BD4E-CB4CCA059FC4}" type="datetimeFigureOut">
               <a:rPr lang="en-US" smtClean="0"/>
-              <a:t>1/27/13</a:t>
+              <a:t>10/29/2026</a:t>
             </a:fld>
             <a:endParaRPr lang="en-US"/>
           </a:p>
@@ -1172,10 +1187,9 @@
           <a:lstStyle/>
           <a:p>
             <a:r>
-              <a:rPr lang="en-US" smtClean="0"/>
+              <a:rPr lang="en-US"/>
               <a:t>Click to edit Master title style</a:t>
             </a:r>
-            <a:endParaRPr lang="en-US"/>
           </a:p>
         </p:txBody>
       </p:sp>
@@ -1229,38 +1243,37 @@
           <a:p>
             <a:pPr lvl="0"/>
             <a:r>
-              <a:rPr lang="en-US" smtClean="0"/>
+              <a:rPr lang="en-US"/>
               <a:t>Click to edit Master text styles</a:t>
             </a:r>
           </a:p>
           <a:p>
             <a:pPr lvl="1"/>
             <a:r>
-              <a:rPr lang="en-US" smtClean="0"/>
+              <a:rPr lang="en-US"/>
               <a:t>Second level</a:t>
             </a:r>
           </a:p>
           <a:p>
             <a:pPr lvl="2"/>
             <a:r>
-              <a:rPr lang="en-US" smtClean="0"/>
+              <a:rPr lang="en-US"/>
               <a:t>Third level</a:t>
             </a:r>
           </a:p>
           <a:p>
             <a:pPr lvl="3"/>
             <a:r>
-              <a:rPr lang="en-US" smtClean="0"/>
+              <a:rPr lang="en-US"/>
               <a:t>Fourth level</a:t>
             </a:r>
           </a:p>
           <a:p>
             <a:pPr lvl="4"/>
             <a:r>
-              <a:rPr lang="en-US" smtClean="0"/>
+              <a:rPr lang="en-US"/>
               <a:t>Fifth level</a:t>
             </a:r>
-            <a:endParaRPr lang="en-US"/>
           </a:p>
         </p:txBody>
       </p:sp>
@@ -1314,38 +1327,37 @@
           <a:p>
             <a:pPr lvl="0"/>
             <a:r>
-              <a:rPr lang="en-US" smtClean="0"/>
+              <a:rPr lang="en-US"/>
               <a:t>Click to edit Master text styles</a:t>
             </a:r>
           </a:p>
           <a:p>
             <a:pPr lvl="1"/>
             <a:r>
-              <a:rPr lang="en-US" smtClean="0"/>
+              <a:rPr lang="en-US"/>
               <a:t>Second level</a:t>
             </a:r>
           </a:p>
           <a:p>
             <a:pPr lvl="2"/>
             <a:r>
-              <a:rPr lang="en-US" smtClean="0"/>
+              <a:rPr lang="en-US"/>
               <a:t>Third level</a:t>
             </a:r>
           </a:p>
           <a:p>
             <a:pPr lvl="3"/>
             <a:r>
-              <a:rPr lang="en-US" smtClean="0"/>
+              <a:rPr lang="en-US"/>
               <a:t>Fourth level</a:t>
             </a:r>
           </a:p>
           <a:p>
             <a:pPr lvl="4"/>
             <a:r>
-              <a:rPr lang="en-US" smtClean="0"/>
+              <a:rPr lang="en-US"/>
               <a:t>Fifth level</a:t>
             </a:r>
-            <a:endParaRPr lang="en-US"/>
           </a:p>
         </p:txBody>
       </p:sp>
@@ -1366,7 +1378,7 @@
           <a:p>
             <a:fld id="{5BCAD085-E8A6-8845-BD4E-CB4CCA059FC4}" type="datetimeFigureOut">
               <a:rPr lang="en-US" smtClean="0"/>
-              <a:t>1/27/13</a:t>
+              <a:t>10/29/2026</a:t>
             </a:fld>
             <a:endParaRPr lang="en-US"/>
           </a:p>
@@ -1464,10 +1476,9 @@
           </a:lstStyle>
           <a:p>
             <a:r>
-              <a:rPr lang="en-US" smtClean="0"/>
+              <a:rPr lang="en-US"/>
               <a:t>Click to edit Master title style</a:t>
             </a:r>
-            <a:endParaRPr lang="en-US"/>
           </a:p>
         </p:txBody>
       </p:sp>
@@ -1530,7 +1541,7 @@
           <a:p>
             <a:pPr lvl="0"/>
             <a:r>
-              <a:rPr lang="en-US" smtClean="0"/>
+              <a:rPr lang="en-US"/>
               <a:t>Click to edit Master text styles</a:t>
             </a:r>
           </a:p>
@@ -1586,38 +1597,37 @@
           <a:p>
             <a:pPr lvl="0"/>
             <a:r>
-              <a:rPr lang="en-US" smtClean="0"/>
+              <a:rPr lang="en-US"/>
               <a:t>Click to edit Master text styles</a:t>
             </a:r>
           </a:p>
           <a:p>
             <a:pPr lvl="1"/>
             <a:r>
-              <a:rPr lang="en-US" smtClean="0"/>
+              <a:rPr lang="en-US"/>
               <a:t>Second level</a:t>
             </a:r>
           </a:p>
           <a:p>
             <a:pPr lvl="2"/>
             <a:r>
-              <a:rPr lang="en-US" smtClean="0"/>
+              <a:rPr lang="en-US"/>
               <a:t>Third level</a:t>
             </a:r>
           </a:p>
           <a:p>
             <a:pPr lvl="3"/>
             <a:r>
-              <a:rPr lang="en-US" smtClean="0"/>
+              <a:rPr lang="en-US"/>
               <a:t>Fourth level</a:t>
             </a:r>
           </a:p>
           <a:p>
             <a:pPr lvl="4"/>
             <a:r>
-              <a:rPr lang="en-US" smtClean="0"/>
+              <a:rPr lang="en-US"/>
               <a:t>Fifth level</a:t>
             </a:r>
-            <a:endParaRPr lang="en-US"/>
           </a:p>
         </p:txBody>
       </p:sp>
@@ -1680,7 +1690,7 @@
           <a:p>
             <a:pPr lvl="0"/>
             <a:r>
-              <a:rPr lang="en-US" smtClean="0"/>
+              <a:rPr lang="en-US"/>
               <a:t>Click to edit Master text styles</a:t>
             </a:r>
           </a:p>
@@ -1736,38 +1746,37 @@
           <a:p>
             <a:pPr lvl="0"/>
             <a:r>
-              <a:rPr lang="en-US" smtClean="0"/>
+              <a:rPr lang="en-US"/>
               <a:t>Click to edit Master text styles</a:t>
             </a:r>
           </a:p>
           <a:p>
             <a:pPr lvl="1"/>
             <a:r>
-              <a:rPr lang="en-US" smtClean="0"/>
+              <a:rPr lang="en-US"/>
               <a:t>Second level</a:t>
             </a:r>
           </a:p>
           <a:p>
             <a:pPr lvl="2"/>
             <a:r>
-              <a:rPr lang="en-US" smtClean="0"/>
+              <a:rPr lang="en-US"/>
               <a:t>Third level</a:t>
             </a:r>
           </a:p>
           <a:p>
             <a:pPr lvl="3"/>
             <a:r>
-              <a:rPr lang="en-US" smtClean="0"/>
+              <a:rPr lang="en-US"/>
               <a:t>Fourth level</a:t>
             </a:r>
           </a:p>
           <a:p>
             <a:pPr lvl="4"/>
             <a:r>
-              <a:rPr lang="en-US" smtClean="0"/>
+              <a:rPr lang="en-US"/>
               <a:t>Fifth level</a:t>
             </a:r>
-            <a:endParaRPr lang="en-US"/>
           </a:p>
         </p:txBody>
       </p:sp>
@@ -1788,7 +1797,7 @@
           <a:p>
             <a:fld id="{5BCAD085-E8A6-8845-BD4E-CB4CCA059FC4}" type="datetimeFigureOut">
               <a:rPr lang="en-US" smtClean="0"/>
-              <a:t>1/27/13</a:t>
+              <a:t>10/29/2026</a:t>
             </a:fld>
             <a:endParaRPr lang="en-US"/>
           </a:p>
@@ -1882,10 +1891,9 @@
           <a:lstStyle/>
           <a:p>
             <a:r>
-              <a:rPr lang="en-US" smtClean="0"/>
+              <a:rPr lang="en-US"/>
               <a:t>Click to edit Master title style</a:t>
             </a:r>
-            <a:endParaRPr lang="en-US"/>
           </a:p>
         </p:txBody>
       </p:sp>
@@ -1906,7 +1914,7 @@
           <a:p>
             <a:fld id="{5BCAD085-E8A6-8845-BD4E-CB4CCA059FC4}" type="datetimeFigureOut">
               <a:rPr lang="en-US" smtClean="0"/>
-              <a:t>1/27/13</a:t>
+              <a:t>10/29/2026</a:t>
             </a:fld>
             <a:endParaRPr lang="en-US"/>
           </a:p>
@@ -2001,7 +2009,7 @@
           <a:p>
             <a:fld id="{5BCAD085-E8A6-8845-BD4E-CB4CCA059FC4}" type="datetimeFigureOut">
               <a:rPr lang="en-US" smtClean="0"/>
-              <a:t>1/27/13</a:t>
+              <a:t>10/29/2026</a:t>
             </a:fld>
             <a:endParaRPr lang="en-US"/>
           </a:p>
@@ -2104,10 +2112,9 @@
           </a:lstStyle>
           <a:p>
             <a:r>
-              <a:rPr lang="en-US" smtClean="0"/>
+              <a:rPr lang="en-US"/>
               <a:t>Click to edit Master title style</a:t>
             </a:r>
-            <a:endParaRPr lang="en-US"/>
           </a:p>
         </p:txBody>
       </p:sp>
@@ -2161,38 +2168,37 @@
           <a:p>
             <a:pPr lvl="0"/>
             <a:r>
-              <a:rPr lang="en-US" smtClean="0"/>
+              <a:rPr lang="en-US"/>
               <a:t>Click to edit Master text styles</a:t>
             </a:r>
           </a:p>
           <a:p>
             <a:pPr lvl="1"/>
             <a:r>
-              <a:rPr lang="en-US" smtClean="0"/>
+              <a:rPr lang="en-US"/>
               <a:t>Second level</a:t>
             </a:r>
           </a:p>
           <a:p>
             <a:pPr lvl="2"/>
             <a:r>
-              <a:rPr lang="en-US" smtClean="0"/>
+              <a:rPr lang="en-US"/>
               <a:t>Third level</a:t>
             </a:r>
           </a:p>
           <a:p>
             <a:pPr lvl="3"/>
             <a:r>
-              <a:rPr lang="en-US" smtClean="0"/>
+              <a:rPr lang="en-US"/>
               <a:t>Fourth level</a:t>
             </a:r>
           </a:p>
           <a:p>
             <a:pPr lvl="4"/>
             <a:r>
-              <a:rPr lang="en-US" smtClean="0"/>
+              <a:rPr lang="en-US"/>
               <a:t>Fifth level</a:t>
             </a:r>
-            <a:endParaRPr lang="en-US"/>
           </a:p>
         </p:txBody>
       </p:sp>
@@ -2255,7 +2261,7 @@
           <a:p>
             <a:pPr lvl="0"/>
             <a:r>
-              <a:rPr lang="en-US" smtClean="0"/>
+              <a:rPr lang="en-US"/>
               <a:t>Click to edit Master text styles</a:t>
             </a:r>
           </a:p>
@@ -2278,7 +2284,7 @@
           <a:p>
             <a:fld id="{5BCAD085-E8A6-8845-BD4E-CB4CCA059FC4}" type="datetimeFigureOut">
               <a:rPr lang="en-US" smtClean="0"/>
-              <a:t>1/27/13</a:t>
+              <a:t>10/29/2026</a:t>
             </a:fld>
             <a:endParaRPr lang="en-US"/>
           </a:p>
@@ -2381,10 +2387,9 @@
           </a:lstStyle>
           <a:p>
             <a:r>
-              <a:rPr lang="en-US" smtClean="0"/>
+              <a:rPr lang="en-US"/>
               <a:t>Click to edit Master title style</a:t>
             </a:r>
-            <a:endParaRPr lang="en-US"/>
           </a:p>
         </p:txBody>
       </p:sp>
@@ -2508,7 +2513,7 @@
           <a:p>
             <a:pPr lvl="0"/>
             <a:r>
-              <a:rPr lang="en-US" smtClean="0"/>
+              <a:rPr lang="en-US"/>
               <a:t>Click to edit Master text styles</a:t>
             </a:r>
           </a:p>
@@ -2531,7 +2536,7 @@
           <a:p>
             <a:fld id="{5BCAD085-E8A6-8845-BD4E-CB4CCA059FC4}" type="datetimeFigureOut">
               <a:rPr lang="en-US" smtClean="0"/>
-              <a:t>1/27/13</a:t>
+              <a:t>10/29/2026</a:t>
             </a:fld>
             <a:endParaRPr lang="en-US"/>
           </a:p>
@@ -2640,10 +2645,9 @@
           <a:lstStyle/>
           <a:p>
             <a:r>
-              <a:rPr lang="en-US" smtClean="0"/>
+              <a:rPr lang="en-US"/>
               <a:t>Click to edit Master title style</a:t>
             </a:r>
-            <a:endParaRPr lang="en-US"/>
           </a:p>
         </p:txBody>
       </p:sp>
@@ -2674,38 +2678,37 @@
           <a:p>
             <a:pPr lvl="0"/>
             <a:r>
-              <a:rPr lang="en-US" smtClean="0"/>
+              <a:rPr lang="en-US"/>
               <a:t>Click to edit Master text styles</a:t>
             </a:r>
           </a:p>
           <a:p>
             <a:pPr lvl="1"/>
             <a:r>
-              <a:rPr lang="en-US" smtClean="0"/>
+              <a:rPr lang="en-US"/>
               <a:t>Second level</a:t>
             </a:r>
           </a:p>
           <a:p>
             <a:pPr lvl="2"/>
             <a:r>
-              <a:rPr lang="en-US" smtClean="0"/>
+              <a:rPr lang="en-US"/>
               <a:t>Third level</a:t>
             </a:r>
           </a:p>
           <a:p>
             <a:pPr lvl="3"/>
             <a:r>
-              <a:rPr lang="en-US" smtClean="0"/>
+              <a:rPr lang="en-US"/>
               <a:t>Fourth level</a:t>
             </a:r>
           </a:p>
           <a:p>
             <a:pPr lvl="4"/>
             <a:r>
-              <a:rPr lang="en-US" smtClean="0"/>
+              <a:rPr lang="en-US"/>
               <a:t>Fifth level</a:t>
             </a:r>
-            <a:endParaRPr lang="en-US"/>
           </a:p>
         </p:txBody>
       </p:sp>
@@ -2744,7 +2747,7 @@
           <a:p>
             <a:fld id="{5BCAD085-E8A6-8845-BD4E-CB4CCA059FC4}" type="datetimeFigureOut">
               <a:rPr lang="en-US" smtClean="0"/>
-              <a:t>1/27/13</a:t>
+              <a:t>10/29/2026</a:t>
             </a:fld>
             <a:endParaRPr lang="en-US"/>
           </a:p>
@@ -3103,7 +3106,7 @@
 </file>
 
 <file path=ppt/slides/slide1.xml><?xml version="1.0" encoding="utf-8"?>
-<p:sld xmlns:a="http://schemas.openxmlformats.org/drawingml/2006/main" xmlns:p="http://schemas.openxmlformats.org/presentationml/2006/main" xmlns:r="http://schemas.openxmlformats.org/officeDocument/2006/relationships">
+<p:sld xmlns:a="http://schemas.openxmlformats.org/drawingml/2006/main" xmlns:r="http://schemas.openxmlformats.org/officeDocument/2006/relationships" xmlns:p="http://schemas.openxmlformats.org/presentationml/2006/main">
   <p:cSld>
     <p:spTree>
       <p:nvGrpSpPr>
@@ -3111,7 +3114,14 @@
         <p:cNvGrpSpPr/>
         <p:nvPr/>
       </p:nvGrpSpPr>
-      <p:grpSpPr/>
+      <p:grpSpPr>
+        <a:xfrm>
+          <a:off x="0" y="0"/>
+          <a:ext cx="0" cy="0"/>
+          <a:chOff x="0" y="0"/>
+          <a:chExt cx="0" cy="0"/>
+        </a:xfrm>
+      </p:grpSpPr>
       <p:sp>
         <p:nvSpPr>
           <p:cNvPr id="2" name="Rectangle 1"/>
@@ -3153,23 +3163,150 @@
           <a:lstStyle/>
           <a:p>
             <a:pPr algn="ctr"/>
-          </a:p>
-        </p:txBody>
-      </p:sp>
-      <p:sp>
-        <p:nvSpPr>
-          <p:cNvPr id="3" name="Rounded Rectangle 2"/>
+            <a:endParaRPr/>
+          </a:p>
+        </p:txBody>
+      </p:sp>
+      <p:pic>
+        <p:nvPicPr>
+          <p:cNvPr id="4" name="Picture 3" descr="mitesp-mark.png"/>
+          <p:cNvPicPr>
+            <a:picLocks noChangeAspect="1"/>
+          </p:cNvPicPr>
+          <p:nvPr/>
+        </p:nvPicPr>
+        <p:blipFill>
+          <a:blip r:embed="rId2"/>
+          <a:stretch>
+            <a:fillRect/>
+          </a:stretch>
+        </p:blipFill>
+        <p:spPr>
+          <a:xfrm>
+            <a:off x="548640" y="457200"/>
+            <a:ext cx="959427" cy="457200"/>
+          </a:xfrm>
+          <a:prstGeom prst="rect">
+            <a:avLst/>
+          </a:prstGeom>
+        </p:spPr>
+      </p:pic>
+      <p:sp>
+        <p:nvSpPr>
+          <p:cNvPr id="5" name="TextBox 4"/>
+          <p:cNvSpPr txBox="1"/>
+          <p:nvPr/>
+        </p:nvSpPr>
+        <p:spPr>
+          <a:xfrm>
+            <a:off x="1143000" y="457200"/>
+            <a:ext cx="3657600" cy="457200"/>
+          </a:xfrm>
+          <a:prstGeom prst="rect">
+            <a:avLst/>
+          </a:prstGeom>
+          <a:noFill/>
+        </p:spPr>
+        <p:txBody>
+          <a:bodyPr wrap="square" lIns="0" tIns="0" rIns="0" bIns="0" anchor="ctr">
+            <a:spAutoFit/>
+          </a:bodyPr>
+          <a:lstStyle/>
+          <a:p>
+            <a:pPr algn="l">
+              <a:lnSpc>
+                <a:spcPct val="100000"/>
+              </a:lnSpc>
+            </a:pPr>
+            <a:r>
+              <a:rPr sz="1500" b="1" i="0">
+                <a:solidFill>
+                  <a:srgbClr val="FFFFFF"/>
+                </a:solidFill>
+                <a:latin typeface="Montserrat"/>
+              </a:rPr>
+              <a:t>MillenniumIT ESP</a:t>
+            </a:r>
+          </a:p>
+        </p:txBody>
+      </p:sp>
+      <p:pic>
+        <p:nvPicPr>
+          <p:cNvPr id="6" name="Picture 5" descr="kyverno-icon.png"/>
+          <p:cNvPicPr>
+            <a:picLocks noChangeAspect="1"/>
+          </p:cNvPicPr>
+          <p:nvPr/>
+        </p:nvPicPr>
+        <p:blipFill>
+          <a:blip r:embed="rId3"/>
+          <a:stretch>
+            <a:fillRect/>
+          </a:stretch>
+        </p:blipFill>
+        <p:spPr>
+          <a:xfrm>
+            <a:off x="10607040" y="457200"/>
+            <a:ext cx="487680" cy="457200"/>
+          </a:xfrm>
+          <a:prstGeom prst="rect">
+            <a:avLst/>
+          </a:prstGeom>
+        </p:spPr>
+      </p:pic>
+      <p:sp>
+        <p:nvSpPr>
+          <p:cNvPr id="7" name="TextBox 6"/>
+          <p:cNvSpPr txBox="1"/>
+          <p:nvPr/>
+        </p:nvSpPr>
+        <p:spPr>
+          <a:xfrm>
+            <a:off x="9646920" y="457200"/>
+            <a:ext cx="914400" cy="457200"/>
+          </a:xfrm>
+          <a:prstGeom prst="rect">
+            <a:avLst/>
+          </a:prstGeom>
+          <a:noFill/>
+        </p:spPr>
+        <p:txBody>
+          <a:bodyPr wrap="square" lIns="0" tIns="0" rIns="0" bIns="0" anchor="ctr">
+            <a:spAutoFit/>
+          </a:bodyPr>
+          <a:lstStyle/>
+          <a:p>
+            <a:pPr algn="r">
+              <a:lnSpc>
+                <a:spcPct val="100000"/>
+              </a:lnSpc>
+            </a:pPr>
+            <a:r>
+              <a:rPr sz="1500" b="1" i="0">
+                <a:solidFill>
+                  <a:srgbClr val="8FC4EE"/>
+                </a:solidFill>
+                <a:latin typeface="Montserrat"/>
+              </a:rPr>
+              <a:t>Kyverno</a:t>
+            </a:r>
+          </a:p>
+        </p:txBody>
+      </p:sp>
+      <p:sp>
+        <p:nvSpPr>
+          <p:cNvPr id="8" name="Rounded Rectangle 7"/>
           <p:cNvSpPr/>
           <p:nvPr/>
         </p:nvSpPr>
         <p:spPr>
-          <a:xfrm rot="1080000">
-            <a:off x="10271455" y="-457200"/>
-            <a:ext cx="2377440" cy="2377440"/>
+          <a:xfrm>
+            <a:off x="548640" y="1965960"/>
+            <a:ext cx="2926079" cy="329184"/>
           </a:xfrm>
           <a:prstGeom prst="roundRect">
             <a:avLst>
-              <a:gd name="adj" fmla="val 22000"/>
+              <a:gd name="adj" fmla="val 50000"/>
             </a:avLst>
           </a:prstGeom>
           <a:solidFill>
@@ -3195,179 +3332,7 @@
           </a:fontRef>
         </p:style>
         <p:txBody>
-          <a:bodyPr rtlCol="0" anchor="ctr"/>
-          <a:lstStyle/>
-          <a:p>
-            <a:pPr algn="ctr"/>
-          </a:p>
-        </p:txBody>
-      </p:sp>
-      <p:pic>
-        <p:nvPicPr>
-          <p:cNvPr id="4" name="Picture 3" descr="mitesp-mark.png"/>
-          <p:cNvPicPr>
-            <a:picLocks noChangeAspect="1"/>
-          </p:cNvPicPr>
-          <p:nvPr/>
-        </p:nvPicPr>
-        <p:blipFill>
-          <a:blip r:embed="rId2"/>
-          <a:stretch>
-            <a:fillRect/>
-          </a:stretch>
-        </p:blipFill>
-        <p:spPr>
-          <a:xfrm>
-            <a:off x="548640" y="457200"/>
-            <a:ext cx="959427" cy="457200"/>
-          </a:xfrm>
-          <a:prstGeom prst="rect">
-            <a:avLst/>
-          </a:prstGeom>
-        </p:spPr>
-      </p:pic>
-      <p:sp>
-        <p:nvSpPr>
-          <p:cNvPr id="5" name="TextBox 4"/>
-          <p:cNvSpPr txBox="1"/>
-          <p:nvPr/>
-        </p:nvSpPr>
-        <p:spPr>
-          <a:xfrm>
-            <a:off x="1143000" y="457200"/>
-            <a:ext cx="3657600" cy="457200"/>
-          </a:xfrm>
-          <a:prstGeom prst="rect">
-            <a:avLst/>
-          </a:prstGeom>
-          <a:noFill/>
-        </p:spPr>
-        <p:txBody>
-          <a:bodyPr wrap="square" anchor="ctr" lIns="0" rIns="0" tIns="0" bIns="0">
-            <a:spAutoFit/>
-          </a:bodyPr>
-          <a:lstStyle/>
-          <a:p>
-            <a:pPr algn="l">
-              <a:lnSpc>
-                <a:spcPct val="100000"/>
-              </a:lnSpc>
-            </a:pPr>
-            <a:r>
-              <a:rPr sz="1500" b="1" i="0">
-                <a:solidFill>
-                  <a:srgbClr val="FFFFFF"/>
-                </a:solidFill>
-                <a:latin typeface="Montserrat"/>
-              </a:rPr>
-              <a:t>MillenniumIT ESP</a:t>
-            </a:r>
-          </a:p>
-        </p:txBody>
-      </p:sp>
-      <p:pic>
-        <p:nvPicPr>
-          <p:cNvPr id="6" name="Picture 5" descr="kyverno-icon.png"/>
-          <p:cNvPicPr>
-            <a:picLocks noChangeAspect="1"/>
-          </p:cNvPicPr>
-          <p:nvPr/>
-        </p:nvPicPr>
-        <p:blipFill>
-          <a:blip r:embed="rId3"/>
-          <a:stretch>
-            <a:fillRect/>
-          </a:stretch>
-        </p:blipFill>
-        <p:spPr>
-          <a:xfrm>
-            <a:off x="10607040" y="457200"/>
-            <a:ext cx="487680" cy="457200"/>
-          </a:xfrm>
-          <a:prstGeom prst="rect">
-            <a:avLst/>
-          </a:prstGeom>
-        </p:spPr>
-      </p:pic>
-      <p:sp>
-        <p:nvSpPr>
-          <p:cNvPr id="7" name="TextBox 6"/>
-          <p:cNvSpPr txBox="1"/>
-          <p:nvPr/>
-        </p:nvSpPr>
-        <p:spPr>
-          <a:xfrm>
-            <a:off x="9646920" y="457200"/>
-            <a:ext cx="914400" cy="457200"/>
-          </a:xfrm>
-          <a:prstGeom prst="rect">
-            <a:avLst/>
-          </a:prstGeom>
-          <a:noFill/>
-        </p:spPr>
-        <p:txBody>
-          <a:bodyPr wrap="square" anchor="ctr" lIns="0" rIns="0" tIns="0" bIns="0">
-            <a:spAutoFit/>
-          </a:bodyPr>
-          <a:lstStyle/>
-          <a:p>
-            <a:pPr algn="r">
-              <a:lnSpc>
-                <a:spcPct val="100000"/>
-              </a:lnSpc>
-            </a:pPr>
-            <a:r>
-              <a:rPr sz="1500" b="1" i="0">
-                <a:solidFill>
-                  <a:srgbClr val="8FC4EE"/>
-                </a:solidFill>
-                <a:latin typeface="Montserrat"/>
-              </a:rPr>
-              <a:t>Kyverno</a:t>
-            </a:r>
-          </a:p>
-        </p:txBody>
-      </p:sp>
-      <p:sp>
-        <p:nvSpPr>
-          <p:cNvPr id="8" name="Rounded Rectangle 7"/>
-          <p:cNvSpPr/>
-          <p:nvPr/>
-        </p:nvSpPr>
-        <p:spPr>
-          <a:xfrm>
-            <a:off x="548640" y="1965960"/>
-            <a:ext cx="2926079" cy="329184"/>
-          </a:xfrm>
-          <a:prstGeom prst="roundRect">
-            <a:avLst>
-              <a:gd name="adj" fmla="val 50000"/>
-            </a:avLst>
-          </a:prstGeom>
-          <a:solidFill>
-            <a:srgbClr val="EF4023"/>
-          </a:solidFill>
-          <a:ln>
-            <a:noFill/>
-          </a:ln>
-          <a:effectLst/>
-        </p:spPr>
-        <p:style>
-          <a:lnRef idx="1">
-            <a:schemeClr val="accent1"/>
-          </a:lnRef>
-          <a:fillRef idx="3">
-            <a:schemeClr val="accent1"/>
-          </a:fillRef>
-          <a:effectRef idx="2">
-            <a:schemeClr val="accent1"/>
-          </a:effectRef>
-          <a:fontRef idx="minor">
-            <a:schemeClr val="lt1"/>
-          </a:fontRef>
-        </p:style>
-        <p:txBody>
-          <a:bodyPr rtlCol="0" anchor="ctr" lIns="45720" rIns="45720" tIns="0" bIns="0"/>
+          <a:bodyPr lIns="45720" tIns="0" rIns="45720" bIns="0" rtlCol="0" anchor="ctr"/>
           <a:lstStyle/>
           <a:p>
             <a:pPr algn="ctr"/>
@@ -3400,7 +3365,7 @@
           <a:noFill/>
         </p:spPr>
         <p:txBody>
-          <a:bodyPr wrap="square" anchor="t" lIns="0" rIns="0" tIns="0" bIns="0">
+          <a:bodyPr wrap="square" lIns="0" tIns="0" rIns="0" bIns="0" anchor="t">
             <a:spAutoFit/>
           </a:bodyPr>
           <a:lstStyle/>
@@ -3448,7 +3413,7 @@
           <a:noFill/>
         </p:spPr>
         <p:txBody>
-          <a:bodyPr wrap="square" anchor="t" lIns="0" rIns="0" tIns="0" bIns="0">
+          <a:bodyPr wrap="square" lIns="0" tIns="0" rIns="0" bIns="0" anchor="t">
             <a:spAutoFit/>
           </a:bodyPr>
           <a:lstStyle/>
@@ -3479,33 +3444,52 @@
         <p:spPr>
           <a:xfrm>
             <a:off x="548640" y="4526280"/>
-            <a:ext cx="9601200" cy="365760"/>
-          </a:xfrm>
-          <a:prstGeom prst="rect">
-            <a:avLst/>
-          </a:prstGeom>
-          <a:noFill/>
-        </p:spPr>
-        <p:txBody>
-          <a:bodyPr wrap="square" anchor="t" lIns="0" rIns="0" tIns="0" bIns="0">
-            <a:spAutoFit/>
-          </a:bodyPr>
-          <a:lstStyle/>
-          <a:p>
-            <a:pPr algn="l">
-              <a:lnSpc>
-                <a:spcPct val="100000"/>
-              </a:lnSpc>
-            </a:pPr>
-            <a:r>
-              <a:rPr sz="1500" b="1" i="0">
+            <a:ext cx="9601200" cy="230832"/>
+          </a:xfrm>
+          <a:prstGeom prst="rect">
+            <a:avLst/>
+          </a:prstGeom>
+          <a:noFill/>
+        </p:spPr>
+        <p:txBody>
+          <a:bodyPr wrap="square" lIns="0" tIns="0" rIns="0" bIns="0" anchor="t">
+            <a:spAutoFit/>
+          </a:bodyPr>
+          <a:lstStyle/>
+          <a:p>
+            <a:r>
+              <a:rPr lang="en-US" sz="1500" b="1" dirty="0">
                 <a:solidFill>
                   <a:srgbClr val="B9BDC2"/>
                 </a:solidFill>
                 <a:latin typeface="Montserrat"/>
               </a:rPr>
-              <a:t>Junior Cloud &amp; DevOps  ·  ~40 minutes  ·  Minikube</a:t>
-            </a:r>
+              <a:t>Cloud &amp; DevOps</a:t>
+            </a:r>
+            <a:r>
+              <a:rPr sz="1500" b="1" i="0" dirty="0">
+                <a:solidFill>
+                  <a:srgbClr val="B9BDC2"/>
+                </a:solidFill>
+                <a:latin typeface="Montserrat"/>
+              </a:rPr>
+              <a:t>  ·  ~40 minutes  ·  </a:t>
+            </a:r>
+            <a:r>
+              <a:rPr sz="1500" b="1" i="0" dirty="0" err="1">
+                <a:solidFill>
+                  <a:srgbClr val="B9BDC2"/>
+                </a:solidFill>
+                <a:latin typeface="Montserrat"/>
+              </a:rPr>
+              <a:t>Minikube</a:t>
+            </a:r>
+            <a:endParaRPr lang="en-US" sz="1500" b="1" i="0" dirty="0" err="1">
+              <a:solidFill>
+                <a:srgbClr val="B9BDC2"/>
+              </a:solidFill>
+              <a:latin typeface="Montserrat"/>
+            </a:endParaRPr>
           </a:p>
         </p:txBody>
       </p:sp>
@@ -3526,7 +3510,7 @@
           <a:noFill/>
         </p:spPr>
         <p:txBody>
-          <a:bodyPr wrap="square" anchor="t" lIns="0" rIns="0" tIns="0" bIns="0">
+          <a:bodyPr wrap="square" lIns="0" tIns="0" rIns="0" bIns="0" anchor="t">
             <a:spAutoFit/>
           </a:bodyPr>
           <a:lstStyle/>
@@ -3565,7 +3549,7 @@
           <a:noFill/>
         </p:spPr>
         <p:txBody>
-          <a:bodyPr wrap="square" anchor="t" lIns="0" rIns="0" tIns="0" bIns="0">
+          <a:bodyPr wrap="square" lIns="0" tIns="0" rIns="0" bIns="0" anchor="t">
             <a:spAutoFit/>
           </a:bodyPr>
           <a:lstStyle/>
@@ -3596,7 +3580,7 @@
 </file>
 
 <file path=ppt/slides/slide10.xml><?xml version="1.0" encoding="utf-8"?>
-<p:sld xmlns:a="http://schemas.openxmlformats.org/drawingml/2006/main" xmlns:p="http://schemas.openxmlformats.org/presentationml/2006/main" xmlns:r="http://schemas.openxmlformats.org/officeDocument/2006/relationships">
+<p:sld xmlns:a="http://schemas.openxmlformats.org/drawingml/2006/main" xmlns:r="http://schemas.openxmlformats.org/officeDocument/2006/relationships" xmlns:p="http://schemas.openxmlformats.org/presentationml/2006/main">
   <p:cSld>
     <p:spTree>
       <p:nvGrpSpPr>
@@ -3604,7 +3588,14 @@
         <p:cNvGrpSpPr/>
         <p:nvPr/>
       </p:nvGrpSpPr>
-      <p:grpSpPr/>
+      <p:grpSpPr>
+        <a:xfrm>
+          <a:off x="0" y="0"/>
+          <a:ext cx="0" cy="0"/>
+          <a:chOff x="0" y="0"/>
+          <a:chExt cx="0" cy="0"/>
+        </a:xfrm>
+      </p:grpSpPr>
       <p:sp>
         <p:nvSpPr>
           <p:cNvPr id="2" name="Rectangle 1"/>
@@ -3646,6 +3637,7 @@
           <a:lstStyle/>
           <a:p>
             <a:pPr algn="ctr"/>
+            <a:endParaRPr/>
           </a:p>
         </p:txBody>
       </p:sp>
@@ -3692,6 +3684,7 @@
           <a:lstStyle/>
           <a:p>
             <a:pPr algn="ctr"/>
+            <a:endParaRPr/>
           </a:p>
         </p:txBody>
       </p:sp>
@@ -3734,7 +3727,7 @@
           </a:fontRef>
         </p:style>
         <p:txBody>
-          <a:bodyPr rtlCol="0" anchor="ctr" lIns="45720" rIns="45720" tIns="0" bIns="0"/>
+          <a:bodyPr lIns="45720" tIns="0" rIns="45720" bIns="0" rtlCol="0" anchor="ctr"/>
           <a:lstStyle/>
           <a:p>
             <a:pPr algn="ctr"/>
@@ -3767,7 +3760,7 @@
           <a:noFill/>
         </p:spPr>
         <p:txBody>
-          <a:bodyPr wrap="square" anchor="t" lIns="0" rIns="0" tIns="0" bIns="0">
+          <a:bodyPr wrap="square" lIns="0" tIns="0" rIns="0" bIns="0" anchor="t">
             <a:spAutoFit/>
           </a:bodyPr>
           <a:lstStyle/>
@@ -3806,7 +3799,7 @@
           <a:noFill/>
         </p:spPr>
         <p:txBody>
-          <a:bodyPr wrap="square" anchor="t" lIns="0" rIns="0" tIns="0" bIns="0">
+          <a:bodyPr wrap="square" lIns="0" tIns="0" rIns="0" bIns="0" anchor="t">
             <a:spAutoFit/>
           </a:bodyPr>
           <a:lstStyle/>
@@ -3845,7 +3838,7 @@
           <a:noFill/>
         </p:spPr>
         <p:txBody>
-          <a:bodyPr wrap="square" anchor="t" lIns="0" rIns="0" tIns="0" bIns="0">
+          <a:bodyPr wrap="square" lIns="0" tIns="0" rIns="0" bIns="0" anchor="t">
             <a:spAutoFit/>
           </a:bodyPr>
           <a:lstStyle/>
@@ -3884,7 +3877,7 @@
           <a:noFill/>
         </p:spPr>
         <p:txBody>
-          <a:bodyPr wrap="square" anchor="t" lIns="0" rIns="0" tIns="0" bIns="0">
+          <a:bodyPr wrap="square" lIns="0" tIns="0" rIns="0" bIns="0" anchor="t">
             <a:spAutoFit/>
           </a:bodyPr>
           <a:lstStyle/>
@@ -3915,7 +3908,7 @@
 </file>
 
 <file path=ppt/slides/slide11.xml><?xml version="1.0" encoding="utf-8"?>
-<p:sld xmlns:a="http://schemas.openxmlformats.org/drawingml/2006/main" xmlns:p="http://schemas.openxmlformats.org/presentationml/2006/main" xmlns:r="http://schemas.openxmlformats.org/officeDocument/2006/relationships">
+<p:sld xmlns:a="http://schemas.openxmlformats.org/drawingml/2006/main" xmlns:r="http://schemas.openxmlformats.org/officeDocument/2006/relationships" xmlns:p="http://schemas.openxmlformats.org/presentationml/2006/main">
   <p:cSld>
     <p:spTree>
       <p:nvGrpSpPr>
@@ -3923,7 +3916,14 @@
         <p:cNvGrpSpPr/>
         <p:nvPr/>
       </p:nvGrpSpPr>
-      <p:grpSpPr/>
+      <p:grpSpPr>
+        <a:xfrm>
+          <a:off x="0" y="0"/>
+          <a:ext cx="0" cy="0"/>
+          <a:chOff x="0" y="0"/>
+          <a:chExt cx="0" cy="0"/>
+        </a:xfrm>
+      </p:grpSpPr>
       <p:sp>
         <p:nvSpPr>
           <p:cNvPr id="2" name="Rectangle 1"/>
@@ -3965,6 +3965,7 @@
           <a:lstStyle/>
           <a:p>
             <a:pPr algn="ctr"/>
+            <a:endParaRPr/>
           </a:p>
         </p:txBody>
       </p:sp>
@@ -4007,7 +4008,7 @@
           </a:fontRef>
         </p:style>
         <p:txBody>
-          <a:bodyPr rtlCol="0" anchor="ctr" lIns="45720" rIns="45720" tIns="0" bIns="0"/>
+          <a:bodyPr lIns="45720" tIns="0" rIns="45720" bIns="0" rtlCol="0" anchor="ctr"/>
           <a:lstStyle/>
           <a:p>
             <a:pPr algn="ctr"/>
@@ -4040,7 +4041,7 @@
           <a:noFill/>
         </p:spPr>
         <p:txBody>
-          <a:bodyPr wrap="square" anchor="t" lIns="0" rIns="0" tIns="0" bIns="0">
+          <a:bodyPr wrap="square" lIns="0" tIns="0" rIns="0" bIns="0" anchor="t">
             <a:spAutoFit/>
           </a:bodyPr>
           <a:lstStyle/>
@@ -4079,7 +4080,7 @@
           <a:noFill/>
         </p:spPr>
         <p:txBody>
-          <a:bodyPr wrap="square" anchor="t" lIns="0" rIns="0" tIns="0" bIns="0">
+          <a:bodyPr wrap="square" lIns="0" tIns="0" rIns="0" bIns="0" anchor="t">
             <a:spAutoFit/>
           </a:bodyPr>
           <a:lstStyle/>
@@ -4124,13 +4125,6 @@
             <a:noFill/>
           </a:ln>
           <a:effectLst/>
-          <a:effectLst>
-            <a:outerShdw blurRad="90000" dist="30000" dir="5400000" rotWithShape="0">
-              <a:srgbClr val="1A1B1F">
-                <a:alpha val="18000"/>
-              </a:srgbClr>
-            </a:outerShdw>
-          </a:effectLst>
         </p:spPr>
         <p:style>
           <a:lnRef idx="1">
@@ -4151,6 +4145,7 @@
           <a:lstStyle/>
           <a:p>
             <a:pPr algn="ctr"/>
+            <a:endParaRPr/>
           </a:p>
         </p:txBody>
       </p:sp>
@@ -4171,7 +4166,7 @@
           <a:noFill/>
         </p:spPr>
         <p:txBody>
-          <a:bodyPr wrap="square" anchor="ctr" lIns="0" rIns="0" tIns="0" bIns="0">
+          <a:bodyPr wrap="square" lIns="0" tIns="0" rIns="0" bIns="0" anchor="ctr">
             <a:spAutoFit/>
           </a:bodyPr>
           <a:lstStyle/>
@@ -4210,7 +4205,7 @@
           <a:noFill/>
         </p:spPr>
         <p:txBody>
-          <a:bodyPr wrap="square" anchor="ctr" lIns="0" rIns="0" tIns="0" bIns="0">
+          <a:bodyPr wrap="square" lIns="0" tIns="0" rIns="0" bIns="0" anchor="ctr">
             <a:spAutoFit/>
           </a:bodyPr>
           <a:lstStyle/>
@@ -4275,6 +4270,7 @@
           <a:lstStyle/>
           <a:p>
             <a:pPr algn="ctr"/>
+            <a:endParaRPr/>
           </a:p>
         </p:txBody>
       </p:sp>
@@ -4295,7 +4291,7 @@
           <a:noFill/>
         </p:spPr>
         <p:txBody>
-          <a:bodyPr wrap="square" anchor="ctr" lIns="0" rIns="0" tIns="0" bIns="0">
+          <a:bodyPr wrap="square" lIns="0" tIns="0" rIns="0" bIns="0" anchor="ctr">
             <a:spAutoFit/>
           </a:bodyPr>
           <a:lstStyle/>
@@ -4356,7 +4352,7 @@
           </a:fontRef>
         </p:style>
         <p:txBody>
-          <a:bodyPr rtlCol="0" anchor="ctr" lIns="0" rIns="0" tIns="0" bIns="0"/>
+          <a:bodyPr lIns="0" tIns="0" rIns="0" bIns="0" rtlCol="0" anchor="ctr"/>
           <a:lstStyle/>
           <a:p>
             <a:pPr algn="ctr"/>
@@ -4389,7 +4385,7 @@
           <a:noFill/>
         </p:spPr>
         <p:txBody>
-          <a:bodyPr wrap="square" anchor="ctr" lIns="0" rIns="0" tIns="0" bIns="0">
+          <a:bodyPr wrap="square" lIns="0" tIns="0" rIns="0" bIns="0" anchor="ctr">
             <a:spAutoFit/>
           </a:bodyPr>
           <a:lstStyle/>
@@ -4428,7 +4424,7 @@
           <a:noFill/>
         </p:spPr>
         <p:txBody>
-          <a:bodyPr wrap="square" anchor="ctr" lIns="0" rIns="0" tIns="0" bIns="0">
+          <a:bodyPr wrap="square" lIns="0" tIns="0" rIns="0" bIns="0" anchor="ctr">
             <a:spAutoFit/>
           </a:bodyPr>
           <a:lstStyle/>
@@ -4493,6 +4489,7 @@
           <a:lstStyle/>
           <a:p>
             <a:pPr algn="ctr"/>
+            <a:endParaRPr/>
           </a:p>
         </p:txBody>
       </p:sp>
@@ -4513,7 +4510,7 @@
           <a:noFill/>
         </p:spPr>
         <p:txBody>
-          <a:bodyPr wrap="square" anchor="ctr" lIns="0" rIns="0" tIns="0" bIns="0">
+          <a:bodyPr wrap="square" lIns="0" tIns="0" rIns="0" bIns="0" anchor="ctr">
             <a:spAutoFit/>
           </a:bodyPr>
           <a:lstStyle/>
@@ -4574,7 +4571,7 @@
           </a:fontRef>
         </p:style>
         <p:txBody>
-          <a:bodyPr rtlCol="0" anchor="ctr" lIns="0" rIns="0" tIns="0" bIns="0"/>
+          <a:bodyPr lIns="0" tIns="0" rIns="0" bIns="0" rtlCol="0" anchor="ctr"/>
           <a:lstStyle/>
           <a:p>
             <a:pPr algn="ctr"/>
@@ -4607,7 +4604,7 @@
           <a:noFill/>
         </p:spPr>
         <p:txBody>
-          <a:bodyPr wrap="square" anchor="ctr" lIns="0" rIns="0" tIns="0" bIns="0">
+          <a:bodyPr wrap="square" lIns="0" tIns="0" rIns="0" bIns="0" anchor="ctr">
             <a:spAutoFit/>
           </a:bodyPr>
           <a:lstStyle/>
@@ -4646,7 +4643,7 @@
           <a:noFill/>
         </p:spPr>
         <p:txBody>
-          <a:bodyPr wrap="square" anchor="ctr" lIns="0" rIns="0" tIns="0" bIns="0">
+          <a:bodyPr wrap="square" lIns="0" tIns="0" rIns="0" bIns="0" anchor="ctr">
             <a:spAutoFit/>
           </a:bodyPr>
           <a:lstStyle/>
@@ -4685,7 +4682,7 @@
           <a:noFill/>
         </p:spPr>
         <p:txBody>
-          <a:bodyPr wrap="square" anchor="ctr" lIns="0" rIns="0" tIns="0" bIns="0">
+          <a:bodyPr wrap="square" lIns="0" tIns="0" rIns="0" bIns="0" anchor="ctr">
             <a:spAutoFit/>
           </a:bodyPr>
           <a:lstStyle/>
@@ -4724,7 +4721,7 @@
           <a:noFill/>
         </p:spPr>
         <p:txBody>
-          <a:bodyPr wrap="square" anchor="ctr" lIns="0" rIns="0" tIns="0" bIns="0">
+          <a:bodyPr wrap="square" lIns="0" tIns="0" rIns="0" bIns="0" anchor="ctr">
             <a:spAutoFit/>
           </a:bodyPr>
           <a:lstStyle/>
@@ -4789,6 +4786,7 @@
           <a:lstStyle/>
           <a:p>
             <a:pPr algn="ctr"/>
+            <a:endParaRPr/>
           </a:p>
         </p:txBody>
       </p:sp>
@@ -4809,7 +4807,7 @@
           <a:noFill/>
         </p:spPr>
         <p:txBody>
-          <a:bodyPr wrap="square" anchor="ctr" lIns="0" rIns="0" tIns="0" bIns="0">
+          <a:bodyPr wrap="square" lIns="0" tIns="0" rIns="0" bIns="0" anchor="ctr">
             <a:spAutoFit/>
           </a:bodyPr>
           <a:lstStyle/>
@@ -4870,7 +4868,7 @@
           </a:fontRef>
         </p:style>
         <p:txBody>
-          <a:bodyPr rtlCol="0" anchor="ctr" lIns="0" rIns="0" tIns="0" bIns="0"/>
+          <a:bodyPr lIns="0" tIns="0" rIns="0" bIns="0" rtlCol="0" anchor="ctr"/>
           <a:lstStyle/>
           <a:p>
             <a:pPr algn="ctr"/>
@@ -4903,7 +4901,7 @@
           <a:noFill/>
         </p:spPr>
         <p:txBody>
-          <a:bodyPr wrap="square" anchor="ctr" lIns="0" rIns="0" tIns="0" bIns="0">
+          <a:bodyPr wrap="square" lIns="0" tIns="0" rIns="0" bIns="0" anchor="ctr">
             <a:spAutoFit/>
           </a:bodyPr>
           <a:lstStyle/>
@@ -4942,7 +4940,7 @@
           <a:noFill/>
         </p:spPr>
         <p:txBody>
-          <a:bodyPr wrap="square" anchor="ctr" lIns="0" rIns="0" tIns="0" bIns="0">
+          <a:bodyPr wrap="square" lIns="0" tIns="0" rIns="0" bIns="0" anchor="ctr">
             <a:spAutoFit/>
           </a:bodyPr>
           <a:lstStyle/>
@@ -4981,7 +4979,7 @@
           <a:noFill/>
         </p:spPr>
         <p:txBody>
-          <a:bodyPr wrap="square" anchor="ctr" lIns="0" rIns="0" tIns="0" bIns="0">
+          <a:bodyPr wrap="square" lIns="0" tIns="0" rIns="0" bIns="0" anchor="ctr">
             <a:spAutoFit/>
           </a:bodyPr>
           <a:lstStyle/>
@@ -5040,12 +5038,12 @@
           </a:fontRef>
         </p:style>
         <p:txBody>
-          <a:bodyPr rtlCol="0" anchor="ctr" lIns="0" rIns="0"/>
+          <a:bodyPr lIns="0" rIns="0" rtlCol="0" anchor="ctr"/>
           <a:lstStyle/>
           <a:p>
             <a:pPr algn="ctr"/>
             <a:r>
-              <a:rPr b="1" sz="1600">
+              <a:rPr sz="1600" b="1">
                 <a:solidFill>
                   <a:srgbClr val="FFFFFF"/>
                 </a:solidFill>
@@ -5073,7 +5071,7 @@
           <a:noFill/>
         </p:spPr>
         <p:txBody>
-          <a:bodyPr wrap="square" anchor="t" lIns="0" rIns="0" tIns="0" bIns="0">
+          <a:bodyPr wrap="square" lIns="0" tIns="0" rIns="0" bIns="0" anchor="t">
             <a:spAutoFit/>
           </a:bodyPr>
           <a:lstStyle/>
@@ -5112,7 +5110,7 @@
           <a:noFill/>
         </p:spPr>
         <p:txBody>
-          <a:bodyPr wrap="square" anchor="t" lIns="0" rIns="0" tIns="0" bIns="0">
+          <a:bodyPr wrap="square" lIns="0" tIns="0" rIns="0" bIns="0" anchor="t">
             <a:spAutoFit/>
           </a:bodyPr>
           <a:lstStyle/>
@@ -5171,12 +5169,12 @@
           </a:fontRef>
         </p:style>
         <p:txBody>
-          <a:bodyPr rtlCol="0" anchor="ctr" lIns="0" rIns="0"/>
+          <a:bodyPr lIns="0" rIns="0" rtlCol="0" anchor="ctr"/>
           <a:lstStyle/>
           <a:p>
             <a:pPr algn="ctr"/>
             <a:r>
-              <a:rPr b="1" sz="1600">
+              <a:rPr sz="1600" b="1">
                 <a:solidFill>
                   <a:srgbClr val="FFFFFF"/>
                 </a:solidFill>
@@ -5204,7 +5202,7 @@
           <a:noFill/>
         </p:spPr>
         <p:txBody>
-          <a:bodyPr wrap="square" anchor="t" lIns="0" rIns="0" tIns="0" bIns="0">
+          <a:bodyPr wrap="square" lIns="0" tIns="0" rIns="0" bIns="0" anchor="t">
             <a:spAutoFit/>
           </a:bodyPr>
           <a:lstStyle/>
@@ -5243,7 +5241,7 @@
           <a:noFill/>
         </p:spPr>
         <p:txBody>
-          <a:bodyPr wrap="square" anchor="t" lIns="0" rIns="0" tIns="0" bIns="0">
+          <a:bodyPr wrap="square" lIns="0" tIns="0" rIns="0" bIns="0" anchor="t">
             <a:spAutoFit/>
           </a:bodyPr>
           <a:lstStyle/>
@@ -5302,12 +5300,12 @@
           </a:fontRef>
         </p:style>
         <p:txBody>
-          <a:bodyPr rtlCol="0" anchor="ctr" lIns="0" rIns="0"/>
+          <a:bodyPr lIns="0" rIns="0" rtlCol="0" anchor="ctr"/>
           <a:lstStyle/>
           <a:p>
             <a:pPr algn="ctr"/>
             <a:r>
-              <a:rPr b="1" sz="1600">
+              <a:rPr sz="1600" b="1">
                 <a:solidFill>
                   <a:srgbClr val="FFFFFF"/>
                 </a:solidFill>
@@ -5335,7 +5333,7 @@
           <a:noFill/>
         </p:spPr>
         <p:txBody>
-          <a:bodyPr wrap="square" anchor="t" lIns="0" rIns="0" tIns="0" bIns="0">
+          <a:bodyPr wrap="square" lIns="0" tIns="0" rIns="0" bIns="0" anchor="t">
             <a:spAutoFit/>
           </a:bodyPr>
           <a:lstStyle/>
@@ -5374,7 +5372,7 @@
           <a:noFill/>
         </p:spPr>
         <p:txBody>
-          <a:bodyPr wrap="square" anchor="t" lIns="0" rIns="0" tIns="0" bIns="0">
+          <a:bodyPr wrap="square" lIns="0" tIns="0" rIns="0" bIns="0" anchor="t">
             <a:spAutoFit/>
           </a:bodyPr>
           <a:lstStyle/>
@@ -5413,7 +5411,7 @@
           <a:noFill/>
         </p:spPr>
         <p:txBody>
-          <a:bodyPr wrap="square" anchor="t" lIns="0" rIns="0" tIns="0" bIns="0">
+          <a:bodyPr wrap="square" lIns="0" tIns="0" rIns="0" bIns="0" anchor="t">
             <a:spAutoFit/>
           </a:bodyPr>
           <a:lstStyle/>
@@ -5452,7 +5450,7 @@
           <a:noFill/>
         </p:spPr>
         <p:txBody>
-          <a:bodyPr wrap="square" anchor="t" lIns="0" rIns="0" tIns="0" bIns="0">
+          <a:bodyPr wrap="square" lIns="0" tIns="0" rIns="0" bIns="0" anchor="t">
             <a:spAutoFit/>
           </a:bodyPr>
           <a:lstStyle/>
@@ -5483,7 +5481,7 @@
 </file>
 
 <file path=ppt/slides/slide12.xml><?xml version="1.0" encoding="utf-8"?>
-<p:sld xmlns:a="http://schemas.openxmlformats.org/drawingml/2006/main" xmlns:p="http://schemas.openxmlformats.org/presentationml/2006/main" xmlns:r="http://schemas.openxmlformats.org/officeDocument/2006/relationships">
+<p:sld xmlns:a="http://schemas.openxmlformats.org/drawingml/2006/main" xmlns:r="http://schemas.openxmlformats.org/officeDocument/2006/relationships" xmlns:p="http://schemas.openxmlformats.org/presentationml/2006/main">
   <p:cSld>
     <p:spTree>
       <p:nvGrpSpPr>
@@ -5491,7 +5489,14 @@
         <p:cNvGrpSpPr/>
         <p:nvPr/>
       </p:nvGrpSpPr>
-      <p:grpSpPr/>
+      <p:grpSpPr>
+        <a:xfrm>
+          <a:off x="0" y="0"/>
+          <a:ext cx="0" cy="0"/>
+          <a:chOff x="0" y="0"/>
+          <a:chExt cx="0" cy="0"/>
+        </a:xfrm>
+      </p:grpSpPr>
       <p:sp>
         <p:nvSpPr>
           <p:cNvPr id="2" name="Rectangle 1"/>
@@ -5533,6 +5538,7 @@
           <a:lstStyle/>
           <a:p>
             <a:pPr algn="ctr"/>
+            <a:endParaRPr/>
           </a:p>
         </p:txBody>
       </p:sp>
@@ -5575,7 +5581,7 @@
           </a:fontRef>
         </p:style>
         <p:txBody>
-          <a:bodyPr rtlCol="0" anchor="ctr" lIns="45720" rIns="45720" tIns="0" bIns="0"/>
+          <a:bodyPr lIns="45720" tIns="0" rIns="45720" bIns="0" rtlCol="0" anchor="ctr"/>
           <a:lstStyle/>
           <a:p>
             <a:pPr algn="ctr"/>
@@ -5608,7 +5614,7 @@
           <a:noFill/>
         </p:spPr>
         <p:txBody>
-          <a:bodyPr wrap="square" anchor="t" lIns="0" rIns="0" tIns="0" bIns="0">
+          <a:bodyPr wrap="square" lIns="0" tIns="0" rIns="0" bIns="0" anchor="t">
             <a:spAutoFit/>
           </a:bodyPr>
           <a:lstStyle/>
@@ -5647,7 +5653,7 @@
           <a:noFill/>
         </p:spPr>
         <p:txBody>
-          <a:bodyPr wrap="square" anchor="t" lIns="0" rIns="0" tIns="0" bIns="0">
+          <a:bodyPr wrap="square" lIns="0" tIns="0" rIns="0" bIns="0" anchor="t">
             <a:spAutoFit/>
           </a:bodyPr>
           <a:lstStyle/>
@@ -5686,7 +5692,7 @@
           <a:noFill/>
         </p:spPr>
         <p:txBody>
-          <a:bodyPr wrap="square" anchor="t" lIns="0" rIns="0" tIns="0" bIns="0">
+          <a:bodyPr wrap="square" lIns="0" tIns="0" rIns="0" bIns="0" anchor="t">
             <a:spAutoFit/>
           </a:bodyPr>
           <a:lstStyle/>
@@ -5734,7 +5740,7 @@
           <a:noFill/>
         </p:spPr>
         <p:txBody>
-          <a:bodyPr wrap="square" anchor="t" lIns="0" rIns="0" tIns="0" bIns="0">
+          <a:bodyPr wrap="square" lIns="0" tIns="0" rIns="0" bIns="0" anchor="t">
             <a:spAutoFit/>
           </a:bodyPr>
           <a:lstStyle/>
@@ -5782,7 +5788,7 @@
           <a:noFill/>
         </p:spPr>
         <p:txBody>
-          <a:bodyPr wrap="square" anchor="t" lIns="0" rIns="0" tIns="0" bIns="0">
+          <a:bodyPr wrap="square" lIns="0" tIns="0" rIns="0" bIns="0" anchor="t">
             <a:spAutoFit/>
           </a:bodyPr>
           <a:lstStyle/>
@@ -5830,7 +5836,7 @@
           <a:noFill/>
         </p:spPr>
         <p:txBody>
-          <a:bodyPr wrap="square" anchor="t" lIns="0" rIns="0" tIns="0" bIns="0">
+          <a:bodyPr wrap="square" lIns="0" tIns="0" rIns="0" bIns="0" anchor="t">
             <a:spAutoFit/>
           </a:bodyPr>
           <a:lstStyle/>
@@ -5896,7 +5902,7 @@
           <a:noFill/>
         </p:spPr>
         <p:txBody>
-          <a:bodyPr wrap="square" anchor="t" lIns="0" rIns="0" tIns="0" bIns="0">
+          <a:bodyPr wrap="square" lIns="0" tIns="0" rIns="0" bIns="0" anchor="t">
             <a:spAutoFit/>
           </a:bodyPr>
           <a:lstStyle/>
@@ -5935,7 +5941,7 @@
           <a:noFill/>
         </p:spPr>
         <p:txBody>
-          <a:bodyPr wrap="square" anchor="t" lIns="0" rIns="0" tIns="0" bIns="0">
+          <a:bodyPr wrap="square" lIns="0" tIns="0" rIns="0" bIns="0" anchor="t">
             <a:spAutoFit/>
           </a:bodyPr>
           <a:lstStyle/>
@@ -5966,7 +5972,7 @@
 </file>
 
 <file path=ppt/slides/slide13.xml><?xml version="1.0" encoding="utf-8"?>
-<p:sld xmlns:a="http://schemas.openxmlformats.org/drawingml/2006/main" xmlns:p="http://schemas.openxmlformats.org/presentationml/2006/main" xmlns:r="http://schemas.openxmlformats.org/officeDocument/2006/relationships">
+<p:sld xmlns:a="http://schemas.openxmlformats.org/drawingml/2006/main" xmlns:r="http://schemas.openxmlformats.org/officeDocument/2006/relationships" xmlns:p="http://schemas.openxmlformats.org/presentationml/2006/main">
   <p:cSld>
     <p:spTree>
       <p:nvGrpSpPr>
@@ -5974,7 +5980,14 @@
         <p:cNvGrpSpPr/>
         <p:nvPr/>
       </p:nvGrpSpPr>
-      <p:grpSpPr/>
+      <p:grpSpPr>
+        <a:xfrm>
+          <a:off x="0" y="0"/>
+          <a:ext cx="0" cy="0"/>
+          <a:chOff x="0" y="0"/>
+          <a:chExt cx="0" cy="0"/>
+        </a:xfrm>
+      </p:grpSpPr>
       <p:sp>
         <p:nvSpPr>
           <p:cNvPr id="2" name="Rectangle 1"/>
@@ -6016,6 +6029,7 @@
           <a:lstStyle/>
           <a:p>
             <a:pPr algn="ctr"/>
+            <a:endParaRPr/>
           </a:p>
         </p:txBody>
       </p:sp>
@@ -6058,7 +6072,7 @@
           </a:fontRef>
         </p:style>
         <p:txBody>
-          <a:bodyPr rtlCol="0" anchor="ctr" lIns="45720" rIns="45720" tIns="0" bIns="0"/>
+          <a:bodyPr lIns="45720" tIns="0" rIns="45720" bIns="0" rtlCol="0" anchor="ctr"/>
           <a:lstStyle/>
           <a:p>
             <a:pPr algn="ctr"/>
@@ -6091,7 +6105,7 @@
           <a:noFill/>
         </p:spPr>
         <p:txBody>
-          <a:bodyPr wrap="square" anchor="t" lIns="0" rIns="0" tIns="0" bIns="0">
+          <a:bodyPr wrap="square" lIns="0" tIns="0" rIns="0" bIns="0" anchor="t">
             <a:spAutoFit/>
           </a:bodyPr>
           <a:lstStyle/>
@@ -6132,8 +6146,20 @@
                 <a:tableStyleId>{5C22544A-7EE6-4342-B048-85BDC9FD1C3A}</a:tableStyleId>
               </a:tblPr>
               <a:tblGrid>
-                <a:gridCol w="3886200"/>
-                <a:gridCol w="3886200"/>
+                <a:gridCol w="3886200">
+                  <a:extLst>
+                    <a:ext uri="{9D8B030D-6E8A-4147-A177-3AD203B41FA5}">
+                      <a16:colId xmlns:a16="http://schemas.microsoft.com/office/drawing/2014/main" val="20000"/>
+                    </a:ext>
+                  </a:extLst>
+                </a:gridCol>
+                <a:gridCol w="3886200">
+                  <a:extLst>
+                    <a:ext uri="{9D8B030D-6E8A-4147-A177-3AD203B41FA5}">
+                      <a16:colId xmlns:a16="http://schemas.microsoft.com/office/drawing/2014/main" val="20001"/>
+                    </a:ext>
+                  </a:extLst>
+                </a:gridCol>
               </a:tblGrid>
               <a:tr h="487680">
                 <a:tc>
@@ -6182,6 +6208,11 @@
                     </a:solidFill>
                   </a:tcPr>
                 </a:tc>
+                <a:extLst>
+                  <a:ext uri="{0D108BD9-81ED-4DB2-BD59-A6C34878D82A}">
+                    <a16:rowId xmlns:a16="http://schemas.microsoft.com/office/drawing/2014/main" val="10000"/>
+                  </a:ext>
+                </a:extLst>
               </a:tr>
               <a:tr h="487680">
                 <a:tc>
@@ -6230,6 +6261,11 @@
                     </a:solidFill>
                   </a:tcPr>
                 </a:tc>
+                <a:extLst>
+                  <a:ext uri="{0D108BD9-81ED-4DB2-BD59-A6C34878D82A}">
+                    <a16:rowId xmlns:a16="http://schemas.microsoft.com/office/drawing/2014/main" val="10001"/>
+                  </a:ext>
+                </a:extLst>
               </a:tr>
               <a:tr h="487680">
                 <a:tc>
@@ -6278,6 +6314,11 @@
                     </a:solidFill>
                   </a:tcPr>
                 </a:tc>
+                <a:extLst>
+                  <a:ext uri="{0D108BD9-81ED-4DB2-BD59-A6C34878D82A}">
+                    <a16:rowId xmlns:a16="http://schemas.microsoft.com/office/drawing/2014/main" val="10002"/>
+                  </a:ext>
+                </a:extLst>
               </a:tr>
             </a:tbl>
           </a:graphicData>
@@ -6300,7 +6341,7 @@
           <a:noFill/>
         </p:spPr>
         <p:txBody>
-          <a:bodyPr wrap="square" anchor="t" lIns="0" rIns="0" tIns="0" bIns="0">
+          <a:bodyPr wrap="square" lIns="0" tIns="0" rIns="0" bIns="0" anchor="t">
             <a:spAutoFit/>
           </a:bodyPr>
           <a:lstStyle/>
@@ -6339,7 +6380,7 @@
           <a:noFill/>
         </p:spPr>
         <p:txBody>
-          <a:bodyPr wrap="square" anchor="t" lIns="0" rIns="0" tIns="0" bIns="0">
+          <a:bodyPr wrap="square" lIns="0" tIns="0" rIns="0" bIns="0" anchor="t">
             <a:spAutoFit/>
           </a:bodyPr>
           <a:lstStyle/>
@@ -6378,7 +6419,7 @@
           <a:noFill/>
         </p:spPr>
         <p:txBody>
-          <a:bodyPr wrap="square" anchor="t" lIns="0" rIns="0" tIns="0" bIns="0">
+          <a:bodyPr wrap="square" lIns="0" tIns="0" rIns="0" bIns="0" anchor="t">
             <a:spAutoFit/>
           </a:bodyPr>
           <a:lstStyle/>
@@ -6417,7 +6458,7 @@
           <a:noFill/>
         </p:spPr>
         <p:txBody>
-          <a:bodyPr wrap="square" anchor="t" lIns="0" rIns="0" tIns="0" bIns="0">
+          <a:bodyPr wrap="square" lIns="0" tIns="0" rIns="0" bIns="0" anchor="t">
             <a:spAutoFit/>
           </a:bodyPr>
           <a:lstStyle/>
@@ -6448,7 +6489,7 @@
 </file>
 
 <file path=ppt/slides/slide14.xml><?xml version="1.0" encoding="utf-8"?>
-<p:sld xmlns:a="http://schemas.openxmlformats.org/drawingml/2006/main" xmlns:p="http://schemas.openxmlformats.org/presentationml/2006/main" xmlns:r="http://schemas.openxmlformats.org/officeDocument/2006/relationships">
+<p:sld xmlns:a="http://schemas.openxmlformats.org/drawingml/2006/main" xmlns:r="http://schemas.openxmlformats.org/officeDocument/2006/relationships" xmlns:p="http://schemas.openxmlformats.org/presentationml/2006/main">
   <p:cSld>
     <p:spTree>
       <p:nvGrpSpPr>
@@ -6456,7 +6497,14 @@
         <p:cNvGrpSpPr/>
         <p:nvPr/>
       </p:nvGrpSpPr>
-      <p:grpSpPr/>
+      <p:grpSpPr>
+        <a:xfrm>
+          <a:off x="0" y="0"/>
+          <a:ext cx="0" cy="0"/>
+          <a:chOff x="0" y="0"/>
+          <a:chExt cx="0" cy="0"/>
+        </a:xfrm>
+      </p:grpSpPr>
       <p:sp>
         <p:nvSpPr>
           <p:cNvPr id="2" name="Rectangle 1"/>
@@ -6498,6 +6546,7 @@
           <a:lstStyle/>
           <a:p>
             <a:pPr algn="ctr"/>
+            <a:endParaRPr/>
           </a:p>
         </p:txBody>
       </p:sp>
@@ -6544,6 +6593,7 @@
           <a:lstStyle/>
           <a:p>
             <a:pPr algn="ctr"/>
+            <a:endParaRPr/>
           </a:p>
         </p:txBody>
       </p:sp>
@@ -6586,7 +6636,7 @@
           </a:fontRef>
         </p:style>
         <p:txBody>
-          <a:bodyPr rtlCol="0" anchor="ctr" lIns="45720" rIns="45720" tIns="0" bIns="0"/>
+          <a:bodyPr lIns="45720" tIns="0" rIns="45720" bIns="0" rtlCol="0" anchor="ctr"/>
           <a:lstStyle/>
           <a:p>
             <a:pPr algn="ctr"/>
@@ -6619,7 +6669,7 @@
           <a:noFill/>
         </p:spPr>
         <p:txBody>
-          <a:bodyPr wrap="square" anchor="t" lIns="0" rIns="0" tIns="0" bIns="0">
+          <a:bodyPr wrap="square" lIns="0" tIns="0" rIns="0" bIns="0" anchor="t">
             <a:spAutoFit/>
           </a:bodyPr>
           <a:lstStyle/>
@@ -6658,7 +6708,7 @@
           <a:noFill/>
         </p:spPr>
         <p:txBody>
-          <a:bodyPr wrap="square" anchor="t" lIns="0" rIns="0" tIns="0" bIns="0">
+          <a:bodyPr wrap="square" lIns="0" tIns="0" rIns="0" bIns="0" anchor="t">
             <a:spAutoFit/>
           </a:bodyPr>
           <a:lstStyle/>
@@ -6697,7 +6747,7 @@
           <a:noFill/>
         </p:spPr>
         <p:txBody>
-          <a:bodyPr wrap="square" anchor="t" lIns="0" rIns="0" tIns="0" bIns="0">
+          <a:bodyPr wrap="square" lIns="0" tIns="0" rIns="0" bIns="0" anchor="t">
             <a:spAutoFit/>
           </a:bodyPr>
           <a:lstStyle/>
@@ -6736,7 +6786,7 @@
           <a:noFill/>
         </p:spPr>
         <p:txBody>
-          <a:bodyPr wrap="square" anchor="t" lIns="0" rIns="0" tIns="0" bIns="0">
+          <a:bodyPr wrap="square" lIns="0" tIns="0" rIns="0" bIns="0" anchor="t">
             <a:spAutoFit/>
           </a:bodyPr>
           <a:lstStyle/>
@@ -6767,7 +6817,7 @@
 </file>
 
 <file path=ppt/slides/slide15.xml><?xml version="1.0" encoding="utf-8"?>
-<p:sld xmlns:a="http://schemas.openxmlformats.org/drawingml/2006/main" xmlns:p="http://schemas.openxmlformats.org/presentationml/2006/main" xmlns:r="http://schemas.openxmlformats.org/officeDocument/2006/relationships">
+<p:sld xmlns:a="http://schemas.openxmlformats.org/drawingml/2006/main" xmlns:r="http://schemas.openxmlformats.org/officeDocument/2006/relationships" xmlns:p="http://schemas.openxmlformats.org/presentationml/2006/main">
   <p:cSld>
     <p:spTree>
       <p:nvGrpSpPr>
@@ -6775,7 +6825,14 @@
         <p:cNvGrpSpPr/>
         <p:nvPr/>
       </p:nvGrpSpPr>
-      <p:grpSpPr/>
+      <p:grpSpPr>
+        <a:xfrm>
+          <a:off x="0" y="0"/>
+          <a:ext cx="0" cy="0"/>
+          <a:chOff x="0" y="0"/>
+          <a:chExt cx="0" cy="0"/>
+        </a:xfrm>
+      </p:grpSpPr>
       <p:sp>
         <p:nvSpPr>
           <p:cNvPr id="2" name="Rectangle 1"/>
@@ -6817,6 +6874,7 @@
           <a:lstStyle/>
           <a:p>
             <a:pPr algn="ctr"/>
+            <a:endParaRPr/>
           </a:p>
         </p:txBody>
       </p:sp>
@@ -6859,7 +6917,7 @@
           </a:fontRef>
         </p:style>
         <p:txBody>
-          <a:bodyPr rtlCol="0" anchor="ctr" lIns="45720" rIns="45720" tIns="0" bIns="0"/>
+          <a:bodyPr lIns="45720" tIns="0" rIns="45720" bIns="0" rtlCol="0" anchor="ctr"/>
           <a:lstStyle/>
           <a:p>
             <a:pPr algn="ctr"/>
@@ -6892,7 +6950,7 @@
           <a:noFill/>
         </p:spPr>
         <p:txBody>
-          <a:bodyPr wrap="square" anchor="t" lIns="0" rIns="0" tIns="0" bIns="0">
+          <a:bodyPr wrap="square" lIns="0" tIns="0" rIns="0" bIns="0" anchor="t">
             <a:spAutoFit/>
           </a:bodyPr>
           <a:lstStyle/>
@@ -6931,7 +6989,7 @@
           <a:noFill/>
         </p:spPr>
         <p:txBody>
-          <a:bodyPr wrap="square" anchor="t" lIns="0" rIns="0" tIns="0" bIns="0">
+          <a:bodyPr wrap="square" lIns="0" tIns="0" rIns="0" bIns="0" anchor="t">
             <a:spAutoFit/>
           </a:bodyPr>
           <a:lstStyle/>
@@ -6976,13 +7034,6 @@
             <a:noFill/>
           </a:ln>
           <a:effectLst/>
-          <a:effectLst>
-            <a:outerShdw blurRad="90000" dist="30000" dir="5400000" rotWithShape="0">
-              <a:srgbClr val="1A1B1F">
-                <a:alpha val="18000"/>
-              </a:srgbClr>
-            </a:outerShdw>
-          </a:effectLst>
         </p:spPr>
         <p:style>
           <a:lnRef idx="1">
@@ -7003,6 +7054,7 @@
           <a:lstStyle/>
           <a:p>
             <a:pPr algn="ctr"/>
+            <a:endParaRPr/>
           </a:p>
         </p:txBody>
       </p:sp>
@@ -7023,7 +7075,7 @@
           <a:noFill/>
         </p:spPr>
         <p:txBody>
-          <a:bodyPr wrap="square" anchor="ctr" lIns="0" rIns="0" tIns="0" bIns="0">
+          <a:bodyPr wrap="square" lIns="0" tIns="0" rIns="0" bIns="0" anchor="ctr">
             <a:spAutoFit/>
           </a:bodyPr>
           <a:lstStyle/>
@@ -7062,7 +7114,7 @@
           <a:noFill/>
         </p:spPr>
         <p:txBody>
-          <a:bodyPr wrap="square" anchor="ctr" lIns="0" rIns="0" tIns="0" bIns="0">
+          <a:bodyPr wrap="square" lIns="0" tIns="0" rIns="0" bIns="0" anchor="ctr">
             <a:spAutoFit/>
           </a:bodyPr>
           <a:lstStyle/>
@@ -7127,6 +7179,7 @@
           <a:lstStyle/>
           <a:p>
             <a:pPr algn="ctr"/>
+            <a:endParaRPr/>
           </a:p>
         </p:txBody>
       </p:sp>
@@ -7147,7 +7200,7 @@
           <a:noFill/>
         </p:spPr>
         <p:txBody>
-          <a:bodyPr wrap="square" anchor="ctr" lIns="0" rIns="0" tIns="0" bIns="0">
+          <a:bodyPr wrap="square" lIns="0" tIns="0" rIns="0" bIns="0" anchor="ctr">
             <a:spAutoFit/>
           </a:bodyPr>
           <a:lstStyle/>
@@ -7208,7 +7261,7 @@
           </a:fontRef>
         </p:style>
         <p:txBody>
-          <a:bodyPr rtlCol="0" anchor="ctr" lIns="0" rIns="0" tIns="0" bIns="0"/>
+          <a:bodyPr lIns="0" tIns="0" rIns="0" bIns="0" rtlCol="0" anchor="ctr"/>
           <a:lstStyle/>
           <a:p>
             <a:pPr algn="ctr"/>
@@ -7241,7 +7294,7 @@
           <a:noFill/>
         </p:spPr>
         <p:txBody>
-          <a:bodyPr wrap="square" anchor="ctr" lIns="0" rIns="0" tIns="0" bIns="0">
+          <a:bodyPr wrap="square" lIns="0" tIns="0" rIns="0" bIns="0" anchor="ctr">
             <a:spAutoFit/>
           </a:bodyPr>
           <a:lstStyle/>
@@ -7280,7 +7333,7 @@
           <a:noFill/>
         </p:spPr>
         <p:txBody>
-          <a:bodyPr wrap="square" anchor="ctr" lIns="0" rIns="0" tIns="0" bIns="0">
+          <a:bodyPr wrap="square" lIns="0" tIns="0" rIns="0" bIns="0" anchor="ctr">
             <a:spAutoFit/>
           </a:bodyPr>
           <a:lstStyle/>
@@ -7345,6 +7398,7 @@
           <a:lstStyle/>
           <a:p>
             <a:pPr algn="ctr"/>
+            <a:endParaRPr/>
           </a:p>
         </p:txBody>
       </p:sp>
@@ -7365,7 +7419,7 @@
           <a:noFill/>
         </p:spPr>
         <p:txBody>
-          <a:bodyPr wrap="square" anchor="ctr" lIns="0" rIns="0" tIns="0" bIns="0">
+          <a:bodyPr wrap="square" lIns="0" tIns="0" rIns="0" bIns="0" anchor="ctr">
             <a:spAutoFit/>
           </a:bodyPr>
           <a:lstStyle/>
@@ -7426,7 +7480,7 @@
           </a:fontRef>
         </p:style>
         <p:txBody>
-          <a:bodyPr rtlCol="0" anchor="ctr" lIns="0" rIns="0" tIns="0" bIns="0"/>
+          <a:bodyPr lIns="0" tIns="0" rIns="0" bIns="0" rtlCol="0" anchor="ctr"/>
           <a:lstStyle/>
           <a:p>
             <a:pPr algn="ctr"/>
@@ -7459,7 +7513,7 @@
           <a:noFill/>
         </p:spPr>
         <p:txBody>
-          <a:bodyPr wrap="square" anchor="ctr" lIns="0" rIns="0" tIns="0" bIns="0">
+          <a:bodyPr wrap="square" lIns="0" tIns="0" rIns="0" bIns="0" anchor="ctr">
             <a:spAutoFit/>
           </a:bodyPr>
           <a:lstStyle/>
@@ -7498,7 +7552,7 @@
           <a:noFill/>
         </p:spPr>
         <p:txBody>
-          <a:bodyPr wrap="square" anchor="ctr" lIns="0" rIns="0" tIns="0" bIns="0">
+          <a:bodyPr wrap="square" lIns="0" tIns="0" rIns="0" bIns="0" anchor="ctr">
             <a:spAutoFit/>
           </a:bodyPr>
           <a:lstStyle/>
@@ -7537,7 +7591,7 @@
           <a:noFill/>
         </p:spPr>
         <p:txBody>
-          <a:bodyPr wrap="square" anchor="ctr" lIns="0" rIns="0" tIns="0" bIns="0">
+          <a:bodyPr wrap="square" lIns="0" tIns="0" rIns="0" bIns="0" anchor="ctr">
             <a:spAutoFit/>
           </a:bodyPr>
           <a:lstStyle/>
@@ -7576,7 +7630,7 @@
           <a:noFill/>
         </p:spPr>
         <p:txBody>
-          <a:bodyPr wrap="square" anchor="ctr" lIns="0" rIns="0" tIns="0" bIns="0">
+          <a:bodyPr wrap="square" lIns="0" tIns="0" rIns="0" bIns="0" anchor="ctr">
             <a:spAutoFit/>
           </a:bodyPr>
           <a:lstStyle/>
@@ -7641,6 +7695,7 @@
           <a:lstStyle/>
           <a:p>
             <a:pPr algn="ctr"/>
+            <a:endParaRPr/>
           </a:p>
         </p:txBody>
       </p:sp>
@@ -7661,7 +7716,7 @@
           <a:noFill/>
         </p:spPr>
         <p:txBody>
-          <a:bodyPr wrap="square" anchor="ctr" lIns="0" rIns="0" tIns="0" bIns="0">
+          <a:bodyPr wrap="square" lIns="0" tIns="0" rIns="0" bIns="0" anchor="ctr">
             <a:spAutoFit/>
           </a:bodyPr>
           <a:lstStyle/>
@@ -7722,7 +7777,7 @@
           </a:fontRef>
         </p:style>
         <p:txBody>
-          <a:bodyPr rtlCol="0" anchor="ctr" lIns="0" rIns="0" tIns="0" bIns="0"/>
+          <a:bodyPr lIns="0" tIns="0" rIns="0" bIns="0" rtlCol="0" anchor="ctr"/>
           <a:lstStyle/>
           <a:p>
             <a:pPr algn="ctr"/>
@@ -7755,7 +7810,7 @@
           <a:noFill/>
         </p:spPr>
         <p:txBody>
-          <a:bodyPr wrap="square" anchor="ctr" lIns="0" rIns="0" tIns="0" bIns="0">
+          <a:bodyPr wrap="square" lIns="0" tIns="0" rIns="0" bIns="0" anchor="ctr">
             <a:spAutoFit/>
           </a:bodyPr>
           <a:lstStyle/>
@@ -7794,7 +7849,7 @@
           <a:noFill/>
         </p:spPr>
         <p:txBody>
-          <a:bodyPr wrap="square" anchor="ctr" lIns="0" rIns="0" tIns="0" bIns="0">
+          <a:bodyPr wrap="square" lIns="0" tIns="0" rIns="0" bIns="0" anchor="ctr">
             <a:spAutoFit/>
           </a:bodyPr>
           <a:lstStyle/>
@@ -7833,7 +7888,7 @@
           <a:noFill/>
         </p:spPr>
         <p:txBody>
-          <a:bodyPr wrap="square" anchor="ctr" lIns="0" rIns="0" tIns="0" bIns="0">
+          <a:bodyPr wrap="square" lIns="0" tIns="0" rIns="0" bIns="0" anchor="ctr">
             <a:spAutoFit/>
           </a:bodyPr>
           <a:lstStyle/>
@@ -7892,12 +7947,12 @@
           </a:fontRef>
         </p:style>
         <p:txBody>
-          <a:bodyPr rtlCol="0" anchor="ctr" lIns="0" rIns="0"/>
+          <a:bodyPr lIns="0" rIns="0" rtlCol="0" anchor="ctr"/>
           <a:lstStyle/>
           <a:p>
             <a:pPr algn="ctr"/>
             <a:r>
-              <a:rPr b="1" sz="1600">
+              <a:rPr sz="1600" b="1">
                 <a:solidFill>
                   <a:srgbClr val="FFFFFF"/>
                 </a:solidFill>
@@ -7925,7 +7980,7 @@
           <a:noFill/>
         </p:spPr>
         <p:txBody>
-          <a:bodyPr wrap="square" anchor="t" lIns="0" rIns="0" tIns="0" bIns="0">
+          <a:bodyPr wrap="square" lIns="0" tIns="0" rIns="0" bIns="0" anchor="t">
             <a:spAutoFit/>
           </a:bodyPr>
           <a:lstStyle/>
@@ -7964,7 +8019,7 @@
           <a:noFill/>
         </p:spPr>
         <p:txBody>
-          <a:bodyPr wrap="square" anchor="t" lIns="0" rIns="0" tIns="0" bIns="0">
+          <a:bodyPr wrap="square" lIns="0" tIns="0" rIns="0" bIns="0" anchor="t">
             <a:spAutoFit/>
           </a:bodyPr>
           <a:lstStyle/>
@@ -8023,12 +8078,12 @@
           </a:fontRef>
         </p:style>
         <p:txBody>
-          <a:bodyPr rtlCol="0" anchor="ctr" lIns="0" rIns="0"/>
+          <a:bodyPr lIns="0" rIns="0" rtlCol="0" anchor="ctr"/>
           <a:lstStyle/>
           <a:p>
             <a:pPr algn="ctr"/>
             <a:r>
-              <a:rPr b="1" sz="1600">
+              <a:rPr sz="1600" b="1">
                 <a:solidFill>
                   <a:srgbClr val="FFFFFF"/>
                 </a:solidFill>
@@ -8056,7 +8111,7 @@
           <a:noFill/>
         </p:spPr>
         <p:txBody>
-          <a:bodyPr wrap="square" anchor="t" lIns="0" rIns="0" tIns="0" bIns="0">
+          <a:bodyPr wrap="square" lIns="0" tIns="0" rIns="0" bIns="0" anchor="t">
             <a:spAutoFit/>
           </a:bodyPr>
           <a:lstStyle/>
@@ -8095,7 +8150,7 @@
           <a:noFill/>
         </p:spPr>
         <p:txBody>
-          <a:bodyPr wrap="square" anchor="t" lIns="0" rIns="0" tIns="0" bIns="0">
+          <a:bodyPr wrap="square" lIns="0" tIns="0" rIns="0" bIns="0" anchor="t">
             <a:spAutoFit/>
           </a:bodyPr>
           <a:lstStyle/>
@@ -8154,12 +8209,12 @@
           </a:fontRef>
         </p:style>
         <p:txBody>
-          <a:bodyPr rtlCol="0" anchor="ctr" lIns="0" rIns="0"/>
+          <a:bodyPr lIns="0" rIns="0" rtlCol="0" anchor="ctr"/>
           <a:lstStyle/>
           <a:p>
             <a:pPr algn="ctr"/>
             <a:r>
-              <a:rPr b="1" sz="1600">
+              <a:rPr sz="1600" b="1">
                 <a:solidFill>
                   <a:srgbClr val="FFFFFF"/>
                 </a:solidFill>
@@ -8187,7 +8242,7 @@
           <a:noFill/>
         </p:spPr>
         <p:txBody>
-          <a:bodyPr wrap="square" anchor="t" lIns="0" rIns="0" tIns="0" bIns="0">
+          <a:bodyPr wrap="square" lIns="0" tIns="0" rIns="0" bIns="0" anchor="t">
             <a:spAutoFit/>
           </a:bodyPr>
           <a:lstStyle/>
@@ -8218,24 +8273,37 @@
         <p:spPr>
           <a:xfrm>
             <a:off x="7763256" y="4315968"/>
-            <a:ext cx="3895344" cy="685800"/>
-          </a:xfrm>
-          <a:prstGeom prst="rect">
-            <a:avLst/>
-          </a:prstGeom>
-          <a:noFill/>
-        </p:spPr>
-        <p:txBody>
-          <a:bodyPr wrap="square" anchor="t" lIns="0" rIns="0" tIns="0" bIns="0">
-            <a:spAutoFit/>
-          </a:bodyPr>
-          <a:lstStyle/>
-          <a:p>
-            <a:pPr algn="l">
+            <a:ext cx="3895344" cy="728084"/>
+          </a:xfrm>
+          <a:prstGeom prst="rect">
+            <a:avLst/>
+          </a:prstGeom>
+          <a:noFill/>
+        </p:spPr>
+        <p:txBody>
+          <a:bodyPr wrap="square" lIns="0" tIns="0" rIns="0" bIns="0" anchor="t">
+            <a:spAutoFit/>
+          </a:bodyPr>
+          <a:lstStyle/>
+          <a:p>
+            <a:pPr>
               <a:lnSpc>
                 <a:spcPct val="115000"/>
               </a:lnSpc>
             </a:pPr>
+            <a:endParaRPr lang="en-US" sz="1400" dirty="0">
+              <a:solidFill>
+                <a:srgbClr val="1A1B1F"/>
+              </a:solidFill>
+              <a:latin typeface="Montserrat"/>
+            </a:endParaRPr>
+          </a:p>
+          <a:p>
+            <a:pPr algn="l">
+              <a:lnSpc>
+                <a:spcPct val="114999"/>
+              </a:lnSpc>
+            </a:pPr>
             <a:r>
               <a:rPr sz="1400" b="0" i="0">
                 <a:solidFill>
@@ -8245,6 +8313,7 @@
               </a:rPr>
               <a:t>Same Enforce mode — the request is rejected, not just reported.</a:t>
             </a:r>
+            <a:endParaRPr/>
           </a:p>
         </p:txBody>
       </p:sp>
@@ -8265,7 +8334,7 @@
           <a:noFill/>
         </p:spPr>
         <p:txBody>
-          <a:bodyPr wrap="square" anchor="t" lIns="0" rIns="0" tIns="0" bIns="0">
+          <a:bodyPr wrap="square" lIns="0" tIns="0" rIns="0" bIns="0" anchor="t">
             <a:spAutoFit/>
           </a:bodyPr>
           <a:lstStyle/>
@@ -8304,7 +8373,7 @@
           <a:noFill/>
         </p:spPr>
         <p:txBody>
-          <a:bodyPr wrap="square" anchor="t" lIns="0" rIns="0" tIns="0" bIns="0">
+          <a:bodyPr wrap="square" lIns="0" tIns="0" rIns="0" bIns="0" anchor="t">
             <a:spAutoFit/>
           </a:bodyPr>
           <a:lstStyle/>
@@ -8335,7 +8404,7 @@
 </file>
 
 <file path=ppt/slides/slide16.xml><?xml version="1.0" encoding="utf-8"?>
-<p:sld xmlns:a="http://schemas.openxmlformats.org/drawingml/2006/main" xmlns:p="http://schemas.openxmlformats.org/presentationml/2006/main" xmlns:r="http://schemas.openxmlformats.org/officeDocument/2006/relationships">
+<p:sld xmlns:a="http://schemas.openxmlformats.org/drawingml/2006/main" xmlns:r="http://schemas.openxmlformats.org/officeDocument/2006/relationships" xmlns:p="http://schemas.openxmlformats.org/presentationml/2006/main">
   <p:cSld>
     <p:spTree>
       <p:nvGrpSpPr>
@@ -8343,7 +8412,14 @@
         <p:cNvGrpSpPr/>
         <p:nvPr/>
       </p:nvGrpSpPr>
-      <p:grpSpPr/>
+      <p:grpSpPr>
+        <a:xfrm>
+          <a:off x="0" y="0"/>
+          <a:ext cx="0" cy="0"/>
+          <a:chOff x="0" y="0"/>
+          <a:chExt cx="0" cy="0"/>
+        </a:xfrm>
+      </p:grpSpPr>
       <p:sp>
         <p:nvSpPr>
           <p:cNvPr id="2" name="Rectangle 1"/>
@@ -8385,6 +8461,7 @@
           <a:lstStyle/>
           <a:p>
             <a:pPr algn="ctr"/>
+            <a:endParaRPr/>
           </a:p>
         </p:txBody>
       </p:sp>
@@ -8427,7 +8504,7 @@
           </a:fontRef>
         </p:style>
         <p:txBody>
-          <a:bodyPr rtlCol="0" anchor="ctr" lIns="45720" rIns="45720" tIns="0" bIns="0"/>
+          <a:bodyPr lIns="45720" tIns="0" rIns="45720" bIns="0" rtlCol="0" anchor="ctr"/>
           <a:lstStyle/>
           <a:p>
             <a:pPr algn="ctr"/>
@@ -8460,7 +8537,7 @@
           <a:noFill/>
         </p:spPr>
         <p:txBody>
-          <a:bodyPr wrap="square" anchor="t" lIns="0" rIns="0" tIns="0" bIns="0">
+          <a:bodyPr wrap="square" lIns="0" tIns="0" rIns="0" bIns="0" anchor="t">
             <a:spAutoFit/>
           </a:bodyPr>
           <a:lstStyle/>
@@ -8499,7 +8576,7 @@
           <a:noFill/>
         </p:spPr>
         <p:txBody>
-          <a:bodyPr wrap="square" anchor="t" lIns="0" rIns="0" tIns="0" bIns="0">
+          <a:bodyPr wrap="square" lIns="0" tIns="0" rIns="0" bIns="0" anchor="t">
             <a:spAutoFit/>
           </a:bodyPr>
           <a:lstStyle/>
@@ -8538,7 +8615,7 @@
           <a:noFill/>
         </p:spPr>
         <p:txBody>
-          <a:bodyPr wrap="square" anchor="t" lIns="0" rIns="0" tIns="0" bIns="0">
+          <a:bodyPr wrap="square" lIns="0" tIns="0" rIns="0" bIns="0" anchor="t">
             <a:spAutoFit/>
           </a:bodyPr>
           <a:lstStyle/>
@@ -8586,7 +8663,7 @@
           <a:noFill/>
         </p:spPr>
         <p:txBody>
-          <a:bodyPr wrap="square" anchor="t" lIns="0" rIns="0" tIns="0" bIns="0">
+          <a:bodyPr wrap="square" lIns="0" tIns="0" rIns="0" bIns="0" anchor="t">
             <a:spAutoFit/>
           </a:bodyPr>
           <a:lstStyle/>
@@ -8634,7 +8711,7 @@
           <a:noFill/>
         </p:spPr>
         <p:txBody>
-          <a:bodyPr wrap="square" anchor="t" lIns="0" rIns="0" tIns="0" bIns="0">
+          <a:bodyPr wrap="square" lIns="0" tIns="0" rIns="0" bIns="0" anchor="t">
             <a:spAutoFit/>
           </a:bodyPr>
           <a:lstStyle/>
@@ -8700,7 +8777,7 @@
           <a:noFill/>
         </p:spPr>
         <p:txBody>
-          <a:bodyPr wrap="square" anchor="t" lIns="0" rIns="0" tIns="0" bIns="0">
+          <a:bodyPr wrap="square" lIns="0" tIns="0" rIns="0" bIns="0" anchor="t">
             <a:spAutoFit/>
           </a:bodyPr>
           <a:lstStyle/>
@@ -8739,7 +8816,7 @@
           <a:noFill/>
         </p:spPr>
         <p:txBody>
-          <a:bodyPr wrap="square" anchor="t" lIns="0" rIns="0" tIns="0" bIns="0">
+          <a:bodyPr wrap="square" lIns="0" tIns="0" rIns="0" bIns="0" anchor="t">
             <a:spAutoFit/>
           </a:bodyPr>
           <a:lstStyle/>
@@ -8778,7 +8855,7 @@
           <a:noFill/>
         </p:spPr>
         <p:txBody>
-          <a:bodyPr wrap="square" anchor="t" lIns="0" rIns="0" tIns="0" bIns="0">
+          <a:bodyPr wrap="square" lIns="0" tIns="0" rIns="0" bIns="0" anchor="t">
             <a:spAutoFit/>
           </a:bodyPr>
           <a:lstStyle/>
@@ -8809,7 +8886,7 @@
 </file>
 
 <file path=ppt/slides/slide17.xml><?xml version="1.0" encoding="utf-8"?>
-<p:sld xmlns:a="http://schemas.openxmlformats.org/drawingml/2006/main" xmlns:p="http://schemas.openxmlformats.org/presentationml/2006/main" xmlns:r="http://schemas.openxmlformats.org/officeDocument/2006/relationships">
+<p:sld xmlns:a="http://schemas.openxmlformats.org/drawingml/2006/main" xmlns:r="http://schemas.openxmlformats.org/officeDocument/2006/relationships" xmlns:p="http://schemas.openxmlformats.org/presentationml/2006/main">
   <p:cSld>
     <p:spTree>
       <p:nvGrpSpPr>
@@ -8817,7 +8894,14 @@
         <p:cNvGrpSpPr/>
         <p:nvPr/>
       </p:nvGrpSpPr>
-      <p:grpSpPr/>
+      <p:grpSpPr>
+        <a:xfrm>
+          <a:off x="0" y="0"/>
+          <a:ext cx="0" cy="0"/>
+          <a:chOff x="0" y="0"/>
+          <a:chExt cx="0" cy="0"/>
+        </a:xfrm>
+      </p:grpSpPr>
       <p:sp>
         <p:nvSpPr>
           <p:cNvPr id="2" name="Rectangle 1"/>
@@ -8859,6 +8943,7 @@
           <a:lstStyle/>
           <a:p>
             <a:pPr algn="ctr"/>
+            <a:endParaRPr/>
           </a:p>
         </p:txBody>
       </p:sp>
@@ -8905,6 +8990,7 @@
           <a:lstStyle/>
           <a:p>
             <a:pPr algn="ctr"/>
+            <a:endParaRPr/>
           </a:p>
         </p:txBody>
       </p:sp>
@@ -8947,7 +9033,7 @@
           </a:fontRef>
         </p:style>
         <p:txBody>
-          <a:bodyPr rtlCol="0" anchor="ctr" lIns="45720" rIns="45720" tIns="0" bIns="0"/>
+          <a:bodyPr lIns="45720" tIns="0" rIns="45720" bIns="0" rtlCol="0" anchor="ctr"/>
           <a:lstStyle/>
           <a:p>
             <a:pPr algn="ctr"/>
@@ -8980,7 +9066,7 @@
           <a:noFill/>
         </p:spPr>
         <p:txBody>
-          <a:bodyPr wrap="square" anchor="t" lIns="0" rIns="0" tIns="0" bIns="0">
+          <a:bodyPr wrap="square" lIns="0" tIns="0" rIns="0" bIns="0" anchor="t">
             <a:spAutoFit/>
           </a:bodyPr>
           <a:lstStyle/>
@@ -9019,7 +9105,7 @@
           <a:noFill/>
         </p:spPr>
         <p:txBody>
-          <a:bodyPr wrap="square" anchor="t" lIns="0" rIns="0" tIns="0" bIns="0">
+          <a:bodyPr wrap="square" lIns="0" tIns="0" rIns="0" bIns="0" anchor="t">
             <a:spAutoFit/>
           </a:bodyPr>
           <a:lstStyle/>
@@ -9058,7 +9144,7 @@
           <a:noFill/>
         </p:spPr>
         <p:txBody>
-          <a:bodyPr wrap="square" anchor="t" lIns="0" rIns="0" tIns="0" bIns="0">
+          <a:bodyPr wrap="square" lIns="0" tIns="0" rIns="0" bIns="0" anchor="t">
             <a:spAutoFit/>
           </a:bodyPr>
           <a:lstStyle/>
@@ -9097,7 +9183,7 @@
           <a:noFill/>
         </p:spPr>
         <p:txBody>
-          <a:bodyPr wrap="square" anchor="t" lIns="0" rIns="0" tIns="0" bIns="0">
+          <a:bodyPr wrap="square" lIns="0" tIns="0" rIns="0" bIns="0" anchor="t">
             <a:spAutoFit/>
           </a:bodyPr>
           <a:lstStyle/>
@@ -9128,7 +9214,7 @@
 </file>
 
 <file path=ppt/slides/slide18.xml><?xml version="1.0" encoding="utf-8"?>
-<p:sld xmlns:a="http://schemas.openxmlformats.org/drawingml/2006/main" xmlns:p="http://schemas.openxmlformats.org/presentationml/2006/main" xmlns:r="http://schemas.openxmlformats.org/officeDocument/2006/relationships">
+<p:sld xmlns:a="http://schemas.openxmlformats.org/drawingml/2006/main" xmlns:r="http://schemas.openxmlformats.org/officeDocument/2006/relationships" xmlns:p="http://schemas.openxmlformats.org/presentationml/2006/main">
   <p:cSld>
     <p:spTree>
       <p:nvGrpSpPr>
@@ -9136,7 +9222,14 @@
         <p:cNvGrpSpPr/>
         <p:nvPr/>
       </p:nvGrpSpPr>
-      <p:grpSpPr/>
+      <p:grpSpPr>
+        <a:xfrm>
+          <a:off x="0" y="0"/>
+          <a:ext cx="0" cy="0"/>
+          <a:chOff x="0" y="0"/>
+          <a:chExt cx="0" cy="0"/>
+        </a:xfrm>
+      </p:grpSpPr>
       <p:sp>
         <p:nvSpPr>
           <p:cNvPr id="2" name="Rectangle 1"/>
@@ -9178,6 +9271,7 @@
           <a:lstStyle/>
           <a:p>
             <a:pPr algn="ctr"/>
+            <a:endParaRPr/>
           </a:p>
         </p:txBody>
       </p:sp>
@@ -9220,7 +9314,7 @@
           </a:fontRef>
         </p:style>
         <p:txBody>
-          <a:bodyPr rtlCol="0" anchor="ctr" lIns="45720" rIns="45720" tIns="0" bIns="0"/>
+          <a:bodyPr lIns="45720" tIns="0" rIns="45720" bIns="0" rtlCol="0" anchor="ctr"/>
           <a:lstStyle/>
           <a:p>
             <a:pPr algn="ctr"/>
@@ -9253,7 +9347,7 @@
           <a:noFill/>
         </p:spPr>
         <p:txBody>
-          <a:bodyPr wrap="square" anchor="t" lIns="0" rIns="0" tIns="0" bIns="0">
+          <a:bodyPr wrap="square" lIns="0" tIns="0" rIns="0" bIns="0" anchor="t">
             <a:spAutoFit/>
           </a:bodyPr>
           <a:lstStyle/>
@@ -9292,7 +9386,7 @@
           <a:noFill/>
         </p:spPr>
         <p:txBody>
-          <a:bodyPr wrap="square" anchor="t" lIns="0" rIns="0" tIns="0" bIns="0">
+          <a:bodyPr wrap="square" lIns="0" tIns="0" rIns="0" bIns="0" anchor="t">
             <a:spAutoFit/>
           </a:bodyPr>
           <a:lstStyle/>
@@ -9337,13 +9431,6 @@
             <a:noFill/>
           </a:ln>
           <a:effectLst/>
-          <a:effectLst>
-            <a:outerShdw blurRad="90000" dist="30000" dir="5400000" rotWithShape="0">
-              <a:srgbClr val="1A1B1F">
-                <a:alpha val="18000"/>
-              </a:srgbClr>
-            </a:outerShdw>
-          </a:effectLst>
         </p:spPr>
         <p:style>
           <a:lnRef idx="1">
@@ -9364,6 +9451,7 @@
           <a:lstStyle/>
           <a:p>
             <a:pPr algn="ctr"/>
+            <a:endParaRPr/>
           </a:p>
         </p:txBody>
       </p:sp>
@@ -9410,6 +9498,7 @@
           <a:lstStyle/>
           <a:p>
             <a:pPr algn="ctr"/>
+            <a:endParaRPr/>
           </a:p>
         </p:txBody>
       </p:sp>
@@ -9430,7 +9519,7 @@
           <a:noFill/>
         </p:spPr>
         <p:txBody>
-          <a:bodyPr wrap="square" anchor="ctr" lIns="0" rIns="0" tIns="0" bIns="0">
+          <a:bodyPr wrap="square" lIns="0" tIns="0" rIns="0" bIns="0" anchor="ctr">
             <a:spAutoFit/>
           </a:bodyPr>
           <a:lstStyle/>
@@ -9491,7 +9580,7 @@
           </a:fontRef>
         </p:style>
         <p:txBody>
-          <a:bodyPr rtlCol="0" anchor="ctr" lIns="0" rIns="0" tIns="0" bIns="0"/>
+          <a:bodyPr lIns="0" tIns="0" rIns="0" bIns="0" rtlCol="0" anchor="ctr"/>
           <a:lstStyle/>
           <a:p>
             <a:pPr algn="ctr"/>
@@ -9524,7 +9613,7 @@
           <a:noFill/>
         </p:spPr>
         <p:txBody>
-          <a:bodyPr wrap="square" anchor="ctr" lIns="0" rIns="0" tIns="0" bIns="0">
+          <a:bodyPr wrap="square" lIns="0" tIns="0" rIns="0" bIns="0" anchor="ctr">
             <a:spAutoFit/>
           </a:bodyPr>
           <a:lstStyle/>
@@ -9563,7 +9652,7 @@
           <a:noFill/>
         </p:spPr>
         <p:txBody>
-          <a:bodyPr wrap="square" anchor="ctr" lIns="0" rIns="0" tIns="0" bIns="0">
+          <a:bodyPr wrap="square" lIns="0" tIns="0" rIns="0" bIns="0" anchor="ctr">
             <a:spAutoFit/>
           </a:bodyPr>
           <a:lstStyle/>
@@ -9602,7 +9691,7 @@
           <a:noFill/>
         </p:spPr>
         <p:txBody>
-          <a:bodyPr wrap="square" anchor="ctr" lIns="0" rIns="0" tIns="0" bIns="0">
+          <a:bodyPr wrap="square" lIns="0" tIns="0" rIns="0" bIns="0" anchor="ctr">
             <a:spAutoFit/>
           </a:bodyPr>
           <a:lstStyle/>
@@ -9641,7 +9730,7 @@
           <a:noFill/>
         </p:spPr>
         <p:txBody>
-          <a:bodyPr wrap="square" anchor="ctr" lIns="0" rIns="0" tIns="0" bIns="0">
+          <a:bodyPr wrap="square" lIns="0" tIns="0" rIns="0" bIns="0" anchor="ctr">
             <a:spAutoFit/>
           </a:bodyPr>
           <a:lstStyle/>
@@ -9706,6 +9795,7 @@
           <a:lstStyle/>
           <a:p>
             <a:pPr algn="ctr"/>
+            <a:endParaRPr/>
           </a:p>
         </p:txBody>
       </p:sp>
@@ -9726,7 +9816,7 @@
           <a:noFill/>
         </p:spPr>
         <p:txBody>
-          <a:bodyPr wrap="square" anchor="ctr" lIns="0" rIns="0" tIns="0" bIns="0">
+          <a:bodyPr wrap="square" lIns="0" tIns="0" rIns="0" bIns="0" anchor="ctr">
             <a:spAutoFit/>
           </a:bodyPr>
           <a:lstStyle/>
@@ -9787,7 +9877,7 @@
           </a:fontRef>
         </p:style>
         <p:txBody>
-          <a:bodyPr rtlCol="0" anchor="ctr" lIns="0" rIns="0" tIns="0" bIns="0"/>
+          <a:bodyPr lIns="0" tIns="0" rIns="0" bIns="0" rtlCol="0" anchor="ctr"/>
           <a:lstStyle/>
           <a:p>
             <a:pPr algn="ctr"/>
@@ -9820,7 +9910,7 @@
           <a:noFill/>
         </p:spPr>
         <p:txBody>
-          <a:bodyPr wrap="square" anchor="ctr" lIns="0" rIns="0" tIns="0" bIns="0">
+          <a:bodyPr wrap="square" lIns="0" tIns="0" rIns="0" bIns="0" anchor="ctr">
             <a:spAutoFit/>
           </a:bodyPr>
           <a:lstStyle/>
@@ -9859,7 +9949,7 @@
           <a:noFill/>
         </p:spPr>
         <p:txBody>
-          <a:bodyPr wrap="square" anchor="ctr" lIns="0" rIns="0" tIns="0" bIns="0">
+          <a:bodyPr wrap="square" lIns="0" tIns="0" rIns="0" bIns="0" anchor="ctr">
             <a:spAutoFit/>
           </a:bodyPr>
           <a:lstStyle/>
@@ -9898,7 +9988,7 @@
           <a:noFill/>
         </p:spPr>
         <p:txBody>
-          <a:bodyPr wrap="square" anchor="ctr" lIns="0" rIns="0" tIns="0" bIns="0">
+          <a:bodyPr wrap="square" lIns="0" tIns="0" rIns="0" bIns="0" anchor="ctr">
             <a:spAutoFit/>
           </a:bodyPr>
           <a:lstStyle/>
@@ -9937,7 +10027,7 @@
           <a:noFill/>
         </p:spPr>
         <p:txBody>
-          <a:bodyPr wrap="square" anchor="ctr" lIns="0" rIns="0" tIns="0" bIns="0">
+          <a:bodyPr wrap="square" lIns="0" tIns="0" rIns="0" bIns="0" anchor="ctr">
             <a:spAutoFit/>
           </a:bodyPr>
           <a:lstStyle/>
@@ -9976,7 +10066,7 @@
           <a:noFill/>
         </p:spPr>
         <p:txBody>
-          <a:bodyPr wrap="square" anchor="ctr" lIns="0" rIns="0" tIns="0" bIns="0">
+          <a:bodyPr wrap="square" lIns="0" tIns="0" rIns="0" bIns="0" anchor="ctr">
             <a:spAutoFit/>
           </a:bodyPr>
           <a:lstStyle/>
@@ -10015,7 +10105,7 @@
           <a:noFill/>
         </p:spPr>
         <p:txBody>
-          <a:bodyPr wrap="square" anchor="ctr" lIns="0" rIns="0" tIns="0" bIns="0">
+          <a:bodyPr wrap="square" lIns="0" tIns="0" rIns="0" bIns="0" anchor="ctr">
             <a:spAutoFit/>
           </a:bodyPr>
           <a:lstStyle/>
@@ -10054,7 +10144,7 @@
           <a:noFill/>
         </p:spPr>
         <p:txBody>
-          <a:bodyPr wrap="square" anchor="ctr" lIns="0" rIns="0" tIns="0" bIns="0">
+          <a:bodyPr wrap="square" lIns="0" tIns="0" rIns="0" bIns="0" anchor="ctr">
             <a:spAutoFit/>
           </a:bodyPr>
           <a:lstStyle/>
@@ -10119,6 +10209,7 @@
           <a:lstStyle/>
           <a:p>
             <a:pPr algn="ctr"/>
+            <a:endParaRPr/>
           </a:p>
         </p:txBody>
       </p:sp>
@@ -10139,7 +10230,7 @@
           <a:noFill/>
         </p:spPr>
         <p:txBody>
-          <a:bodyPr wrap="square" anchor="ctr" lIns="0" rIns="0" tIns="0" bIns="0">
+          <a:bodyPr wrap="square" lIns="0" tIns="0" rIns="0" bIns="0" anchor="ctr">
             <a:spAutoFit/>
           </a:bodyPr>
           <a:lstStyle/>
@@ -10200,7 +10291,7 @@
           </a:fontRef>
         </p:style>
         <p:txBody>
-          <a:bodyPr rtlCol="0" anchor="ctr" lIns="0" rIns="0" tIns="0" bIns="0"/>
+          <a:bodyPr lIns="0" tIns="0" rIns="0" bIns="0" rtlCol="0" anchor="ctr"/>
           <a:lstStyle/>
           <a:p>
             <a:pPr algn="ctr"/>
@@ -10233,7 +10324,7 @@
           <a:noFill/>
         </p:spPr>
         <p:txBody>
-          <a:bodyPr wrap="square" anchor="ctr" lIns="0" rIns="0" tIns="0" bIns="0">
+          <a:bodyPr wrap="square" lIns="0" tIns="0" rIns="0" bIns="0" anchor="ctr">
             <a:spAutoFit/>
           </a:bodyPr>
           <a:lstStyle/>
@@ -10272,7 +10363,7 @@
           <a:noFill/>
         </p:spPr>
         <p:txBody>
-          <a:bodyPr wrap="square" anchor="ctr" lIns="0" rIns="0" tIns="0" bIns="0">
+          <a:bodyPr wrap="square" lIns="0" tIns="0" rIns="0" bIns="0" anchor="ctr">
             <a:spAutoFit/>
           </a:bodyPr>
           <a:lstStyle/>
@@ -10311,7 +10402,7 @@
           <a:noFill/>
         </p:spPr>
         <p:txBody>
-          <a:bodyPr wrap="square" anchor="ctr" lIns="0" rIns="0" tIns="0" bIns="0">
+          <a:bodyPr wrap="square" lIns="0" tIns="0" rIns="0" bIns="0" anchor="ctr">
             <a:spAutoFit/>
           </a:bodyPr>
           <a:lstStyle/>
@@ -10350,7 +10441,7 @@
           <a:noFill/>
         </p:spPr>
         <p:txBody>
-          <a:bodyPr wrap="square" anchor="ctr" lIns="0" rIns="0" tIns="0" bIns="0">
+          <a:bodyPr wrap="square" lIns="0" tIns="0" rIns="0" bIns="0" anchor="ctr">
             <a:spAutoFit/>
           </a:bodyPr>
           <a:lstStyle/>
@@ -10389,7 +10480,7 @@
           <a:noFill/>
         </p:spPr>
         <p:txBody>
-          <a:bodyPr wrap="square" anchor="ctr" lIns="0" rIns="0" tIns="0" bIns="0">
+          <a:bodyPr wrap="square" lIns="0" tIns="0" rIns="0" bIns="0" anchor="ctr">
             <a:spAutoFit/>
           </a:bodyPr>
           <a:lstStyle/>
@@ -10428,7 +10519,7 @@
           <a:noFill/>
         </p:spPr>
         <p:txBody>
-          <a:bodyPr wrap="square" anchor="ctr" lIns="0" rIns="0" tIns="0" bIns="0">
+          <a:bodyPr wrap="square" lIns="0" tIns="0" rIns="0" bIns="0" anchor="ctr">
             <a:spAutoFit/>
           </a:bodyPr>
           <a:lstStyle/>
@@ -10487,12 +10578,12 @@
           </a:fontRef>
         </p:style>
         <p:txBody>
-          <a:bodyPr rtlCol="0" anchor="ctr" lIns="0" rIns="0"/>
+          <a:bodyPr lIns="0" rIns="0" rtlCol="0" anchor="ctr"/>
           <a:lstStyle/>
           <a:p>
             <a:pPr algn="ctr"/>
             <a:r>
-              <a:rPr b="1" sz="1600">
+              <a:rPr sz="1600" b="1">
                 <a:solidFill>
                   <a:srgbClr val="FFFFFF"/>
                 </a:solidFill>
@@ -10520,7 +10611,7 @@
           <a:noFill/>
         </p:spPr>
         <p:txBody>
-          <a:bodyPr wrap="square" anchor="t" lIns="0" rIns="0" tIns="0" bIns="0">
+          <a:bodyPr wrap="square" lIns="0" tIns="0" rIns="0" bIns="0" anchor="t">
             <a:spAutoFit/>
           </a:bodyPr>
           <a:lstStyle/>
@@ -10559,7 +10650,7 @@
           <a:noFill/>
         </p:spPr>
         <p:txBody>
-          <a:bodyPr wrap="square" anchor="t" lIns="0" rIns="0" tIns="0" bIns="0">
+          <a:bodyPr wrap="square" lIns="0" tIns="0" rIns="0" bIns="0" anchor="t">
             <a:spAutoFit/>
           </a:bodyPr>
           <a:lstStyle/>
@@ -10618,12 +10709,12 @@
           </a:fontRef>
         </p:style>
         <p:txBody>
-          <a:bodyPr rtlCol="0" anchor="ctr" lIns="0" rIns="0"/>
+          <a:bodyPr lIns="0" rIns="0" rtlCol="0" anchor="ctr"/>
           <a:lstStyle/>
           <a:p>
             <a:pPr algn="ctr"/>
             <a:r>
-              <a:rPr b="1" sz="1600">
+              <a:rPr sz="1600" b="1">
                 <a:solidFill>
                   <a:srgbClr val="FFFFFF"/>
                 </a:solidFill>
@@ -10651,7 +10742,7 @@
           <a:noFill/>
         </p:spPr>
         <p:txBody>
-          <a:bodyPr wrap="square" anchor="t" lIns="0" rIns="0" tIns="0" bIns="0">
+          <a:bodyPr wrap="square" lIns="0" tIns="0" rIns="0" bIns="0" anchor="t">
             <a:spAutoFit/>
           </a:bodyPr>
           <a:lstStyle/>
@@ -10690,7 +10781,7 @@
           <a:noFill/>
         </p:spPr>
         <p:txBody>
-          <a:bodyPr wrap="square" anchor="t" lIns="0" rIns="0" tIns="0" bIns="0">
+          <a:bodyPr wrap="square" lIns="0" tIns="0" rIns="0" bIns="0" anchor="t">
             <a:spAutoFit/>
           </a:bodyPr>
           <a:lstStyle/>
@@ -10749,12 +10840,12 @@
           </a:fontRef>
         </p:style>
         <p:txBody>
-          <a:bodyPr rtlCol="0" anchor="ctr" lIns="0" rIns="0"/>
+          <a:bodyPr lIns="0" rIns="0" rtlCol="0" anchor="ctr"/>
           <a:lstStyle/>
           <a:p>
             <a:pPr algn="ctr"/>
             <a:r>
-              <a:rPr b="1" sz="1600">
+              <a:rPr sz="1600" b="1">
                 <a:solidFill>
                   <a:srgbClr val="FFFFFF"/>
                 </a:solidFill>
@@ -10782,7 +10873,7 @@
           <a:noFill/>
         </p:spPr>
         <p:txBody>
-          <a:bodyPr wrap="square" anchor="t" lIns="0" rIns="0" tIns="0" bIns="0">
+          <a:bodyPr wrap="square" lIns="0" tIns="0" rIns="0" bIns="0" anchor="t">
             <a:spAutoFit/>
           </a:bodyPr>
           <a:lstStyle/>
@@ -10821,7 +10912,7 @@
           <a:noFill/>
         </p:spPr>
         <p:txBody>
-          <a:bodyPr wrap="square" anchor="t" lIns="0" rIns="0" tIns="0" bIns="0">
+          <a:bodyPr wrap="square" lIns="0" tIns="0" rIns="0" bIns="0" anchor="t">
             <a:spAutoFit/>
           </a:bodyPr>
           <a:lstStyle/>
@@ -10860,7 +10951,7 @@
           <a:noFill/>
         </p:spPr>
         <p:txBody>
-          <a:bodyPr wrap="square" anchor="t" lIns="0" rIns="0" tIns="0" bIns="0">
+          <a:bodyPr wrap="square" lIns="0" tIns="0" rIns="0" bIns="0" anchor="t">
             <a:spAutoFit/>
           </a:bodyPr>
           <a:lstStyle/>
@@ -10899,7 +10990,7 @@
           <a:noFill/>
         </p:spPr>
         <p:txBody>
-          <a:bodyPr wrap="square" anchor="t" lIns="0" rIns="0" tIns="0" bIns="0">
+          <a:bodyPr wrap="square" lIns="0" tIns="0" rIns="0" bIns="0" anchor="t">
             <a:spAutoFit/>
           </a:bodyPr>
           <a:lstStyle/>
@@ -10930,7 +11021,7 @@
 </file>
 
 <file path=ppt/slides/slide19.xml><?xml version="1.0" encoding="utf-8"?>
-<p:sld xmlns:a="http://schemas.openxmlformats.org/drawingml/2006/main" xmlns:p="http://schemas.openxmlformats.org/presentationml/2006/main" xmlns:r="http://schemas.openxmlformats.org/officeDocument/2006/relationships">
+<p:sld xmlns:a="http://schemas.openxmlformats.org/drawingml/2006/main" xmlns:r="http://schemas.openxmlformats.org/officeDocument/2006/relationships" xmlns:p="http://schemas.openxmlformats.org/presentationml/2006/main">
   <p:cSld>
     <p:spTree>
       <p:nvGrpSpPr>
@@ -10938,7 +11029,14 @@
         <p:cNvGrpSpPr/>
         <p:nvPr/>
       </p:nvGrpSpPr>
-      <p:grpSpPr/>
+      <p:grpSpPr>
+        <a:xfrm>
+          <a:off x="0" y="0"/>
+          <a:ext cx="0" cy="0"/>
+          <a:chOff x="0" y="0"/>
+          <a:chExt cx="0" cy="0"/>
+        </a:xfrm>
+      </p:grpSpPr>
       <p:sp>
         <p:nvSpPr>
           <p:cNvPr id="2" name="Rectangle 1"/>
@@ -10980,6 +11078,7 @@
           <a:lstStyle/>
           <a:p>
             <a:pPr algn="ctr"/>
+            <a:endParaRPr/>
           </a:p>
         </p:txBody>
       </p:sp>
@@ -11022,7 +11121,7 @@
           </a:fontRef>
         </p:style>
         <p:txBody>
-          <a:bodyPr rtlCol="0" anchor="ctr" lIns="45720" rIns="45720" tIns="0" bIns="0"/>
+          <a:bodyPr lIns="45720" tIns="0" rIns="45720" bIns="0" rtlCol="0" anchor="ctr"/>
           <a:lstStyle/>
           <a:p>
             <a:pPr algn="ctr"/>
@@ -11055,7 +11154,7 @@
           <a:noFill/>
         </p:spPr>
         <p:txBody>
-          <a:bodyPr wrap="square" anchor="t" lIns="0" rIns="0" tIns="0" bIns="0">
+          <a:bodyPr wrap="square" lIns="0" tIns="0" rIns="0" bIns="0" anchor="t">
             <a:spAutoFit/>
           </a:bodyPr>
           <a:lstStyle/>
@@ -11094,7 +11193,7 @@
           <a:noFill/>
         </p:spPr>
         <p:txBody>
-          <a:bodyPr wrap="square" anchor="t" lIns="0" rIns="0" tIns="0" bIns="0">
+          <a:bodyPr wrap="square" lIns="0" tIns="0" rIns="0" bIns="0" anchor="t">
             <a:spAutoFit/>
           </a:bodyPr>
           <a:lstStyle/>
@@ -11139,13 +11238,6 @@
             <a:noFill/>
           </a:ln>
           <a:effectLst/>
-          <a:effectLst>
-            <a:outerShdw blurRad="90000" dist="30000" dir="5400000" rotWithShape="0">
-              <a:srgbClr val="1A1B1F">
-                <a:alpha val="18000"/>
-              </a:srgbClr>
-            </a:outerShdw>
-          </a:effectLst>
         </p:spPr>
         <p:style>
           <a:lnRef idx="1">
@@ -11162,7 +11254,7 @@
           </a:fontRef>
         </p:style>
         <p:txBody>
-          <a:bodyPr rtlCol="0" anchor="ctr" wrap="square" lIns="310896" rIns="182880" tIns="164592" bIns="164592"/>
+          <a:bodyPr wrap="square" lIns="310896" tIns="164592" rIns="182880" bIns="164592" rtlCol="0" anchor="ctr"/>
           <a:lstStyle/>
           <a:p>
             <a:pPr algn="l">
@@ -11241,6 +11333,7 @@
           <a:lstStyle/>
           <a:p>
             <a:pPr algn="ctr"/>
+            <a:endParaRPr/>
           </a:p>
         </p:txBody>
       </p:sp>
@@ -11261,7 +11354,7 @@
           <a:noFill/>
         </p:spPr>
         <p:txBody>
-          <a:bodyPr wrap="square" anchor="t" lIns="0" rIns="0" tIns="0" bIns="0">
+          <a:bodyPr wrap="square" lIns="0" tIns="0" rIns="0" bIns="0" anchor="t">
             <a:spAutoFit/>
           </a:bodyPr>
           <a:lstStyle/>
@@ -11327,7 +11420,7 @@
           <a:noFill/>
         </p:spPr>
         <p:txBody>
-          <a:bodyPr wrap="square" anchor="t" lIns="0" rIns="0" tIns="0" bIns="0">
+          <a:bodyPr wrap="square" lIns="0" tIns="0" rIns="0" bIns="0" anchor="t">
             <a:spAutoFit/>
           </a:bodyPr>
           <a:lstStyle/>
@@ -11366,7 +11459,7 @@
           <a:noFill/>
         </p:spPr>
         <p:txBody>
-          <a:bodyPr wrap="square" anchor="t" lIns="0" rIns="0" tIns="0" bIns="0">
+          <a:bodyPr wrap="square" lIns="0" tIns="0" rIns="0" bIns="0" anchor="t">
             <a:spAutoFit/>
           </a:bodyPr>
           <a:lstStyle/>
@@ -11405,7 +11498,7 @@
           <a:noFill/>
         </p:spPr>
         <p:txBody>
-          <a:bodyPr wrap="square" anchor="t" lIns="0" rIns="0" tIns="0" bIns="0">
+          <a:bodyPr wrap="square" lIns="0" tIns="0" rIns="0" bIns="0" anchor="t">
             <a:spAutoFit/>
           </a:bodyPr>
           <a:lstStyle/>
@@ -11436,7 +11529,7 @@
 </file>
 
 <file path=ppt/slides/slide2.xml><?xml version="1.0" encoding="utf-8"?>
-<p:sld xmlns:a="http://schemas.openxmlformats.org/drawingml/2006/main" xmlns:p="http://schemas.openxmlformats.org/presentationml/2006/main" xmlns:r="http://schemas.openxmlformats.org/officeDocument/2006/relationships">
+<p:sld xmlns:a="http://schemas.openxmlformats.org/drawingml/2006/main" xmlns:r="http://schemas.openxmlformats.org/officeDocument/2006/relationships" xmlns:p="http://schemas.openxmlformats.org/presentationml/2006/main">
   <p:cSld>
     <p:spTree>
       <p:nvGrpSpPr>
@@ -11444,7 +11537,14 @@
         <p:cNvGrpSpPr/>
         <p:nvPr/>
       </p:nvGrpSpPr>
-      <p:grpSpPr/>
+      <p:grpSpPr>
+        <a:xfrm>
+          <a:off x="0" y="0"/>
+          <a:ext cx="0" cy="0"/>
+          <a:chOff x="0" y="0"/>
+          <a:chExt cx="0" cy="0"/>
+        </a:xfrm>
+      </p:grpSpPr>
       <p:sp>
         <p:nvSpPr>
           <p:cNvPr id="2" name="Rectangle 1"/>
@@ -11486,6 +11586,7 @@
           <a:lstStyle/>
           <a:p>
             <a:pPr algn="ctr"/>
+            <a:endParaRPr/>
           </a:p>
         </p:txBody>
       </p:sp>
@@ -11528,7 +11629,7 @@
           </a:fontRef>
         </p:style>
         <p:txBody>
-          <a:bodyPr rtlCol="0" anchor="ctr" lIns="45720" rIns="45720" tIns="0" bIns="0"/>
+          <a:bodyPr lIns="45720" tIns="0" rIns="45720" bIns="0" rtlCol="0" anchor="ctr"/>
           <a:lstStyle/>
           <a:p>
             <a:pPr algn="ctr"/>
@@ -11561,7 +11662,7 @@
           <a:noFill/>
         </p:spPr>
         <p:txBody>
-          <a:bodyPr wrap="square" anchor="t" lIns="0" rIns="0" tIns="0" bIns="0">
+          <a:bodyPr wrap="square" lIns="0" tIns="0" rIns="0" bIns="0" anchor="t">
             <a:spAutoFit/>
           </a:bodyPr>
           <a:lstStyle/>
@@ -11608,13 +11709,6 @@
             </a:solidFill>
           </a:ln>
           <a:effectLst/>
-          <a:effectLst>
-            <a:outerShdw blurRad="90000" dist="30000" dir="5400000" rotWithShape="0">
-              <a:srgbClr val="1A1B1F">
-                <a:alpha val="18000"/>
-              </a:srgbClr>
-            </a:outerShdw>
-          </a:effectLst>
         </p:spPr>
         <p:style>
           <a:lnRef idx="1">
@@ -11635,6 +11729,7 @@
           <a:lstStyle/>
           <a:p>
             <a:pPr algn="ctr"/>
+            <a:endParaRPr/>
           </a:p>
         </p:txBody>
       </p:sp>
@@ -11677,7 +11772,7 @@
           </a:fontRef>
         </p:style>
         <p:txBody>
-          <a:bodyPr rtlCol="0" anchor="ctr" lIns="0" rIns="0"/>
+          <a:bodyPr lIns="0" rIns="0" rtlCol="0" anchor="ctr"/>
           <a:lstStyle/>
           <a:p>
             <a:pPr algn="ctr"/>
@@ -11710,7 +11805,7 @@
           <a:noFill/>
         </p:spPr>
         <p:txBody>
-          <a:bodyPr wrap="square" anchor="ctr" lIns="0" rIns="0" tIns="0" bIns="0">
+          <a:bodyPr wrap="square" lIns="0" tIns="0" rIns="0" bIns="0" anchor="ctr">
             <a:spAutoFit/>
           </a:bodyPr>
           <a:lstStyle/>
@@ -11771,7 +11866,7 @@
           </a:fontRef>
         </p:style>
         <p:txBody>
-          <a:bodyPr rtlCol="0" anchor="ctr" lIns="0" rIns="0"/>
+          <a:bodyPr lIns="0" rIns="0" rtlCol="0" anchor="ctr"/>
           <a:lstStyle/>
           <a:p>
             <a:pPr algn="ctr"/>
@@ -11804,7 +11899,7 @@
           <a:noFill/>
         </p:spPr>
         <p:txBody>
-          <a:bodyPr wrap="square" anchor="ctr" lIns="0" rIns="0" tIns="0" bIns="0">
+          <a:bodyPr wrap="square" lIns="0" tIns="0" rIns="0" bIns="0" anchor="ctr">
             <a:spAutoFit/>
           </a:bodyPr>
           <a:lstStyle/>
@@ -11865,7 +11960,7 @@
           </a:fontRef>
         </p:style>
         <p:txBody>
-          <a:bodyPr rtlCol="0" anchor="ctr" lIns="0" rIns="0"/>
+          <a:bodyPr lIns="0" rIns="0" rtlCol="0" anchor="ctr"/>
           <a:lstStyle/>
           <a:p>
             <a:pPr algn="ctr"/>
@@ -11898,7 +11993,7 @@
           <a:noFill/>
         </p:spPr>
         <p:txBody>
-          <a:bodyPr wrap="square" anchor="ctr" lIns="0" rIns="0" tIns="0" bIns="0">
+          <a:bodyPr wrap="square" lIns="0" tIns="0" rIns="0" bIns="0" anchor="ctr">
             <a:spAutoFit/>
           </a:bodyPr>
           <a:lstStyle/>
@@ -11959,7 +12054,7 @@
           </a:fontRef>
         </p:style>
         <p:txBody>
-          <a:bodyPr rtlCol="0" anchor="ctr" lIns="0" rIns="0"/>
+          <a:bodyPr lIns="0" rIns="0" rtlCol="0" anchor="ctr"/>
           <a:lstStyle/>
           <a:p>
             <a:pPr algn="ctr"/>
@@ -11992,7 +12087,7 @@
           <a:noFill/>
         </p:spPr>
         <p:txBody>
-          <a:bodyPr wrap="square" anchor="ctr" lIns="0" rIns="0" tIns="0" bIns="0">
+          <a:bodyPr wrap="square" lIns="0" tIns="0" rIns="0" bIns="0" anchor="ctr">
             <a:spAutoFit/>
           </a:bodyPr>
           <a:lstStyle/>
@@ -12053,7 +12148,7 @@
           </a:fontRef>
         </p:style>
         <p:txBody>
-          <a:bodyPr rtlCol="0" anchor="ctr" lIns="0" rIns="0"/>
+          <a:bodyPr lIns="0" rIns="0" rtlCol="0" anchor="ctr"/>
           <a:lstStyle/>
           <a:p>
             <a:pPr algn="ctr"/>
@@ -12086,7 +12181,7 @@
           <a:noFill/>
         </p:spPr>
         <p:txBody>
-          <a:bodyPr wrap="square" anchor="ctr" lIns="0" rIns="0" tIns="0" bIns="0">
+          <a:bodyPr wrap="square" lIns="0" tIns="0" rIns="0" bIns="0" anchor="ctr">
             <a:spAutoFit/>
           </a:bodyPr>
           <a:lstStyle/>
@@ -12147,7 +12242,7 @@
           </a:fontRef>
         </p:style>
         <p:txBody>
-          <a:bodyPr rtlCol="0" anchor="ctr" lIns="0" rIns="0"/>
+          <a:bodyPr lIns="0" rIns="0" rtlCol="0" anchor="ctr"/>
           <a:lstStyle/>
           <a:p>
             <a:pPr algn="ctr"/>
@@ -12180,7 +12275,7 @@
           <a:noFill/>
         </p:spPr>
         <p:txBody>
-          <a:bodyPr wrap="square" anchor="ctr" lIns="0" rIns="0" tIns="0" bIns="0">
+          <a:bodyPr wrap="square" lIns="0" tIns="0" rIns="0" bIns="0" anchor="ctr">
             <a:spAutoFit/>
           </a:bodyPr>
           <a:lstStyle/>
@@ -12219,7 +12314,7 @@
           <a:noFill/>
         </p:spPr>
         <p:txBody>
-          <a:bodyPr wrap="square" anchor="t" lIns="0" rIns="0" tIns="0" bIns="0">
+          <a:bodyPr wrap="square" lIns="0" tIns="0" rIns="0" bIns="0" anchor="t">
             <a:spAutoFit/>
           </a:bodyPr>
           <a:lstStyle/>
@@ -12258,7 +12353,7 @@
           <a:noFill/>
         </p:spPr>
         <p:txBody>
-          <a:bodyPr wrap="square" anchor="t" lIns="0" rIns="0" tIns="0" bIns="0">
+          <a:bodyPr wrap="square" lIns="0" tIns="0" rIns="0" bIns="0" anchor="t">
             <a:spAutoFit/>
           </a:bodyPr>
           <a:lstStyle/>
@@ -12289,7 +12384,7 @@
 </file>
 
 <file path=ppt/slides/slide20.xml><?xml version="1.0" encoding="utf-8"?>
-<p:sld xmlns:a="http://schemas.openxmlformats.org/drawingml/2006/main" xmlns:p="http://schemas.openxmlformats.org/presentationml/2006/main" xmlns:r="http://schemas.openxmlformats.org/officeDocument/2006/relationships">
+<p:sld xmlns:a="http://schemas.openxmlformats.org/drawingml/2006/main" xmlns:r="http://schemas.openxmlformats.org/officeDocument/2006/relationships" xmlns:p="http://schemas.openxmlformats.org/presentationml/2006/main">
   <p:cSld>
     <p:spTree>
       <p:nvGrpSpPr>
@@ -12297,7 +12392,14 @@
         <p:cNvGrpSpPr/>
         <p:nvPr/>
       </p:nvGrpSpPr>
-      <p:grpSpPr/>
+      <p:grpSpPr>
+        <a:xfrm>
+          <a:off x="0" y="0"/>
+          <a:ext cx="0" cy="0"/>
+          <a:chOff x="0" y="0"/>
+          <a:chExt cx="0" cy="0"/>
+        </a:xfrm>
+      </p:grpSpPr>
       <p:sp>
         <p:nvSpPr>
           <p:cNvPr id="2" name="Rectangle 1"/>
@@ -12339,6 +12441,7 @@
           <a:lstStyle/>
           <a:p>
             <a:pPr algn="ctr"/>
+            <a:endParaRPr/>
           </a:p>
         </p:txBody>
       </p:sp>
@@ -12381,7 +12484,7 @@
           </a:fontRef>
         </p:style>
         <p:txBody>
-          <a:bodyPr rtlCol="0" anchor="ctr" lIns="45720" rIns="45720" tIns="0" bIns="0"/>
+          <a:bodyPr lIns="45720" tIns="0" rIns="45720" bIns="0" rtlCol="0" anchor="ctr"/>
           <a:lstStyle/>
           <a:p>
             <a:pPr algn="ctr"/>
@@ -12414,7 +12517,7 @@
           <a:noFill/>
         </p:spPr>
         <p:txBody>
-          <a:bodyPr wrap="square" anchor="t" lIns="0" rIns="0" tIns="0" bIns="0">
+          <a:bodyPr wrap="square" lIns="0" tIns="0" rIns="0" bIns="0" anchor="t">
             <a:spAutoFit/>
           </a:bodyPr>
           <a:lstStyle/>
@@ -12461,13 +12564,6 @@
             </a:solidFill>
           </a:ln>
           <a:effectLst/>
-          <a:effectLst>
-            <a:outerShdw blurRad="90000" dist="30000" dir="5400000" rotWithShape="0">
-              <a:srgbClr val="1A1B1F">
-                <a:alpha val="18000"/>
-              </a:srgbClr>
-            </a:outerShdw>
-          </a:effectLst>
         </p:spPr>
         <p:style>
           <a:lnRef idx="1">
@@ -12488,6 +12584,7 @@
           <a:lstStyle/>
           <a:p>
             <a:pPr algn="ctr"/>
+            <a:endParaRPr/>
           </a:p>
         </p:txBody>
       </p:sp>
@@ -12534,6 +12631,7 @@
           <a:lstStyle/>
           <a:p>
             <a:pPr algn="ctr"/>
+            <a:endParaRPr/>
           </a:p>
         </p:txBody>
       </p:sp>
@@ -12554,7 +12652,7 @@
           <a:noFill/>
         </p:spPr>
         <p:txBody>
-          <a:bodyPr wrap="square" anchor="t" lIns="0" rIns="0" tIns="0" bIns="0">
+          <a:bodyPr wrap="square" lIns="0" tIns="0" rIns="0" bIns="0" anchor="t">
             <a:spAutoFit/>
           </a:bodyPr>
           <a:lstStyle/>
@@ -12593,7 +12691,7 @@
           <a:noFill/>
         </p:spPr>
         <p:txBody>
-          <a:bodyPr wrap="square" anchor="t" lIns="0" rIns="0" tIns="0" bIns="0">
+          <a:bodyPr wrap="square" lIns="0" tIns="0" rIns="0" bIns="0" anchor="t">
             <a:spAutoFit/>
           </a:bodyPr>
           <a:lstStyle/>
@@ -12640,13 +12738,6 @@
             </a:solidFill>
           </a:ln>
           <a:effectLst/>
-          <a:effectLst>
-            <a:outerShdw blurRad="90000" dist="30000" dir="5400000" rotWithShape="0">
-              <a:srgbClr val="1A1B1F">
-                <a:alpha val="18000"/>
-              </a:srgbClr>
-            </a:outerShdw>
-          </a:effectLst>
         </p:spPr>
         <p:style>
           <a:lnRef idx="1">
@@ -12667,6 +12758,7 @@
           <a:lstStyle/>
           <a:p>
             <a:pPr algn="ctr"/>
+            <a:endParaRPr/>
           </a:p>
         </p:txBody>
       </p:sp>
@@ -12713,6 +12805,7 @@
           <a:lstStyle/>
           <a:p>
             <a:pPr algn="ctr"/>
+            <a:endParaRPr/>
           </a:p>
         </p:txBody>
       </p:sp>
@@ -12733,7 +12826,7 @@
           <a:noFill/>
         </p:spPr>
         <p:txBody>
-          <a:bodyPr wrap="square" anchor="t" lIns="0" rIns="0" tIns="0" bIns="0">
+          <a:bodyPr wrap="square" lIns="0" tIns="0" rIns="0" bIns="0" anchor="t">
             <a:spAutoFit/>
           </a:bodyPr>
           <a:lstStyle/>
@@ -12772,7 +12865,7 @@
           <a:noFill/>
         </p:spPr>
         <p:txBody>
-          <a:bodyPr wrap="square" anchor="t" lIns="0" rIns="0" tIns="0" bIns="0">
+          <a:bodyPr wrap="square" lIns="0" tIns="0" rIns="0" bIns="0" anchor="t">
             <a:spAutoFit/>
           </a:bodyPr>
           <a:lstStyle/>
@@ -12811,7 +12904,7 @@
           <a:noFill/>
         </p:spPr>
         <p:txBody>
-          <a:bodyPr wrap="square" anchor="t" lIns="0" rIns="0" tIns="0" bIns="0">
+          <a:bodyPr wrap="square" lIns="0" tIns="0" rIns="0" bIns="0" anchor="t">
             <a:spAutoFit/>
           </a:bodyPr>
           <a:lstStyle/>
@@ -12850,7 +12943,7 @@
           <a:noFill/>
         </p:spPr>
         <p:txBody>
-          <a:bodyPr wrap="square" anchor="t" lIns="0" rIns="0" tIns="0" bIns="0">
+          <a:bodyPr wrap="square" lIns="0" tIns="0" rIns="0" bIns="0" anchor="t">
             <a:spAutoFit/>
           </a:bodyPr>
           <a:lstStyle/>
@@ -12889,7 +12982,7 @@
           <a:noFill/>
         </p:spPr>
         <p:txBody>
-          <a:bodyPr wrap="square" anchor="t" lIns="0" rIns="0" tIns="0" bIns="0">
+          <a:bodyPr wrap="square" lIns="0" tIns="0" rIns="0" bIns="0" anchor="t">
             <a:spAutoFit/>
           </a:bodyPr>
           <a:lstStyle/>
@@ -12920,7 +13013,7 @@
 </file>
 
 <file path=ppt/slides/slide21.xml><?xml version="1.0" encoding="utf-8"?>
-<p:sld xmlns:a="http://schemas.openxmlformats.org/drawingml/2006/main" xmlns:p="http://schemas.openxmlformats.org/presentationml/2006/main" xmlns:r="http://schemas.openxmlformats.org/officeDocument/2006/relationships">
+<p:sld xmlns:a="http://schemas.openxmlformats.org/drawingml/2006/main" xmlns:r="http://schemas.openxmlformats.org/officeDocument/2006/relationships" xmlns:p="http://schemas.openxmlformats.org/presentationml/2006/main">
   <p:cSld>
     <p:spTree>
       <p:nvGrpSpPr>
@@ -12928,7 +13021,14 @@
         <p:cNvGrpSpPr/>
         <p:nvPr/>
       </p:nvGrpSpPr>
-      <p:grpSpPr/>
+      <p:grpSpPr>
+        <a:xfrm>
+          <a:off x="0" y="0"/>
+          <a:ext cx="0" cy="0"/>
+          <a:chOff x="0" y="0"/>
+          <a:chExt cx="0" cy="0"/>
+        </a:xfrm>
+      </p:grpSpPr>
       <p:sp>
         <p:nvSpPr>
           <p:cNvPr id="2" name="Rectangle 1"/>
@@ -12970,6 +13070,7 @@
           <a:lstStyle/>
           <a:p>
             <a:pPr algn="ctr"/>
+            <a:endParaRPr/>
           </a:p>
         </p:txBody>
       </p:sp>
@@ -13012,7 +13113,7 @@
           </a:fontRef>
         </p:style>
         <p:txBody>
-          <a:bodyPr rtlCol="0" anchor="ctr" lIns="45720" rIns="45720" tIns="0" bIns="0"/>
+          <a:bodyPr lIns="45720" tIns="0" rIns="45720" bIns="0" rtlCol="0" anchor="ctr"/>
           <a:lstStyle/>
           <a:p>
             <a:pPr algn="ctr"/>
@@ -13045,7 +13146,7 @@
           <a:noFill/>
         </p:spPr>
         <p:txBody>
-          <a:bodyPr wrap="square" anchor="t" lIns="0" rIns="0" tIns="0" bIns="0">
+          <a:bodyPr wrap="square" lIns="0" tIns="0" rIns="0" bIns="0" anchor="t">
             <a:spAutoFit/>
           </a:bodyPr>
           <a:lstStyle/>
@@ -13092,13 +13193,6 @@
             </a:solidFill>
           </a:ln>
           <a:effectLst/>
-          <a:effectLst>
-            <a:outerShdw blurRad="90000" dist="30000" dir="5400000" rotWithShape="0">
-              <a:srgbClr val="1A1B1F">
-                <a:alpha val="18000"/>
-              </a:srgbClr>
-            </a:outerShdw>
-          </a:effectLst>
         </p:spPr>
         <p:style>
           <a:lnRef idx="1">
@@ -13119,6 +13213,7 @@
           <a:lstStyle/>
           <a:p>
             <a:pPr algn="ctr"/>
+            <a:endParaRPr/>
           </a:p>
         </p:txBody>
       </p:sp>
@@ -13139,7 +13234,7 @@
           <a:noFill/>
         </p:spPr>
         <p:txBody>
-          <a:bodyPr wrap="square" anchor="t" lIns="0" rIns="0" tIns="0" bIns="0">
+          <a:bodyPr wrap="square" lIns="0" tIns="0" rIns="0" bIns="0" anchor="t">
             <a:spAutoFit/>
           </a:bodyPr>
           <a:lstStyle/>
@@ -13187,7 +13282,7 @@
           <a:noFill/>
         </p:spPr>
         <p:txBody>
-          <a:bodyPr wrap="square" anchor="t" lIns="0" rIns="0" tIns="0" bIns="0">
+          <a:bodyPr wrap="square" lIns="0" tIns="0" rIns="0" bIns="0" anchor="t">
             <a:spAutoFit/>
           </a:bodyPr>
           <a:lstStyle/>
@@ -13235,7 +13330,7 @@
           <a:noFill/>
         </p:spPr>
         <p:txBody>
-          <a:bodyPr wrap="square" anchor="t" lIns="0" rIns="0" tIns="0" bIns="0">
+          <a:bodyPr wrap="square" lIns="0" tIns="0" rIns="0" bIns="0" anchor="t">
             <a:spAutoFit/>
           </a:bodyPr>
           <a:lstStyle/>
@@ -13283,7 +13378,7 @@
           <a:noFill/>
         </p:spPr>
         <p:txBody>
-          <a:bodyPr wrap="square" anchor="t" lIns="0" rIns="0" tIns="0" bIns="0">
+          <a:bodyPr wrap="square" lIns="0" tIns="0" rIns="0" bIns="0" anchor="t">
             <a:spAutoFit/>
           </a:bodyPr>
           <a:lstStyle/>
@@ -13331,7 +13426,7 @@
           <a:noFill/>
         </p:spPr>
         <p:txBody>
-          <a:bodyPr wrap="square" anchor="t" lIns="0" rIns="0" tIns="0" bIns="0">
+          <a:bodyPr wrap="square" lIns="0" tIns="0" rIns="0" bIns="0" anchor="t">
             <a:spAutoFit/>
           </a:bodyPr>
           <a:lstStyle/>
@@ -13370,7 +13465,7 @@
           <a:noFill/>
         </p:spPr>
         <p:txBody>
-          <a:bodyPr wrap="square" anchor="t" lIns="0" rIns="0" tIns="0" bIns="0">
+          <a:bodyPr wrap="square" lIns="0" tIns="0" rIns="0" bIns="0" anchor="t">
             <a:spAutoFit/>
           </a:bodyPr>
           <a:lstStyle/>
@@ -13401,7 +13496,7 @@
 </file>
 
 <file path=ppt/slides/slide22.xml><?xml version="1.0" encoding="utf-8"?>
-<p:sld xmlns:a="http://schemas.openxmlformats.org/drawingml/2006/main" xmlns:p="http://schemas.openxmlformats.org/presentationml/2006/main" xmlns:r="http://schemas.openxmlformats.org/officeDocument/2006/relationships">
+<p:sld xmlns:a="http://schemas.openxmlformats.org/drawingml/2006/main" xmlns:r="http://schemas.openxmlformats.org/officeDocument/2006/relationships" xmlns:p="http://schemas.openxmlformats.org/presentationml/2006/main">
   <p:cSld>
     <p:spTree>
       <p:nvGrpSpPr>
@@ -13409,7 +13504,14 @@
         <p:cNvGrpSpPr/>
         <p:nvPr/>
       </p:nvGrpSpPr>
-      <p:grpSpPr/>
+      <p:grpSpPr>
+        <a:xfrm>
+          <a:off x="0" y="0"/>
+          <a:ext cx="0" cy="0"/>
+          <a:chOff x="0" y="0"/>
+          <a:chExt cx="0" cy="0"/>
+        </a:xfrm>
+      </p:grpSpPr>
       <p:sp>
         <p:nvSpPr>
           <p:cNvPr id="2" name="Rectangle 1"/>
@@ -13451,6 +13553,7 @@
           <a:lstStyle/>
           <a:p>
             <a:pPr algn="ctr"/>
+            <a:endParaRPr/>
           </a:p>
         </p:txBody>
       </p:sp>
@@ -13493,7 +13596,7 @@
           </a:fontRef>
         </p:style>
         <p:txBody>
-          <a:bodyPr rtlCol="0" anchor="ctr" lIns="45720" rIns="45720" tIns="0" bIns="0"/>
+          <a:bodyPr lIns="45720" tIns="0" rIns="45720" bIns="0" rtlCol="0" anchor="ctr"/>
           <a:lstStyle/>
           <a:p>
             <a:pPr algn="ctr"/>
@@ -13526,7 +13629,7 @@
           <a:noFill/>
         </p:spPr>
         <p:txBody>
-          <a:bodyPr wrap="square" anchor="t" lIns="0" rIns="0" tIns="0" bIns="0">
+          <a:bodyPr wrap="square" lIns="0" tIns="0" rIns="0" bIns="0" anchor="t">
             <a:spAutoFit/>
           </a:bodyPr>
           <a:lstStyle/>
@@ -13573,13 +13676,6 @@
             </a:solidFill>
           </a:ln>
           <a:effectLst/>
-          <a:effectLst>
-            <a:outerShdw blurRad="90000" dist="30000" dir="5400000" rotWithShape="0">
-              <a:srgbClr val="1A1B1F">
-                <a:alpha val="18000"/>
-              </a:srgbClr>
-            </a:outerShdw>
-          </a:effectLst>
         </p:spPr>
         <p:style>
           <a:lnRef idx="1">
@@ -13600,6 +13696,7 @@
           <a:lstStyle/>
           <a:p>
             <a:pPr algn="ctr"/>
+            <a:endParaRPr/>
           </a:p>
         </p:txBody>
       </p:sp>
@@ -13646,6 +13743,7 @@
           <a:lstStyle/>
           <a:p>
             <a:pPr algn="ctr"/>
+            <a:endParaRPr/>
           </a:p>
         </p:txBody>
       </p:sp>
@@ -13666,7 +13764,7 @@
           <a:noFill/>
         </p:spPr>
         <p:txBody>
-          <a:bodyPr wrap="square" anchor="t" lIns="0" rIns="0" tIns="0" bIns="0">
+          <a:bodyPr wrap="square" lIns="0" tIns="0" rIns="0" bIns="0" anchor="t">
             <a:spAutoFit/>
           </a:bodyPr>
           <a:lstStyle/>
@@ -13705,7 +13803,7 @@
           <a:noFill/>
         </p:spPr>
         <p:txBody>
-          <a:bodyPr wrap="square" anchor="t" lIns="0" rIns="0" tIns="0" bIns="0">
+          <a:bodyPr wrap="square" lIns="0" tIns="0" rIns="0" bIns="0" anchor="t">
             <a:spAutoFit/>
           </a:bodyPr>
           <a:lstStyle/>
@@ -13752,13 +13850,6 @@
             </a:solidFill>
           </a:ln>
           <a:effectLst/>
-          <a:effectLst>
-            <a:outerShdw blurRad="90000" dist="30000" dir="5400000" rotWithShape="0">
-              <a:srgbClr val="1A1B1F">
-                <a:alpha val="18000"/>
-              </a:srgbClr>
-            </a:outerShdw>
-          </a:effectLst>
         </p:spPr>
         <p:style>
           <a:lnRef idx="1">
@@ -13779,6 +13870,7 @@
           <a:lstStyle/>
           <a:p>
             <a:pPr algn="ctr"/>
+            <a:endParaRPr/>
           </a:p>
         </p:txBody>
       </p:sp>
@@ -13825,6 +13917,7 @@
           <a:lstStyle/>
           <a:p>
             <a:pPr algn="ctr"/>
+            <a:endParaRPr/>
           </a:p>
         </p:txBody>
       </p:sp>
@@ -13845,7 +13938,7 @@
           <a:noFill/>
         </p:spPr>
         <p:txBody>
-          <a:bodyPr wrap="square" anchor="t" lIns="0" rIns="0" tIns="0" bIns="0">
+          <a:bodyPr wrap="square" lIns="0" tIns="0" rIns="0" bIns="0" anchor="t">
             <a:spAutoFit/>
           </a:bodyPr>
           <a:lstStyle/>
@@ -13884,7 +13977,7 @@
           <a:noFill/>
         </p:spPr>
         <p:txBody>
-          <a:bodyPr wrap="square" anchor="t" lIns="0" rIns="0" tIns="0" bIns="0">
+          <a:bodyPr wrap="square" lIns="0" tIns="0" rIns="0" bIns="0" anchor="t">
             <a:spAutoFit/>
           </a:bodyPr>
           <a:lstStyle/>
@@ -13923,7 +14016,7 @@
           <a:noFill/>
         </p:spPr>
         <p:txBody>
-          <a:bodyPr wrap="square" anchor="t" lIns="0" rIns="0" tIns="0" bIns="0">
+          <a:bodyPr wrap="square" lIns="0" tIns="0" rIns="0" bIns="0" anchor="t">
             <a:spAutoFit/>
           </a:bodyPr>
           <a:lstStyle/>
@@ -13971,7 +14064,7 @@
           <a:noFill/>
         </p:spPr>
         <p:txBody>
-          <a:bodyPr wrap="square" anchor="t" lIns="0" rIns="0" tIns="0" bIns="0">
+          <a:bodyPr wrap="square" lIns="0" tIns="0" rIns="0" bIns="0" anchor="t">
             <a:spAutoFit/>
           </a:bodyPr>
           <a:lstStyle/>
@@ -14019,7 +14112,7 @@
           <a:noFill/>
         </p:spPr>
         <p:txBody>
-          <a:bodyPr wrap="square" anchor="t" lIns="0" rIns="0" tIns="0" bIns="0">
+          <a:bodyPr wrap="square" lIns="0" tIns="0" rIns="0" bIns="0" anchor="t">
             <a:spAutoFit/>
           </a:bodyPr>
           <a:lstStyle/>
@@ -14067,7 +14160,7 @@
           <a:noFill/>
         </p:spPr>
         <p:txBody>
-          <a:bodyPr wrap="square" anchor="t" lIns="0" rIns="0" tIns="0" bIns="0">
+          <a:bodyPr wrap="square" lIns="0" tIns="0" rIns="0" bIns="0" anchor="t">
             <a:spAutoFit/>
           </a:bodyPr>
           <a:lstStyle/>
@@ -14115,7 +14208,7 @@
           <a:noFill/>
         </p:spPr>
         <p:txBody>
-          <a:bodyPr wrap="square" anchor="t" lIns="0" rIns="0" tIns="0" bIns="0">
+          <a:bodyPr wrap="square" lIns="0" tIns="0" rIns="0" bIns="0" anchor="t">
             <a:spAutoFit/>
           </a:bodyPr>
           <a:lstStyle/>
@@ -14154,7 +14247,7 @@
           <a:noFill/>
         </p:spPr>
         <p:txBody>
-          <a:bodyPr wrap="square" anchor="t" lIns="0" rIns="0" tIns="0" bIns="0">
+          <a:bodyPr wrap="square" lIns="0" tIns="0" rIns="0" bIns="0" anchor="t">
             <a:spAutoFit/>
           </a:bodyPr>
           <a:lstStyle/>
@@ -14185,7 +14278,7 @@
 </file>
 
 <file path=ppt/slides/slide23.xml><?xml version="1.0" encoding="utf-8"?>
-<p:sld xmlns:a="http://schemas.openxmlformats.org/drawingml/2006/main" xmlns:p="http://schemas.openxmlformats.org/presentationml/2006/main" xmlns:r="http://schemas.openxmlformats.org/officeDocument/2006/relationships">
+<p:sld xmlns:a="http://schemas.openxmlformats.org/drawingml/2006/main" xmlns:r="http://schemas.openxmlformats.org/officeDocument/2006/relationships" xmlns:p="http://schemas.openxmlformats.org/presentationml/2006/main">
   <p:cSld>
     <p:spTree>
       <p:nvGrpSpPr>
@@ -14193,7 +14286,14 @@
         <p:cNvGrpSpPr/>
         <p:nvPr/>
       </p:nvGrpSpPr>
-      <p:grpSpPr/>
+      <p:grpSpPr>
+        <a:xfrm>
+          <a:off x="0" y="0"/>
+          <a:ext cx="0" cy="0"/>
+          <a:chOff x="0" y="0"/>
+          <a:chExt cx="0" cy="0"/>
+        </a:xfrm>
+      </p:grpSpPr>
       <p:sp>
         <p:nvSpPr>
           <p:cNvPr id="2" name="Rectangle 1"/>
@@ -14235,6 +14335,7 @@
           <a:lstStyle/>
           <a:p>
             <a:pPr algn="ctr"/>
+            <a:endParaRPr/>
           </a:p>
         </p:txBody>
       </p:sp>
@@ -14277,7 +14378,7 @@
           </a:fontRef>
         </p:style>
         <p:txBody>
-          <a:bodyPr rtlCol="0" anchor="ctr" lIns="45720" rIns="45720" tIns="0" bIns="0"/>
+          <a:bodyPr lIns="45720" tIns="0" rIns="45720" bIns="0" rtlCol="0" anchor="ctr"/>
           <a:lstStyle/>
           <a:p>
             <a:pPr algn="ctr"/>
@@ -14310,7 +14411,7 @@
           <a:noFill/>
         </p:spPr>
         <p:txBody>
-          <a:bodyPr wrap="square" anchor="t" lIns="0" rIns="0" tIns="0" bIns="0">
+          <a:bodyPr wrap="square" lIns="0" tIns="0" rIns="0" bIns="0" anchor="t">
             <a:spAutoFit/>
           </a:bodyPr>
           <a:lstStyle/>
@@ -14349,7 +14450,7 @@
           <a:noFill/>
         </p:spPr>
         <p:txBody>
-          <a:bodyPr wrap="square" anchor="t" lIns="0" rIns="0" tIns="0" bIns="0">
+          <a:bodyPr wrap="square" lIns="0" tIns="0" rIns="0" bIns="0" anchor="t">
             <a:spAutoFit/>
           </a:bodyPr>
           <a:lstStyle/>
@@ -14388,7 +14489,7 @@
           <a:noFill/>
         </p:spPr>
         <p:txBody>
-          <a:bodyPr wrap="square" anchor="t" lIns="0" rIns="0" tIns="0" bIns="0">
+          <a:bodyPr wrap="square" lIns="0" tIns="0" rIns="0" bIns="0" anchor="t">
             <a:spAutoFit/>
           </a:bodyPr>
           <a:lstStyle/>
@@ -14427,7 +14528,7 @@
           <a:noFill/>
         </p:spPr>
         <p:txBody>
-          <a:bodyPr wrap="square" anchor="t" lIns="0" rIns="0" tIns="0" bIns="0">
+          <a:bodyPr wrap="square" lIns="0" tIns="0" rIns="0" bIns="0" anchor="t">
             <a:spAutoFit/>
           </a:bodyPr>
           <a:lstStyle/>
@@ -14466,7 +14567,7 @@
           <a:noFill/>
         </p:spPr>
         <p:txBody>
-          <a:bodyPr wrap="square" anchor="t" lIns="0" rIns="0" tIns="0" bIns="0">
+          <a:bodyPr wrap="square" lIns="0" tIns="0" rIns="0" bIns="0" anchor="t">
             <a:spAutoFit/>
           </a:bodyPr>
           <a:lstStyle/>
@@ -14511,13 +14612,6 @@
             <a:noFill/>
           </a:ln>
           <a:effectLst/>
-          <a:effectLst>
-            <a:outerShdw blurRad="90000" dist="30000" dir="5400000" rotWithShape="0">
-              <a:srgbClr val="1A1B1F">
-                <a:alpha val="18000"/>
-              </a:srgbClr>
-            </a:outerShdw>
-          </a:effectLst>
         </p:spPr>
         <p:style>
           <a:lnRef idx="1">
@@ -14538,6 +14632,7 @@
           <a:lstStyle/>
           <a:p>
             <a:pPr algn="ctr"/>
+            <a:endParaRPr/>
           </a:p>
         </p:txBody>
       </p:sp>
@@ -14558,7 +14653,7 @@
           <a:noFill/>
         </p:spPr>
         <p:txBody>
-          <a:bodyPr wrap="square" anchor="ctr" lIns="0" rIns="0" tIns="0" bIns="0">
+          <a:bodyPr wrap="square" lIns="0" tIns="0" rIns="0" bIns="0" anchor="ctr">
             <a:spAutoFit/>
           </a:bodyPr>
           <a:lstStyle/>
@@ -14597,7 +14692,7 @@
           <a:noFill/>
         </p:spPr>
         <p:txBody>
-          <a:bodyPr wrap="square" anchor="ctr" lIns="0" rIns="0" tIns="0" bIns="0">
+          <a:bodyPr wrap="square" lIns="0" tIns="0" rIns="0" bIns="0" anchor="ctr">
             <a:spAutoFit/>
           </a:bodyPr>
           <a:lstStyle/>
@@ -14662,6 +14757,7 @@
           <a:lstStyle/>
           <a:p>
             <a:pPr algn="ctr"/>
+            <a:endParaRPr/>
           </a:p>
         </p:txBody>
       </p:sp>
@@ -14682,7 +14778,7 @@
           <a:noFill/>
         </p:spPr>
         <p:txBody>
-          <a:bodyPr wrap="square" anchor="ctr" lIns="0" rIns="0" tIns="0" bIns="0">
+          <a:bodyPr wrap="square" lIns="0" tIns="0" rIns="0" bIns="0" anchor="ctr">
             <a:spAutoFit/>
           </a:bodyPr>
           <a:lstStyle/>
@@ -14743,7 +14839,7 @@
           </a:fontRef>
         </p:style>
         <p:txBody>
-          <a:bodyPr rtlCol="0" anchor="ctr" lIns="0" rIns="0" tIns="0" bIns="0"/>
+          <a:bodyPr lIns="0" tIns="0" rIns="0" bIns="0" rtlCol="0" anchor="ctr"/>
           <a:lstStyle/>
           <a:p>
             <a:pPr algn="ctr"/>
@@ -14776,7 +14872,7 @@
           <a:noFill/>
         </p:spPr>
         <p:txBody>
-          <a:bodyPr wrap="square" anchor="ctr" lIns="0" rIns="0" tIns="0" bIns="0">
+          <a:bodyPr wrap="square" lIns="0" tIns="0" rIns="0" bIns="0" anchor="ctr">
             <a:spAutoFit/>
           </a:bodyPr>
           <a:lstStyle/>
@@ -14841,6 +14937,7 @@
           <a:lstStyle/>
           <a:p>
             <a:pPr algn="ctr"/>
+            <a:endParaRPr/>
           </a:p>
         </p:txBody>
       </p:sp>
@@ -14861,7 +14958,7 @@
           <a:noFill/>
         </p:spPr>
         <p:txBody>
-          <a:bodyPr wrap="square" anchor="ctr" lIns="0" rIns="0" tIns="0" bIns="0">
+          <a:bodyPr wrap="square" lIns="0" tIns="0" rIns="0" bIns="0" anchor="ctr">
             <a:spAutoFit/>
           </a:bodyPr>
           <a:lstStyle/>
@@ -14922,7 +15019,7 @@
           </a:fontRef>
         </p:style>
         <p:txBody>
-          <a:bodyPr rtlCol="0" anchor="ctr" lIns="0" rIns="0" tIns="0" bIns="0"/>
+          <a:bodyPr lIns="0" tIns="0" rIns="0" bIns="0" rtlCol="0" anchor="ctr"/>
           <a:lstStyle/>
           <a:p>
             <a:pPr algn="ctr"/>
@@ -14955,7 +15052,7 @@
           <a:noFill/>
         </p:spPr>
         <p:txBody>
-          <a:bodyPr wrap="square" anchor="ctr" lIns="0" rIns="0" tIns="0" bIns="0">
+          <a:bodyPr wrap="square" lIns="0" tIns="0" rIns="0" bIns="0" anchor="ctr">
             <a:spAutoFit/>
           </a:bodyPr>
           <a:lstStyle/>
@@ -14994,7 +15091,7 @@
           <a:noFill/>
         </p:spPr>
         <p:txBody>
-          <a:bodyPr wrap="square" anchor="ctr" lIns="0" rIns="0" tIns="0" bIns="0">
+          <a:bodyPr wrap="square" lIns="0" tIns="0" rIns="0" bIns="0" anchor="ctr">
             <a:spAutoFit/>
           </a:bodyPr>
           <a:lstStyle/>
@@ -15033,7 +15130,7 @@
           <a:noFill/>
         </p:spPr>
         <p:txBody>
-          <a:bodyPr wrap="square" anchor="ctr" lIns="0" rIns="0" tIns="0" bIns="0">
+          <a:bodyPr wrap="square" lIns="0" tIns="0" rIns="0" bIns="0" anchor="ctr">
             <a:spAutoFit/>
           </a:bodyPr>
           <a:lstStyle/>
@@ -15072,7 +15169,7 @@
           <a:noFill/>
         </p:spPr>
         <p:txBody>
-          <a:bodyPr wrap="square" anchor="ctr" lIns="0" rIns="0" tIns="0" bIns="0">
+          <a:bodyPr wrap="square" lIns="0" tIns="0" rIns="0" bIns="0" anchor="ctr">
             <a:spAutoFit/>
           </a:bodyPr>
           <a:lstStyle/>
@@ -15137,6 +15234,7 @@
           <a:lstStyle/>
           <a:p>
             <a:pPr algn="ctr"/>
+            <a:endParaRPr/>
           </a:p>
         </p:txBody>
       </p:sp>
@@ -15157,7 +15255,7 @@
           <a:noFill/>
         </p:spPr>
         <p:txBody>
-          <a:bodyPr wrap="square" anchor="ctr" lIns="0" rIns="0" tIns="0" bIns="0">
+          <a:bodyPr wrap="square" lIns="0" tIns="0" rIns="0" bIns="0" anchor="ctr">
             <a:spAutoFit/>
           </a:bodyPr>
           <a:lstStyle/>
@@ -15218,7 +15316,7 @@
           </a:fontRef>
         </p:style>
         <p:txBody>
-          <a:bodyPr rtlCol="0" anchor="ctr" lIns="0" rIns="0" tIns="0" bIns="0"/>
+          <a:bodyPr lIns="0" tIns="0" rIns="0" bIns="0" rtlCol="0" anchor="ctr"/>
           <a:lstStyle/>
           <a:p>
             <a:pPr algn="ctr"/>
@@ -15251,7 +15349,7 @@
           <a:noFill/>
         </p:spPr>
         <p:txBody>
-          <a:bodyPr wrap="square" anchor="ctr" lIns="0" rIns="0" tIns="0" bIns="0">
+          <a:bodyPr wrap="square" lIns="0" tIns="0" rIns="0" bIns="0" anchor="ctr">
             <a:spAutoFit/>
           </a:bodyPr>
           <a:lstStyle/>
@@ -15290,7 +15388,7 @@
           <a:noFill/>
         </p:spPr>
         <p:txBody>
-          <a:bodyPr wrap="square" anchor="ctr" lIns="0" rIns="0" tIns="0" bIns="0">
+          <a:bodyPr wrap="square" lIns="0" tIns="0" rIns="0" bIns="0" anchor="ctr">
             <a:spAutoFit/>
           </a:bodyPr>
           <a:lstStyle/>
@@ -15329,7 +15427,7 @@
           <a:noFill/>
         </p:spPr>
         <p:txBody>
-          <a:bodyPr wrap="square" anchor="ctr" lIns="0" rIns="0" tIns="0" bIns="0">
+          <a:bodyPr wrap="square" lIns="0" tIns="0" rIns="0" bIns="0" anchor="ctr">
             <a:spAutoFit/>
           </a:bodyPr>
           <a:lstStyle/>
@@ -15374,13 +15472,6 @@
             <a:noFill/>
           </a:ln>
           <a:effectLst/>
-          <a:effectLst>
-            <a:outerShdw blurRad="90000" dist="30000" dir="5400000" rotWithShape="0">
-              <a:srgbClr val="1A1B1F">
-                <a:alpha val="18000"/>
-              </a:srgbClr>
-            </a:outerShdw>
-          </a:effectLst>
         </p:spPr>
         <p:style>
           <a:lnRef idx="1">
@@ -15401,6 +15492,7 @@
           <a:lstStyle/>
           <a:p>
             <a:pPr algn="ctr"/>
+            <a:endParaRPr/>
           </a:p>
         </p:txBody>
       </p:sp>
@@ -15421,7 +15513,7 @@
           <a:noFill/>
         </p:spPr>
         <p:txBody>
-          <a:bodyPr wrap="square" anchor="ctr" lIns="0" rIns="0" tIns="0" bIns="0">
+          <a:bodyPr wrap="square" lIns="0" tIns="0" rIns="0" bIns="0" anchor="ctr">
             <a:spAutoFit/>
           </a:bodyPr>
           <a:lstStyle/>
@@ -15460,7 +15552,7 @@
           <a:noFill/>
         </p:spPr>
         <p:txBody>
-          <a:bodyPr wrap="square" anchor="ctr" lIns="0" rIns="0" tIns="0" bIns="0">
+          <a:bodyPr wrap="square" lIns="0" tIns="0" rIns="0" bIns="0" anchor="ctr">
             <a:spAutoFit/>
           </a:bodyPr>
           <a:lstStyle/>
@@ -15525,6 +15617,7 @@
           <a:lstStyle/>
           <a:p>
             <a:pPr algn="ctr"/>
+            <a:endParaRPr/>
           </a:p>
         </p:txBody>
       </p:sp>
@@ -15545,7 +15638,7 @@
           <a:noFill/>
         </p:spPr>
         <p:txBody>
-          <a:bodyPr wrap="square" anchor="ctr" lIns="0" rIns="0" tIns="0" bIns="0">
+          <a:bodyPr wrap="square" lIns="0" tIns="0" rIns="0" bIns="0" anchor="ctr">
             <a:spAutoFit/>
           </a:bodyPr>
           <a:lstStyle/>
@@ -15606,7 +15699,7 @@
           </a:fontRef>
         </p:style>
         <p:txBody>
-          <a:bodyPr rtlCol="0" anchor="ctr" lIns="0" rIns="0" tIns="0" bIns="0"/>
+          <a:bodyPr lIns="0" tIns="0" rIns="0" bIns="0" rtlCol="0" anchor="ctr"/>
           <a:lstStyle/>
           <a:p>
             <a:pPr algn="ctr"/>
@@ -15665,6 +15758,7 @@
           <a:lstStyle/>
           <a:p>
             <a:pPr algn="ctr"/>
+            <a:endParaRPr/>
           </a:p>
         </p:txBody>
       </p:sp>
@@ -15685,7 +15779,7 @@
           <a:noFill/>
         </p:spPr>
         <p:txBody>
-          <a:bodyPr wrap="square" anchor="ctr" lIns="0" rIns="0" tIns="0" bIns="0">
+          <a:bodyPr wrap="square" lIns="0" tIns="0" rIns="0" bIns="0" anchor="ctr">
             <a:spAutoFit/>
           </a:bodyPr>
           <a:lstStyle/>
@@ -15746,7 +15840,7 @@
           </a:fontRef>
         </p:style>
         <p:txBody>
-          <a:bodyPr rtlCol="0" anchor="ctr" lIns="0" rIns="0" tIns="0" bIns="0"/>
+          <a:bodyPr lIns="0" tIns="0" rIns="0" bIns="0" rtlCol="0" anchor="ctr"/>
           <a:lstStyle/>
           <a:p>
             <a:pPr algn="ctr"/>
@@ -15779,7 +15873,7 @@
           <a:noFill/>
         </p:spPr>
         <p:txBody>
-          <a:bodyPr wrap="square" anchor="ctr" lIns="0" rIns="0" tIns="0" bIns="0">
+          <a:bodyPr wrap="square" lIns="0" tIns="0" rIns="0" bIns="0" anchor="ctr">
             <a:spAutoFit/>
           </a:bodyPr>
           <a:lstStyle/>
@@ -15818,7 +15912,7 @@
           <a:noFill/>
         </p:spPr>
         <p:txBody>
-          <a:bodyPr wrap="square" anchor="ctr" lIns="0" rIns="0" tIns="0" bIns="0">
+          <a:bodyPr wrap="square" lIns="0" tIns="0" rIns="0" bIns="0" anchor="ctr">
             <a:spAutoFit/>
           </a:bodyPr>
           <a:lstStyle/>
@@ -15857,7 +15951,7 @@
           <a:noFill/>
         </p:spPr>
         <p:txBody>
-          <a:bodyPr wrap="square" anchor="ctr" lIns="0" rIns="0" tIns="0" bIns="0">
+          <a:bodyPr wrap="square" lIns="0" tIns="0" rIns="0" bIns="0" anchor="ctr">
             <a:spAutoFit/>
           </a:bodyPr>
           <a:lstStyle/>
@@ -15922,6 +16016,7 @@
           <a:lstStyle/>
           <a:p>
             <a:pPr algn="ctr"/>
+            <a:endParaRPr/>
           </a:p>
         </p:txBody>
       </p:sp>
@@ -15942,7 +16037,7 @@
           <a:noFill/>
         </p:spPr>
         <p:txBody>
-          <a:bodyPr wrap="square" anchor="ctr" lIns="0" rIns="0" tIns="0" bIns="0">
+          <a:bodyPr wrap="square" lIns="0" tIns="0" rIns="0" bIns="0" anchor="ctr">
             <a:spAutoFit/>
           </a:bodyPr>
           <a:lstStyle/>
@@ -16003,7 +16098,7 @@
           </a:fontRef>
         </p:style>
         <p:txBody>
-          <a:bodyPr rtlCol="0" anchor="ctr" lIns="0" rIns="0" tIns="0" bIns="0"/>
+          <a:bodyPr lIns="0" tIns="0" rIns="0" bIns="0" rtlCol="0" anchor="ctr"/>
           <a:lstStyle/>
           <a:p>
             <a:pPr algn="ctr"/>
@@ -16036,7 +16131,7 @@
           <a:noFill/>
         </p:spPr>
         <p:txBody>
-          <a:bodyPr wrap="square" anchor="ctr" lIns="0" rIns="0" tIns="0" bIns="0">
+          <a:bodyPr wrap="square" lIns="0" tIns="0" rIns="0" bIns="0" anchor="ctr">
             <a:spAutoFit/>
           </a:bodyPr>
           <a:lstStyle/>
@@ -16075,7 +16170,7 @@
           <a:noFill/>
         </p:spPr>
         <p:txBody>
-          <a:bodyPr wrap="square" anchor="ctr" lIns="0" rIns="0" tIns="0" bIns="0">
+          <a:bodyPr wrap="square" lIns="0" tIns="0" rIns="0" bIns="0" anchor="ctr">
             <a:spAutoFit/>
           </a:bodyPr>
           <a:lstStyle/>
@@ -16114,7 +16209,7 @@
           <a:noFill/>
         </p:spPr>
         <p:txBody>
-          <a:bodyPr wrap="square" anchor="ctr" lIns="0" rIns="0" tIns="0" bIns="0">
+          <a:bodyPr wrap="square" lIns="0" tIns="0" rIns="0" bIns="0" anchor="ctr">
             <a:spAutoFit/>
           </a:bodyPr>
           <a:lstStyle/>
@@ -16153,7 +16248,7 @@
           <a:noFill/>
         </p:spPr>
         <p:txBody>
-          <a:bodyPr wrap="square" anchor="ctr" lIns="0" rIns="0" tIns="0" bIns="0">
+          <a:bodyPr wrap="square" lIns="0" tIns="0" rIns="0" bIns="0" anchor="ctr">
             <a:spAutoFit/>
           </a:bodyPr>
           <a:lstStyle/>
@@ -16163,15 +16258,7 @@
                 <a:spcPct val="100000"/>
               </a:lnSpc>
             </a:pPr>
-            <a:r>
-              <a:rPr sz="1200" b="0" i="0">
-                <a:solidFill>
-                  <a:srgbClr val="C7CDD6"/>
-                </a:solidFill>
-                <a:latin typeface="Consolas"/>
-              </a:rPr>
-              <a:t/>
-            </a:r>
+            <a:endParaRPr/>
           </a:p>
         </p:txBody>
       </p:sp>
@@ -16192,7 +16279,7 @@
           <a:noFill/>
         </p:spPr>
         <p:txBody>
-          <a:bodyPr wrap="square" anchor="ctr" lIns="0" rIns="0" tIns="0" bIns="0">
+          <a:bodyPr wrap="square" lIns="0" tIns="0" rIns="0" bIns="0" anchor="ctr">
             <a:spAutoFit/>
           </a:bodyPr>
           <a:lstStyle/>
@@ -16202,15 +16289,7 @@
                 <a:spcPct val="100000"/>
               </a:lnSpc>
             </a:pPr>
-            <a:r>
-              <a:rPr sz="1200" b="0" i="0">
-                <a:solidFill>
-                  <a:srgbClr val="C7CDD6"/>
-                </a:solidFill>
-                <a:latin typeface="Consolas"/>
-              </a:rPr>
-              <a:t/>
-            </a:r>
+            <a:endParaRPr/>
           </a:p>
         </p:txBody>
       </p:sp>
@@ -16231,7 +16310,7 @@
           <a:noFill/>
         </p:spPr>
         <p:txBody>
-          <a:bodyPr wrap="square" anchor="t" lIns="0" rIns="0" tIns="0" bIns="0">
+          <a:bodyPr wrap="square" lIns="0" tIns="0" rIns="0" bIns="0" anchor="t">
             <a:spAutoFit/>
           </a:bodyPr>
           <a:lstStyle/>
@@ -16324,7 +16403,7 @@
           <a:noFill/>
         </p:spPr>
         <p:txBody>
-          <a:bodyPr wrap="square" anchor="t" lIns="0" rIns="0" tIns="0" bIns="0">
+          <a:bodyPr wrap="square" lIns="0" tIns="0" rIns="0" bIns="0" anchor="t">
             <a:spAutoFit/>
           </a:bodyPr>
           <a:lstStyle/>
@@ -16363,7 +16442,7 @@
           <a:noFill/>
         </p:spPr>
         <p:txBody>
-          <a:bodyPr wrap="square" anchor="t" lIns="0" rIns="0" tIns="0" bIns="0">
+          <a:bodyPr wrap="square" lIns="0" tIns="0" rIns="0" bIns="0" anchor="t">
             <a:spAutoFit/>
           </a:bodyPr>
           <a:lstStyle/>
@@ -16394,7 +16473,7 @@
 </file>
 
 <file path=ppt/slides/slide24.xml><?xml version="1.0" encoding="utf-8"?>
-<p:sld xmlns:a="http://schemas.openxmlformats.org/drawingml/2006/main" xmlns:p="http://schemas.openxmlformats.org/presentationml/2006/main" xmlns:r="http://schemas.openxmlformats.org/officeDocument/2006/relationships">
+<p:sld xmlns:a="http://schemas.openxmlformats.org/drawingml/2006/main" xmlns:r="http://schemas.openxmlformats.org/officeDocument/2006/relationships" xmlns:p="http://schemas.openxmlformats.org/presentationml/2006/main">
   <p:cSld>
     <p:spTree>
       <p:nvGrpSpPr>
@@ -16402,7 +16481,14 @@
         <p:cNvGrpSpPr/>
         <p:nvPr/>
       </p:nvGrpSpPr>
-      <p:grpSpPr/>
+      <p:grpSpPr>
+        <a:xfrm>
+          <a:off x="0" y="0"/>
+          <a:ext cx="0" cy="0"/>
+          <a:chOff x="0" y="0"/>
+          <a:chExt cx="0" cy="0"/>
+        </a:xfrm>
+      </p:grpSpPr>
       <p:sp>
         <p:nvSpPr>
           <p:cNvPr id="2" name="Rectangle 1"/>
@@ -16444,6 +16530,7 @@
           <a:lstStyle/>
           <a:p>
             <a:pPr algn="ctr"/>
+            <a:endParaRPr/>
           </a:p>
         </p:txBody>
       </p:sp>
@@ -16486,7 +16573,7 @@
           </a:fontRef>
         </p:style>
         <p:txBody>
-          <a:bodyPr rtlCol="0" anchor="ctr" lIns="45720" rIns="45720" tIns="0" bIns="0"/>
+          <a:bodyPr lIns="45720" tIns="0" rIns="45720" bIns="0" rtlCol="0" anchor="ctr"/>
           <a:lstStyle/>
           <a:p>
             <a:pPr algn="ctr"/>
@@ -16519,7 +16606,7 @@
           <a:noFill/>
         </p:spPr>
         <p:txBody>
-          <a:bodyPr wrap="square" anchor="t" lIns="0" rIns="0" tIns="0" bIns="0">
+          <a:bodyPr wrap="square" lIns="0" tIns="0" rIns="0" bIns="0" anchor="t">
             <a:spAutoFit/>
           </a:bodyPr>
           <a:lstStyle/>
@@ -16566,13 +16653,6 @@
             </a:solidFill>
           </a:ln>
           <a:effectLst/>
-          <a:effectLst>
-            <a:outerShdw blurRad="90000" dist="30000" dir="5400000" rotWithShape="0">
-              <a:srgbClr val="1A1B1F">
-                <a:alpha val="18000"/>
-              </a:srgbClr>
-            </a:outerShdw>
-          </a:effectLst>
         </p:spPr>
         <p:style>
           <a:lnRef idx="1">
@@ -16593,6 +16673,7 @@
           <a:lstStyle/>
           <a:p>
             <a:pPr algn="ctr"/>
+            <a:endParaRPr/>
           </a:p>
         </p:txBody>
       </p:sp>
@@ -16613,7 +16694,7 @@
           <a:noFill/>
         </p:spPr>
         <p:txBody>
-          <a:bodyPr wrap="square" anchor="t" lIns="0" rIns="0" tIns="0" bIns="0">
+          <a:bodyPr wrap="square" lIns="0" tIns="0" rIns="0" bIns="0" anchor="t">
             <a:spAutoFit/>
           </a:bodyPr>
           <a:lstStyle/>
@@ -16661,7 +16742,7 @@
           <a:noFill/>
         </p:spPr>
         <p:txBody>
-          <a:bodyPr wrap="square" anchor="t" lIns="0" rIns="0" tIns="0" bIns="0">
+          <a:bodyPr wrap="square" lIns="0" tIns="0" rIns="0" bIns="0" anchor="t">
             <a:spAutoFit/>
           </a:bodyPr>
           <a:lstStyle/>
@@ -16709,7 +16790,7 @@
           <a:noFill/>
         </p:spPr>
         <p:txBody>
-          <a:bodyPr wrap="square" anchor="t" lIns="0" rIns="0" tIns="0" bIns="0">
+          <a:bodyPr wrap="square" lIns="0" tIns="0" rIns="0" bIns="0" anchor="t">
             <a:spAutoFit/>
           </a:bodyPr>
           <a:lstStyle/>
@@ -16757,7 +16838,7 @@
           <a:noFill/>
         </p:spPr>
         <p:txBody>
-          <a:bodyPr wrap="square" anchor="t" lIns="0" rIns="0" tIns="0" bIns="0">
+          <a:bodyPr wrap="square" lIns="0" tIns="0" rIns="0" bIns="0" anchor="t">
             <a:spAutoFit/>
           </a:bodyPr>
           <a:lstStyle/>
@@ -16805,7 +16886,7 @@
           <a:noFill/>
         </p:spPr>
         <p:txBody>
-          <a:bodyPr wrap="square" anchor="t" lIns="0" rIns="0" tIns="0" bIns="0">
+          <a:bodyPr wrap="square" lIns="0" tIns="0" rIns="0" bIns="0" anchor="t">
             <a:spAutoFit/>
           </a:bodyPr>
           <a:lstStyle/>
@@ -16844,7 +16925,7 @@
           <a:noFill/>
         </p:spPr>
         <p:txBody>
-          <a:bodyPr wrap="square" anchor="t" lIns="0" rIns="0" tIns="0" bIns="0">
+          <a:bodyPr wrap="square" lIns="0" tIns="0" rIns="0" bIns="0" anchor="t">
             <a:spAutoFit/>
           </a:bodyPr>
           <a:lstStyle/>
@@ -16883,7 +16964,7 @@
           <a:noFill/>
         </p:spPr>
         <p:txBody>
-          <a:bodyPr wrap="square" anchor="t" lIns="0" rIns="0" tIns="0" bIns="0">
+          <a:bodyPr wrap="square" lIns="0" tIns="0" rIns="0" bIns="0" anchor="t">
             <a:spAutoFit/>
           </a:bodyPr>
           <a:lstStyle/>
@@ -16914,7 +16995,7 @@
 </file>
 
 <file path=ppt/slides/slide25.xml><?xml version="1.0" encoding="utf-8"?>
-<p:sld xmlns:a="http://schemas.openxmlformats.org/drawingml/2006/main" xmlns:p="http://schemas.openxmlformats.org/presentationml/2006/main" xmlns:r="http://schemas.openxmlformats.org/officeDocument/2006/relationships">
+<p:sld xmlns:a="http://schemas.openxmlformats.org/drawingml/2006/main" xmlns:r="http://schemas.openxmlformats.org/officeDocument/2006/relationships" xmlns:p="http://schemas.openxmlformats.org/presentationml/2006/main">
   <p:cSld>
     <p:spTree>
       <p:nvGrpSpPr>
@@ -16922,7 +17003,14 @@
         <p:cNvGrpSpPr/>
         <p:nvPr/>
       </p:nvGrpSpPr>
-      <p:grpSpPr/>
+      <p:grpSpPr>
+        <a:xfrm>
+          <a:off x="0" y="0"/>
+          <a:ext cx="0" cy="0"/>
+          <a:chOff x="0" y="0"/>
+          <a:chExt cx="0" cy="0"/>
+        </a:xfrm>
+      </p:grpSpPr>
       <p:sp>
         <p:nvSpPr>
           <p:cNvPr id="2" name="Rectangle 1"/>
@@ -16964,6 +17052,7 @@
           <a:lstStyle/>
           <a:p>
             <a:pPr algn="ctr"/>
+            <a:endParaRPr/>
           </a:p>
         </p:txBody>
       </p:sp>
@@ -17010,6 +17099,7 @@
           <a:lstStyle/>
           <a:p>
             <a:pPr algn="ctr"/>
+            <a:endParaRPr/>
           </a:p>
         </p:txBody>
       </p:sp>
@@ -17054,7 +17144,7 @@
           <a:noFill/>
         </p:spPr>
         <p:txBody>
-          <a:bodyPr wrap="square" anchor="ctr" lIns="0" rIns="0" tIns="0" bIns="0">
+          <a:bodyPr wrap="square" lIns="0" tIns="0" rIns="0" bIns="0" anchor="ctr">
             <a:spAutoFit/>
           </a:bodyPr>
           <a:lstStyle/>
@@ -17117,7 +17207,7 @@
           <a:noFill/>
         </p:spPr>
         <p:txBody>
-          <a:bodyPr wrap="square" anchor="ctr" lIns="0" rIns="0" tIns="0" bIns="0">
+          <a:bodyPr wrap="square" lIns="0" tIns="0" rIns="0" bIns="0" anchor="ctr">
             <a:spAutoFit/>
           </a:bodyPr>
           <a:lstStyle/>
@@ -17178,7 +17268,7 @@
           </a:fontRef>
         </p:style>
         <p:txBody>
-          <a:bodyPr rtlCol="0" anchor="ctr" lIns="45720" rIns="45720" tIns="0" bIns="0"/>
+          <a:bodyPr lIns="45720" tIns="0" rIns="45720" bIns="0" rtlCol="0" anchor="ctr"/>
           <a:lstStyle/>
           <a:p>
             <a:pPr algn="ctr"/>
@@ -17211,7 +17301,7 @@
           <a:noFill/>
         </p:spPr>
         <p:txBody>
-          <a:bodyPr wrap="square" anchor="t" lIns="0" rIns="0" tIns="0" bIns="0">
+          <a:bodyPr wrap="square" lIns="0" tIns="0" rIns="0" bIns="0" anchor="t">
             <a:spAutoFit/>
           </a:bodyPr>
           <a:lstStyle/>
@@ -17250,7 +17340,7 @@
           <a:noFill/>
         </p:spPr>
         <p:txBody>
-          <a:bodyPr wrap="square" anchor="t" lIns="0" rIns="0" tIns="0" bIns="0">
+          <a:bodyPr wrap="square" lIns="0" tIns="0" rIns="0" bIns="0" anchor="t">
             <a:spAutoFit/>
           </a:bodyPr>
           <a:lstStyle/>
@@ -17289,7 +17379,7 @@
           <a:noFill/>
         </p:spPr>
         <p:txBody>
-          <a:bodyPr wrap="square" anchor="t" lIns="0" rIns="0" tIns="0" bIns="0">
+          <a:bodyPr wrap="square" lIns="0" tIns="0" rIns="0" bIns="0" anchor="t">
             <a:spAutoFit/>
           </a:bodyPr>
           <a:lstStyle/>
@@ -17328,7 +17418,7 @@
           <a:noFill/>
         </p:spPr>
         <p:txBody>
-          <a:bodyPr wrap="square" anchor="t" lIns="0" rIns="0" tIns="0" bIns="0">
+          <a:bodyPr wrap="square" lIns="0" tIns="0" rIns="0" bIns="0" anchor="t">
             <a:spAutoFit/>
           </a:bodyPr>
           <a:lstStyle/>
@@ -17376,7 +17466,7 @@
           <a:noFill/>
         </p:spPr>
         <p:txBody>
-          <a:bodyPr wrap="square" anchor="t" lIns="0" rIns="0" tIns="0" bIns="0">
+          <a:bodyPr wrap="square" lIns="0" tIns="0" rIns="0" bIns="0" anchor="t">
             <a:spAutoFit/>
           </a:bodyPr>
           <a:lstStyle/>
@@ -17424,7 +17514,7 @@
           <a:noFill/>
         </p:spPr>
         <p:txBody>
-          <a:bodyPr wrap="square" anchor="t" lIns="0" rIns="0" tIns="0" bIns="0">
+          <a:bodyPr wrap="square" lIns="0" tIns="0" rIns="0" bIns="0" anchor="t">
             <a:spAutoFit/>
           </a:bodyPr>
           <a:lstStyle/>
@@ -17472,7 +17562,7 @@
           <a:noFill/>
         </p:spPr>
         <p:txBody>
-          <a:bodyPr wrap="square" anchor="t" lIns="0" rIns="0" tIns="0" bIns="0">
+          <a:bodyPr wrap="square" lIns="0" tIns="0" rIns="0" bIns="0" anchor="t">
             <a:spAutoFit/>
           </a:bodyPr>
           <a:lstStyle/>
@@ -17511,7 +17601,7 @@
           <a:noFill/>
         </p:spPr>
         <p:txBody>
-          <a:bodyPr wrap="square" anchor="t" lIns="0" rIns="0" tIns="0" bIns="0">
+          <a:bodyPr wrap="square" lIns="0" tIns="0" rIns="0" bIns="0" anchor="t">
             <a:spAutoFit/>
           </a:bodyPr>
           <a:lstStyle/>
@@ -17542,7 +17632,7 @@
 </file>
 
 <file path=ppt/slides/slide3.xml><?xml version="1.0" encoding="utf-8"?>
-<p:sld xmlns:a="http://schemas.openxmlformats.org/drawingml/2006/main" xmlns:p="http://schemas.openxmlformats.org/presentationml/2006/main" xmlns:r="http://schemas.openxmlformats.org/officeDocument/2006/relationships">
+<p:sld xmlns:a="http://schemas.openxmlformats.org/drawingml/2006/main" xmlns:r="http://schemas.openxmlformats.org/officeDocument/2006/relationships" xmlns:p="http://schemas.openxmlformats.org/presentationml/2006/main">
   <p:cSld>
     <p:spTree>
       <p:nvGrpSpPr>
@@ -17550,7 +17640,14 @@
         <p:cNvGrpSpPr/>
         <p:nvPr/>
       </p:nvGrpSpPr>
-      <p:grpSpPr/>
+      <p:grpSpPr>
+        <a:xfrm>
+          <a:off x="0" y="0"/>
+          <a:ext cx="0" cy="0"/>
+          <a:chOff x="0" y="0"/>
+          <a:chExt cx="0" cy="0"/>
+        </a:xfrm>
+      </p:grpSpPr>
       <p:sp>
         <p:nvSpPr>
           <p:cNvPr id="2" name="Rectangle 1"/>
@@ -17592,6 +17689,7 @@
           <a:lstStyle/>
           <a:p>
             <a:pPr algn="ctr"/>
+            <a:endParaRPr/>
           </a:p>
         </p:txBody>
       </p:sp>
@@ -17634,7 +17732,7 @@
           </a:fontRef>
         </p:style>
         <p:txBody>
-          <a:bodyPr rtlCol="0" anchor="ctr" lIns="45720" rIns="45720" tIns="0" bIns="0"/>
+          <a:bodyPr lIns="45720" tIns="0" rIns="45720" bIns="0" rtlCol="0" anchor="ctr"/>
           <a:lstStyle/>
           <a:p>
             <a:pPr algn="ctr"/>
@@ -17667,7 +17765,7 @@
           <a:noFill/>
         </p:spPr>
         <p:txBody>
-          <a:bodyPr wrap="square" anchor="t" lIns="0" rIns="0" tIns="0" bIns="0">
+          <a:bodyPr wrap="square" lIns="0" tIns="0" rIns="0" bIns="0" anchor="t">
             <a:spAutoFit/>
           </a:bodyPr>
           <a:lstStyle/>
@@ -17706,7 +17804,7 @@
           <a:noFill/>
         </p:spPr>
         <p:txBody>
-          <a:bodyPr wrap="square" anchor="t" lIns="0" rIns="0" tIns="0" bIns="0">
+          <a:bodyPr wrap="square" lIns="0" tIns="0" rIns="0" bIns="0" anchor="t">
             <a:spAutoFit/>
           </a:bodyPr>
           <a:lstStyle/>
@@ -17745,7 +17843,7 @@
           <a:noFill/>
         </p:spPr>
         <p:txBody>
-          <a:bodyPr wrap="square" anchor="t" lIns="0" rIns="0" tIns="0" bIns="0">
+          <a:bodyPr wrap="square" lIns="0" tIns="0" rIns="0" bIns="0" anchor="t">
             <a:spAutoFit/>
           </a:bodyPr>
           <a:lstStyle/>
@@ -17793,7 +17891,7 @@
           <a:noFill/>
         </p:spPr>
         <p:txBody>
-          <a:bodyPr wrap="square" anchor="t" lIns="0" rIns="0" tIns="0" bIns="0">
+          <a:bodyPr wrap="square" lIns="0" tIns="0" rIns="0" bIns="0" anchor="t">
             <a:spAutoFit/>
           </a:bodyPr>
           <a:lstStyle/>
@@ -17841,7 +17939,7 @@
           <a:noFill/>
         </p:spPr>
         <p:txBody>
-          <a:bodyPr wrap="square" anchor="t" lIns="0" rIns="0" tIns="0" bIns="0">
+          <a:bodyPr wrap="square" lIns="0" tIns="0" rIns="0" bIns="0" anchor="t">
             <a:spAutoFit/>
           </a:bodyPr>
           <a:lstStyle/>
@@ -17915,6 +18013,7 @@
           <a:lstStyle/>
           <a:p>
             <a:pPr algn="ctr"/>
+            <a:endParaRPr/>
           </a:p>
         </p:txBody>
       </p:sp>
@@ -17961,6 +18060,7 @@
           <a:lstStyle/>
           <a:p>
             <a:pPr algn="ctr"/>
+            <a:endParaRPr/>
           </a:p>
         </p:txBody>
       </p:sp>
@@ -17981,7 +18081,7 @@
           <a:noFill/>
         </p:spPr>
         <p:txBody>
-          <a:bodyPr wrap="square" anchor="ctr" lIns="0" rIns="0" tIns="0" bIns="0">
+          <a:bodyPr wrap="square" lIns="0" tIns="0" rIns="0" bIns="0" anchor="ctr">
             <a:spAutoFit/>
           </a:bodyPr>
           <a:lstStyle/>
@@ -18020,7 +18120,7 @@
           <a:noFill/>
         </p:spPr>
         <p:txBody>
-          <a:bodyPr wrap="square" anchor="t" lIns="0" rIns="0" tIns="0" bIns="0">
+          <a:bodyPr wrap="square" lIns="0" tIns="0" rIns="0" bIns="0" anchor="t">
             <a:spAutoFit/>
           </a:bodyPr>
           <a:lstStyle/>
@@ -18059,7 +18159,7 @@
           <a:noFill/>
         </p:spPr>
         <p:txBody>
-          <a:bodyPr wrap="square" anchor="t" lIns="0" rIns="0" tIns="0" bIns="0">
+          <a:bodyPr wrap="square" lIns="0" tIns="0" rIns="0" bIns="0" anchor="t">
             <a:spAutoFit/>
           </a:bodyPr>
           <a:lstStyle/>
@@ -18090,7 +18190,7 @@
 </file>
 
 <file path=ppt/slides/slide4.xml><?xml version="1.0" encoding="utf-8"?>
-<p:sld xmlns:a="http://schemas.openxmlformats.org/drawingml/2006/main" xmlns:p="http://schemas.openxmlformats.org/presentationml/2006/main" xmlns:r="http://schemas.openxmlformats.org/officeDocument/2006/relationships">
+<p:sld xmlns:a="http://schemas.openxmlformats.org/drawingml/2006/main" xmlns:r="http://schemas.openxmlformats.org/officeDocument/2006/relationships" xmlns:p="http://schemas.openxmlformats.org/presentationml/2006/main">
   <p:cSld>
     <p:spTree>
       <p:nvGrpSpPr>
@@ -18098,7 +18198,14 @@
         <p:cNvGrpSpPr/>
         <p:nvPr/>
       </p:nvGrpSpPr>
-      <p:grpSpPr/>
+      <p:grpSpPr>
+        <a:xfrm>
+          <a:off x="0" y="0"/>
+          <a:ext cx="0" cy="0"/>
+          <a:chOff x="0" y="0"/>
+          <a:chExt cx="0" cy="0"/>
+        </a:xfrm>
+      </p:grpSpPr>
       <p:sp>
         <p:nvSpPr>
           <p:cNvPr id="2" name="Rectangle 1"/>
@@ -18140,6 +18247,7 @@
           <a:lstStyle/>
           <a:p>
             <a:pPr algn="ctr"/>
+            <a:endParaRPr/>
           </a:p>
         </p:txBody>
       </p:sp>
@@ -18182,7 +18290,7 @@
           </a:fontRef>
         </p:style>
         <p:txBody>
-          <a:bodyPr rtlCol="0" anchor="ctr" lIns="45720" rIns="45720" tIns="0" bIns="0"/>
+          <a:bodyPr lIns="45720" tIns="0" rIns="45720" bIns="0" rtlCol="0" anchor="ctr"/>
           <a:lstStyle/>
           <a:p>
             <a:pPr algn="ctr"/>
@@ -18215,7 +18323,7 @@
           <a:noFill/>
         </p:spPr>
         <p:txBody>
-          <a:bodyPr wrap="square" anchor="t" lIns="0" rIns="0" tIns="0" bIns="0">
+          <a:bodyPr wrap="square" lIns="0" tIns="0" rIns="0" bIns="0" anchor="t">
             <a:spAutoFit/>
           </a:bodyPr>
           <a:lstStyle/>
@@ -18278,7 +18386,7 @@
           <a:noFill/>
         </p:spPr>
         <p:txBody>
-          <a:bodyPr wrap="square" anchor="t" lIns="0" rIns="0" tIns="0" bIns="0">
+          <a:bodyPr wrap="square" lIns="0" tIns="0" rIns="0" bIns="0" anchor="t">
             <a:spAutoFit/>
           </a:bodyPr>
           <a:lstStyle/>
@@ -18317,7 +18425,7 @@
           <a:noFill/>
         </p:spPr>
         <p:txBody>
-          <a:bodyPr wrap="square" anchor="t" lIns="0" rIns="0" tIns="0" bIns="0">
+          <a:bodyPr wrap="square" lIns="0" tIns="0" rIns="0" bIns="0" anchor="t">
             <a:spAutoFit/>
           </a:bodyPr>
           <a:lstStyle/>
@@ -18365,7 +18473,7 @@
           <a:noFill/>
         </p:spPr>
         <p:txBody>
-          <a:bodyPr wrap="square" anchor="t" lIns="0" rIns="0" tIns="0" bIns="0">
+          <a:bodyPr wrap="square" lIns="0" tIns="0" rIns="0" bIns="0" anchor="t">
             <a:spAutoFit/>
           </a:bodyPr>
           <a:lstStyle/>
@@ -18413,7 +18521,7 @@
           <a:noFill/>
         </p:spPr>
         <p:txBody>
-          <a:bodyPr wrap="square" anchor="t" lIns="0" rIns="0" tIns="0" bIns="0">
+          <a:bodyPr wrap="square" lIns="0" tIns="0" rIns="0" bIns="0" anchor="t">
             <a:spAutoFit/>
           </a:bodyPr>
           <a:lstStyle/>
@@ -18487,6 +18595,7 @@
           <a:lstStyle/>
           <a:p>
             <a:pPr algn="ctr"/>
+            <a:endParaRPr/>
           </a:p>
         </p:txBody>
       </p:sp>
@@ -18507,7 +18616,7 @@
           <a:noFill/>
         </p:spPr>
         <p:txBody>
-          <a:bodyPr wrap="square" anchor="ctr" lIns="0" rIns="0" tIns="0" bIns="0">
+          <a:bodyPr wrap="square" lIns="0" tIns="0" rIns="0" bIns="0" anchor="ctr">
             <a:spAutoFit/>
           </a:bodyPr>
           <a:lstStyle/>
@@ -18546,7 +18655,7 @@
           <a:noFill/>
         </p:spPr>
         <p:txBody>
-          <a:bodyPr wrap="square" anchor="t" lIns="0" rIns="0" tIns="0" bIns="0">
+          <a:bodyPr wrap="square" lIns="0" tIns="0" rIns="0" bIns="0" anchor="t">
             <a:spAutoFit/>
           </a:bodyPr>
           <a:lstStyle/>
@@ -18585,7 +18694,7 @@
           <a:noFill/>
         </p:spPr>
         <p:txBody>
-          <a:bodyPr wrap="square" anchor="t" lIns="0" rIns="0" tIns="0" bIns="0">
+          <a:bodyPr wrap="square" lIns="0" tIns="0" rIns="0" bIns="0" anchor="t">
             <a:spAutoFit/>
           </a:bodyPr>
           <a:lstStyle/>
@@ -18616,7 +18725,7 @@
 </file>
 
 <file path=ppt/slides/slide5.xml><?xml version="1.0" encoding="utf-8"?>
-<p:sld xmlns:a="http://schemas.openxmlformats.org/drawingml/2006/main" xmlns:p="http://schemas.openxmlformats.org/presentationml/2006/main" xmlns:r="http://schemas.openxmlformats.org/officeDocument/2006/relationships">
+<p:sld xmlns:a="http://schemas.openxmlformats.org/drawingml/2006/main" xmlns:r="http://schemas.openxmlformats.org/officeDocument/2006/relationships" xmlns:p="http://schemas.openxmlformats.org/presentationml/2006/main">
   <p:cSld>
     <p:spTree>
       <p:nvGrpSpPr>
@@ -18624,7 +18733,14 @@
         <p:cNvGrpSpPr/>
         <p:nvPr/>
       </p:nvGrpSpPr>
-      <p:grpSpPr/>
+      <p:grpSpPr>
+        <a:xfrm>
+          <a:off x="0" y="0"/>
+          <a:ext cx="0" cy="0"/>
+          <a:chOff x="0" y="0"/>
+          <a:chExt cx="0" cy="0"/>
+        </a:xfrm>
+      </p:grpSpPr>
       <p:sp>
         <p:nvSpPr>
           <p:cNvPr id="2" name="Rectangle 1"/>
@@ -18666,6 +18782,7 @@
           <a:lstStyle/>
           <a:p>
             <a:pPr algn="ctr"/>
+            <a:endParaRPr/>
           </a:p>
         </p:txBody>
       </p:sp>
@@ -18708,7 +18825,7 @@
           </a:fontRef>
         </p:style>
         <p:txBody>
-          <a:bodyPr rtlCol="0" anchor="ctr" lIns="45720" rIns="45720" tIns="0" bIns="0"/>
+          <a:bodyPr lIns="45720" tIns="0" rIns="45720" bIns="0" rtlCol="0" anchor="ctr"/>
           <a:lstStyle/>
           <a:p>
             <a:pPr algn="ctr"/>
@@ -18741,7 +18858,7 @@
           <a:noFill/>
         </p:spPr>
         <p:txBody>
-          <a:bodyPr wrap="square" anchor="t" lIns="0" rIns="0" tIns="0" bIns="0">
+          <a:bodyPr wrap="square" lIns="0" tIns="0" rIns="0" bIns="0" anchor="t">
             <a:spAutoFit/>
           </a:bodyPr>
           <a:lstStyle/>
@@ -18782,9 +18899,27 @@
                 <a:tableStyleId>{5C22544A-7EE6-4342-B048-85BDC9FD1C3A}</a:tableStyleId>
               </a:tblPr>
               <a:tblGrid>
-                <a:gridCol w="2895600"/>
-                <a:gridCol w="2895600"/>
-                <a:gridCol w="2895600"/>
+                <a:gridCol w="2895600">
+                  <a:extLst>
+                    <a:ext uri="{9D8B030D-6E8A-4147-A177-3AD203B41FA5}">
+                      <a16:colId xmlns:a16="http://schemas.microsoft.com/office/drawing/2014/main" val="20000"/>
+                    </a:ext>
+                  </a:extLst>
+                </a:gridCol>
+                <a:gridCol w="2895600">
+                  <a:extLst>
+                    <a:ext uri="{9D8B030D-6E8A-4147-A177-3AD203B41FA5}">
+                      <a16:colId xmlns:a16="http://schemas.microsoft.com/office/drawing/2014/main" val="20001"/>
+                    </a:ext>
+                  </a:extLst>
+                </a:gridCol>
+                <a:gridCol w="2895600">
+                  <a:extLst>
+                    <a:ext uri="{9D8B030D-6E8A-4147-A177-3AD203B41FA5}">
+                      <a16:colId xmlns:a16="http://schemas.microsoft.com/office/drawing/2014/main" val="20002"/>
+                    </a:ext>
+                  </a:extLst>
+                </a:gridCol>
               </a:tblGrid>
               <a:tr h="487680">
                 <a:tc>
@@ -18856,6 +18991,11 @@
                     </a:solidFill>
                   </a:tcPr>
                 </a:tc>
+                <a:extLst>
+                  <a:ext uri="{0D108BD9-81ED-4DB2-BD59-A6C34878D82A}">
+                    <a16:rowId xmlns:a16="http://schemas.microsoft.com/office/drawing/2014/main" val="10000"/>
+                  </a:ext>
+                </a:extLst>
               </a:tr>
               <a:tr h="487680">
                 <a:tc>
@@ -18927,6 +19067,11 @@
                     </a:solidFill>
                   </a:tcPr>
                 </a:tc>
+                <a:extLst>
+                  <a:ext uri="{0D108BD9-81ED-4DB2-BD59-A6C34878D82A}">
+                    <a16:rowId xmlns:a16="http://schemas.microsoft.com/office/drawing/2014/main" val="10001"/>
+                  </a:ext>
+                </a:extLst>
               </a:tr>
               <a:tr h="487680">
                 <a:tc>
@@ -18998,6 +19143,11 @@
                     </a:solidFill>
                   </a:tcPr>
                 </a:tc>
+                <a:extLst>
+                  <a:ext uri="{0D108BD9-81ED-4DB2-BD59-A6C34878D82A}">
+                    <a16:rowId xmlns:a16="http://schemas.microsoft.com/office/drawing/2014/main" val="10002"/>
+                  </a:ext>
+                </a:extLst>
               </a:tr>
             </a:tbl>
           </a:graphicData>
@@ -19020,7 +19170,7 @@
           <a:noFill/>
         </p:spPr>
         <p:txBody>
-          <a:bodyPr wrap="square" anchor="t" lIns="0" rIns="0" tIns="0" bIns="0">
+          <a:bodyPr wrap="square" lIns="0" tIns="0" rIns="0" bIns="0" anchor="t">
             <a:spAutoFit/>
           </a:bodyPr>
           <a:lstStyle/>
@@ -19059,7 +19209,7 @@
           <a:noFill/>
         </p:spPr>
         <p:txBody>
-          <a:bodyPr wrap="square" anchor="t" lIns="0" rIns="0" tIns="0" bIns="0">
+          <a:bodyPr wrap="square" lIns="0" tIns="0" rIns="0" bIns="0" anchor="t">
             <a:spAutoFit/>
           </a:bodyPr>
           <a:lstStyle/>
@@ -19098,7 +19248,7 @@
           <a:noFill/>
         </p:spPr>
         <p:txBody>
-          <a:bodyPr wrap="square" anchor="t" lIns="0" rIns="0" tIns="0" bIns="0">
+          <a:bodyPr wrap="square" lIns="0" tIns="0" rIns="0" bIns="0" anchor="t">
             <a:spAutoFit/>
           </a:bodyPr>
           <a:lstStyle/>
@@ -19129,7 +19279,7 @@
 </file>
 
 <file path=ppt/slides/slide6.xml><?xml version="1.0" encoding="utf-8"?>
-<p:sld xmlns:a="http://schemas.openxmlformats.org/drawingml/2006/main" xmlns:p="http://schemas.openxmlformats.org/presentationml/2006/main" xmlns:r="http://schemas.openxmlformats.org/officeDocument/2006/relationships">
+<p:sld xmlns:a="http://schemas.openxmlformats.org/drawingml/2006/main" xmlns:r="http://schemas.openxmlformats.org/officeDocument/2006/relationships" xmlns:p="http://schemas.openxmlformats.org/presentationml/2006/main">
   <p:cSld>
     <p:spTree>
       <p:nvGrpSpPr>
@@ -19137,7 +19287,14 @@
         <p:cNvGrpSpPr/>
         <p:nvPr/>
       </p:nvGrpSpPr>
-      <p:grpSpPr/>
+      <p:grpSpPr>
+        <a:xfrm>
+          <a:off x="0" y="0"/>
+          <a:ext cx="0" cy="0"/>
+          <a:chOff x="0" y="0"/>
+          <a:chExt cx="0" cy="0"/>
+        </a:xfrm>
+      </p:grpSpPr>
       <p:sp>
         <p:nvSpPr>
           <p:cNvPr id="2" name="Rectangle 1"/>
@@ -19179,6 +19336,7 @@
           <a:lstStyle/>
           <a:p>
             <a:pPr algn="ctr"/>
+            <a:endParaRPr/>
           </a:p>
         </p:txBody>
       </p:sp>
@@ -19221,7 +19379,7 @@
           </a:fontRef>
         </p:style>
         <p:txBody>
-          <a:bodyPr rtlCol="0" anchor="ctr" lIns="45720" rIns="45720" tIns="0" bIns="0"/>
+          <a:bodyPr lIns="45720" tIns="0" rIns="45720" bIns="0" rtlCol="0" anchor="ctr"/>
           <a:lstStyle/>
           <a:p>
             <a:pPr algn="ctr"/>
@@ -19254,7 +19412,7 @@
           <a:noFill/>
         </p:spPr>
         <p:txBody>
-          <a:bodyPr wrap="square" anchor="t" lIns="0" rIns="0" tIns="0" bIns="0">
+          <a:bodyPr wrap="square" lIns="0" tIns="0" rIns="0" bIns="0" anchor="t">
             <a:spAutoFit/>
           </a:bodyPr>
           <a:lstStyle/>
@@ -19301,13 +19459,6 @@
             </a:solidFill>
           </a:ln>
           <a:effectLst/>
-          <a:effectLst>
-            <a:outerShdw blurRad="90000" dist="30000" dir="5400000" rotWithShape="0">
-              <a:srgbClr val="1A1B1F">
-                <a:alpha val="18000"/>
-              </a:srgbClr>
-            </a:outerShdw>
-          </a:effectLst>
         </p:spPr>
         <p:style>
           <a:lnRef idx="1">
@@ -19328,6 +19479,7 @@
           <a:lstStyle/>
           <a:p>
             <a:pPr algn="ctr"/>
+            <a:endParaRPr/>
           </a:p>
         </p:txBody>
       </p:sp>
@@ -19374,6 +19526,7 @@
           <a:lstStyle/>
           <a:p>
             <a:pPr algn="ctr"/>
+            <a:endParaRPr/>
           </a:p>
         </p:txBody>
       </p:sp>
@@ -19394,7 +19547,7 @@
           <a:noFill/>
         </p:spPr>
         <p:txBody>
-          <a:bodyPr wrap="square" anchor="t" lIns="0" rIns="0" tIns="0" bIns="0">
+          <a:bodyPr wrap="square" lIns="0" tIns="0" rIns="0" bIns="0" anchor="t">
             <a:spAutoFit/>
           </a:bodyPr>
           <a:lstStyle/>
@@ -19433,7 +19586,7 @@
           <a:noFill/>
         </p:spPr>
         <p:txBody>
-          <a:bodyPr wrap="square" anchor="t" lIns="0" rIns="0" tIns="0" bIns="0">
+          <a:bodyPr wrap="square" lIns="0" tIns="0" rIns="0" bIns="0" anchor="t">
             <a:spAutoFit/>
           </a:bodyPr>
           <a:lstStyle/>
@@ -19480,13 +19633,6 @@
             </a:solidFill>
           </a:ln>
           <a:effectLst/>
-          <a:effectLst>
-            <a:outerShdw blurRad="90000" dist="30000" dir="5400000" rotWithShape="0">
-              <a:srgbClr val="1A1B1F">
-                <a:alpha val="18000"/>
-              </a:srgbClr>
-            </a:outerShdw>
-          </a:effectLst>
         </p:spPr>
         <p:style>
           <a:lnRef idx="1">
@@ -19507,6 +19653,7 @@
           <a:lstStyle/>
           <a:p>
             <a:pPr algn="ctr"/>
+            <a:endParaRPr/>
           </a:p>
         </p:txBody>
       </p:sp>
@@ -19553,6 +19700,7 @@
           <a:lstStyle/>
           <a:p>
             <a:pPr algn="ctr"/>
+            <a:endParaRPr/>
           </a:p>
         </p:txBody>
       </p:sp>
@@ -19573,7 +19721,7 @@
           <a:noFill/>
         </p:spPr>
         <p:txBody>
-          <a:bodyPr wrap="square" anchor="t" lIns="0" rIns="0" tIns="0" bIns="0">
+          <a:bodyPr wrap="square" lIns="0" tIns="0" rIns="0" bIns="0" anchor="t">
             <a:spAutoFit/>
           </a:bodyPr>
           <a:lstStyle/>
@@ -19612,7 +19760,7 @@
           <a:noFill/>
         </p:spPr>
         <p:txBody>
-          <a:bodyPr wrap="square" anchor="t" lIns="0" rIns="0" tIns="0" bIns="0">
+          <a:bodyPr wrap="square" lIns="0" tIns="0" rIns="0" bIns="0" anchor="t">
             <a:spAutoFit/>
           </a:bodyPr>
           <a:lstStyle/>
@@ -19651,7 +19799,7 @@
           <a:noFill/>
         </p:spPr>
         <p:txBody>
-          <a:bodyPr wrap="square" anchor="t" lIns="0" rIns="0" tIns="0" bIns="0">
+          <a:bodyPr wrap="square" lIns="0" tIns="0" rIns="0" bIns="0" anchor="t">
             <a:spAutoFit/>
           </a:bodyPr>
           <a:lstStyle/>
@@ -19690,7 +19838,7 @@
           <a:noFill/>
         </p:spPr>
         <p:txBody>
-          <a:bodyPr wrap="square" anchor="t" lIns="0" rIns="0" tIns="0" bIns="0">
+          <a:bodyPr wrap="square" lIns="0" tIns="0" rIns="0" bIns="0" anchor="t">
             <a:spAutoFit/>
           </a:bodyPr>
           <a:lstStyle/>
@@ -19729,7 +19877,7 @@
           <a:noFill/>
         </p:spPr>
         <p:txBody>
-          <a:bodyPr wrap="square" anchor="t" lIns="0" rIns="0" tIns="0" bIns="0">
+          <a:bodyPr wrap="square" lIns="0" tIns="0" rIns="0" bIns="0" anchor="t">
             <a:spAutoFit/>
           </a:bodyPr>
           <a:lstStyle/>
@@ -19760,7 +19908,7 @@
 </file>
 
 <file path=ppt/slides/slide7.xml><?xml version="1.0" encoding="utf-8"?>
-<p:sld xmlns:a="http://schemas.openxmlformats.org/drawingml/2006/main" xmlns:p="http://schemas.openxmlformats.org/presentationml/2006/main" xmlns:r="http://schemas.openxmlformats.org/officeDocument/2006/relationships">
+<p:sld xmlns:a="http://schemas.openxmlformats.org/drawingml/2006/main" xmlns:r="http://schemas.openxmlformats.org/officeDocument/2006/relationships" xmlns:p="http://schemas.openxmlformats.org/presentationml/2006/main">
   <p:cSld>
     <p:spTree>
       <p:nvGrpSpPr>
@@ -19768,7 +19916,14 @@
         <p:cNvGrpSpPr/>
         <p:nvPr/>
       </p:nvGrpSpPr>
-      <p:grpSpPr/>
+      <p:grpSpPr>
+        <a:xfrm>
+          <a:off x="0" y="0"/>
+          <a:ext cx="0" cy="0"/>
+          <a:chOff x="0" y="0"/>
+          <a:chExt cx="0" cy="0"/>
+        </a:xfrm>
+      </p:grpSpPr>
       <p:sp>
         <p:nvSpPr>
           <p:cNvPr id="2" name="Rectangle 1"/>
@@ -19810,6 +19965,7 @@
           <a:lstStyle/>
           <a:p>
             <a:pPr algn="ctr"/>
+            <a:endParaRPr/>
           </a:p>
         </p:txBody>
       </p:sp>
@@ -19856,6 +20012,7 @@
           <a:lstStyle/>
           <a:p>
             <a:pPr algn="ctr"/>
+            <a:endParaRPr/>
           </a:p>
         </p:txBody>
       </p:sp>
@@ -19898,7 +20055,7 @@
           </a:fontRef>
         </p:style>
         <p:txBody>
-          <a:bodyPr rtlCol="0" anchor="ctr" lIns="45720" rIns="45720" tIns="0" bIns="0"/>
+          <a:bodyPr lIns="45720" tIns="0" rIns="45720" bIns="0" rtlCol="0" anchor="ctr"/>
           <a:lstStyle/>
           <a:p>
             <a:pPr algn="ctr"/>
@@ -19931,7 +20088,7 @@
           <a:noFill/>
         </p:spPr>
         <p:txBody>
-          <a:bodyPr wrap="square" anchor="t" lIns="0" rIns="0" tIns="0" bIns="0">
+          <a:bodyPr wrap="square" lIns="0" tIns="0" rIns="0" bIns="0" anchor="t">
             <a:spAutoFit/>
           </a:bodyPr>
           <a:lstStyle/>
@@ -19962,15 +20119,15 @@
         <p:spPr>
           <a:xfrm>
             <a:off x="548640" y="3794760"/>
-            <a:ext cx="10058400" cy="457200"/>
-          </a:xfrm>
-          <a:prstGeom prst="rect">
-            <a:avLst/>
-          </a:prstGeom>
-          <a:noFill/>
-        </p:spPr>
-        <p:txBody>
-          <a:bodyPr wrap="square" anchor="t" lIns="0" rIns="0" tIns="0" bIns="0">
+            <a:ext cx="10058400" cy="307777"/>
+          </a:xfrm>
+          <a:prstGeom prst="rect">
+            <a:avLst/>
+          </a:prstGeom>
+          <a:noFill/>
+        </p:spPr>
+        <p:txBody>
+          <a:bodyPr wrap="square" lIns="0" tIns="0" rIns="0" bIns="0" anchor="t">
             <a:spAutoFit/>
           </a:bodyPr>
           <a:lstStyle/>
@@ -19981,13 +20138,22 @@
               </a:lnSpc>
             </a:pPr>
             <a:r>
-              <a:rPr sz="2000" b="1">
+              <a:rPr lang="en-US" sz="2000" b="1" err="1">
                 <a:solidFill>
                   <a:srgbClr val="B9BDC2"/>
                 </a:solidFill>
                 <a:latin typeface="Montserrat"/>
               </a:rPr>
-              <a:t>Switch to terminal → Minikube + Helm</a:t>
+              <a:t>Minikube</a:t>
+            </a:r>
+            <a:r>
+              <a:rPr sz="2000" b="1" dirty="0">
+                <a:solidFill>
+                  <a:srgbClr val="B9BDC2"/>
+                </a:solidFill>
+                <a:latin typeface="Montserrat"/>
+              </a:rPr>
+              <a:t> + Helm</a:t>
             </a:r>
           </a:p>
         </p:txBody>
@@ -20009,7 +20175,7 @@
           <a:noFill/>
         </p:spPr>
         <p:txBody>
-          <a:bodyPr wrap="square" anchor="t" lIns="0" rIns="0" tIns="0" bIns="0">
+          <a:bodyPr wrap="square" lIns="0" tIns="0" rIns="0" bIns="0" anchor="t">
             <a:spAutoFit/>
           </a:bodyPr>
           <a:lstStyle/>
@@ -20048,7 +20214,7 @@
           <a:noFill/>
         </p:spPr>
         <p:txBody>
-          <a:bodyPr wrap="square" anchor="t" lIns="0" rIns="0" tIns="0" bIns="0">
+          <a:bodyPr wrap="square" lIns="0" tIns="0" rIns="0" bIns="0" anchor="t">
             <a:spAutoFit/>
           </a:bodyPr>
           <a:lstStyle/>
@@ -20079,7 +20245,7 @@
 </file>
 
 <file path=ppt/slides/slide8.xml><?xml version="1.0" encoding="utf-8"?>
-<p:sld xmlns:a="http://schemas.openxmlformats.org/drawingml/2006/main" xmlns:p="http://schemas.openxmlformats.org/presentationml/2006/main" xmlns:r="http://schemas.openxmlformats.org/officeDocument/2006/relationships">
+<p:sld xmlns:a="http://schemas.openxmlformats.org/drawingml/2006/main" xmlns:r="http://schemas.openxmlformats.org/officeDocument/2006/relationships" xmlns:p="http://schemas.openxmlformats.org/presentationml/2006/main">
   <p:cSld>
     <p:spTree>
       <p:nvGrpSpPr>
@@ -20087,7 +20253,14 @@
         <p:cNvGrpSpPr/>
         <p:nvPr/>
       </p:nvGrpSpPr>
-      <p:grpSpPr/>
+      <p:grpSpPr>
+        <a:xfrm>
+          <a:off x="0" y="0"/>
+          <a:ext cx="0" cy="0"/>
+          <a:chOff x="0" y="0"/>
+          <a:chExt cx="0" cy="0"/>
+        </a:xfrm>
+      </p:grpSpPr>
       <p:sp>
         <p:nvSpPr>
           <p:cNvPr id="2" name="Rectangle 1"/>
@@ -20129,6 +20302,7 @@
           <a:lstStyle/>
           <a:p>
             <a:pPr algn="ctr"/>
+            <a:endParaRPr/>
           </a:p>
         </p:txBody>
       </p:sp>
@@ -20171,7 +20345,7 @@
           </a:fontRef>
         </p:style>
         <p:txBody>
-          <a:bodyPr rtlCol="0" anchor="ctr" lIns="45720" rIns="45720" tIns="0" bIns="0"/>
+          <a:bodyPr lIns="45720" tIns="0" rIns="45720" bIns="0" rtlCol="0" anchor="ctr"/>
           <a:lstStyle/>
           <a:p>
             <a:pPr algn="ctr"/>
@@ -20204,7 +20378,7 @@
           <a:noFill/>
         </p:spPr>
         <p:txBody>
-          <a:bodyPr wrap="square" anchor="t" lIns="0" rIns="0" tIns="0" bIns="0">
+          <a:bodyPr wrap="square" lIns="0" tIns="0" rIns="0" bIns="0" anchor="t">
             <a:spAutoFit/>
           </a:bodyPr>
           <a:lstStyle/>
@@ -20249,13 +20423,6 @@
             <a:noFill/>
           </a:ln>
           <a:effectLst/>
-          <a:effectLst>
-            <a:outerShdw blurRad="90000" dist="30000" dir="5400000" rotWithShape="0">
-              <a:srgbClr val="1A1B1F">
-                <a:alpha val="18000"/>
-              </a:srgbClr>
-            </a:outerShdw>
-          </a:effectLst>
         </p:spPr>
         <p:style>
           <a:lnRef idx="1">
@@ -20272,7 +20439,7 @@
           </a:fontRef>
         </p:style>
         <p:txBody>
-          <a:bodyPr rtlCol="0" anchor="ctr" wrap="square" lIns="310896" rIns="182880" tIns="164592" bIns="164592"/>
+          <a:bodyPr wrap="square" lIns="310896" tIns="164592" rIns="182880" bIns="164592" rtlCol="0" anchor="ctr"/>
           <a:lstStyle/>
           <a:p>
             <a:pPr algn="l">
@@ -20312,15 +20479,12 @@
                 <a:spcPct val="125000"/>
               </a:lnSpc>
             </a:pPr>
-            <a:r>
-              <a:rPr sz="1400">
-                <a:solidFill>
-                  <a:srgbClr val="E5EAF2"/>
-                </a:solidFill>
-                <a:latin typeface="Consolas"/>
-              </a:rPr>
-              <a:t/>
-            </a:r>
+            <a:endParaRPr sz="1400">
+              <a:solidFill>
+                <a:srgbClr val="E5EAF2"/>
+              </a:solidFill>
+              <a:latin typeface="Consolas"/>
+            </a:endParaRPr>
           </a:p>
           <a:p>
             <a:pPr algn="l">
@@ -20415,6 +20579,7 @@
           <a:lstStyle/>
           <a:p>
             <a:pPr algn="ctr"/>
+            <a:endParaRPr/>
           </a:p>
         </p:txBody>
       </p:sp>
@@ -20435,7 +20600,7 @@
           <a:noFill/>
         </p:spPr>
         <p:txBody>
-          <a:bodyPr wrap="square" anchor="t" lIns="0" rIns="0" tIns="0" bIns="0">
+          <a:bodyPr wrap="square" lIns="0" tIns="0" rIns="0" bIns="0" anchor="t">
             <a:spAutoFit/>
           </a:bodyPr>
           <a:lstStyle/>
@@ -20474,7 +20639,7 @@
           <a:noFill/>
         </p:spPr>
         <p:txBody>
-          <a:bodyPr wrap="square" anchor="t" lIns="0" rIns="0" tIns="0" bIns="0">
+          <a:bodyPr wrap="square" lIns="0" tIns="0" rIns="0" bIns="0" anchor="t">
             <a:spAutoFit/>
           </a:bodyPr>
           <a:lstStyle/>
@@ -20513,7 +20678,7 @@
           <a:noFill/>
         </p:spPr>
         <p:txBody>
-          <a:bodyPr wrap="square" anchor="t" lIns="0" rIns="0" tIns="0" bIns="0">
+          <a:bodyPr wrap="square" lIns="0" tIns="0" rIns="0" bIns="0" anchor="t">
             <a:spAutoFit/>
           </a:bodyPr>
           <a:lstStyle/>
@@ -20552,7 +20717,7 @@
           <a:noFill/>
         </p:spPr>
         <p:txBody>
-          <a:bodyPr wrap="square" anchor="t" lIns="0" rIns="0" tIns="0" bIns="0">
+          <a:bodyPr wrap="square" lIns="0" tIns="0" rIns="0" bIns="0" anchor="t">
             <a:spAutoFit/>
           </a:bodyPr>
           <a:lstStyle/>
@@ -20583,7 +20748,7 @@
 </file>
 
 <file path=ppt/slides/slide9.xml><?xml version="1.0" encoding="utf-8"?>
-<p:sld xmlns:a="http://schemas.openxmlformats.org/drawingml/2006/main" xmlns:p="http://schemas.openxmlformats.org/presentationml/2006/main" xmlns:r="http://schemas.openxmlformats.org/officeDocument/2006/relationships">
+<p:sld xmlns:a="http://schemas.openxmlformats.org/drawingml/2006/main" xmlns:r="http://schemas.openxmlformats.org/officeDocument/2006/relationships" xmlns:p="http://schemas.openxmlformats.org/presentationml/2006/main">
   <p:cSld>
     <p:spTree>
       <p:nvGrpSpPr>
@@ -20591,7 +20756,14 @@
         <p:cNvGrpSpPr/>
         <p:nvPr/>
       </p:nvGrpSpPr>
-      <p:grpSpPr/>
+      <p:grpSpPr>
+        <a:xfrm>
+          <a:off x="0" y="0"/>
+          <a:ext cx="0" cy="0"/>
+          <a:chOff x="0" y="0"/>
+          <a:chExt cx="0" cy="0"/>
+        </a:xfrm>
+      </p:grpSpPr>
       <p:sp>
         <p:nvSpPr>
           <p:cNvPr id="2" name="Rectangle 1"/>
@@ -20633,6 +20805,7 @@
           <a:lstStyle/>
           <a:p>
             <a:pPr algn="ctr"/>
+            <a:endParaRPr/>
           </a:p>
         </p:txBody>
       </p:sp>
@@ -20675,7 +20848,7 @@
           </a:fontRef>
         </p:style>
         <p:txBody>
-          <a:bodyPr rtlCol="0" anchor="ctr" lIns="45720" rIns="45720" tIns="0" bIns="0"/>
+          <a:bodyPr lIns="45720" tIns="0" rIns="45720" bIns="0" rtlCol="0" anchor="ctr"/>
           <a:lstStyle/>
           <a:p>
             <a:pPr algn="ctr"/>
@@ -20708,7 +20881,7 @@
           <a:noFill/>
         </p:spPr>
         <p:txBody>
-          <a:bodyPr wrap="square" anchor="t" lIns="0" rIns="0" tIns="0" bIns="0">
+          <a:bodyPr wrap="square" lIns="0" tIns="0" rIns="0" bIns="0" anchor="t">
             <a:spAutoFit/>
           </a:bodyPr>
           <a:lstStyle/>
@@ -20753,13 +20926,6 @@
             <a:noFill/>
           </a:ln>
           <a:effectLst/>
-          <a:effectLst>
-            <a:outerShdw blurRad="90000" dist="30000" dir="5400000" rotWithShape="0">
-              <a:srgbClr val="1A1B1F">
-                <a:alpha val="18000"/>
-              </a:srgbClr>
-            </a:outerShdw>
-          </a:effectLst>
         </p:spPr>
         <p:style>
           <a:lnRef idx="1">
@@ -20776,7 +20942,7 @@
           </a:fontRef>
         </p:style>
         <p:txBody>
-          <a:bodyPr rtlCol="0" anchor="ctr" wrap="square" lIns="310896" rIns="182880" tIns="164592" bIns="164592"/>
+          <a:bodyPr wrap="square" lIns="310896" tIns="164592" rIns="182880" bIns="164592" rtlCol="0" anchor="ctr"/>
           <a:lstStyle/>
           <a:p>
             <a:pPr algn="l">
@@ -20935,6 +21101,7 @@
           <a:lstStyle/>
           <a:p>
             <a:pPr algn="ctr"/>
+            <a:endParaRPr/>
           </a:p>
         </p:txBody>
       </p:sp>
@@ -20955,7 +21122,7 @@
           <a:noFill/>
         </p:spPr>
         <p:txBody>
-          <a:bodyPr wrap="square" anchor="t" lIns="0" rIns="0" tIns="0" bIns="0">
+          <a:bodyPr wrap="square" lIns="0" tIns="0" rIns="0" bIns="0" anchor="t">
             <a:spAutoFit/>
           </a:bodyPr>
           <a:lstStyle/>
@@ -20994,7 +21161,7 @@
           <a:noFill/>
         </p:spPr>
         <p:txBody>
-          <a:bodyPr wrap="square" anchor="t" lIns="0" rIns="0" tIns="0" bIns="0">
+          <a:bodyPr wrap="square" lIns="0" tIns="0" rIns="0" bIns="0" anchor="t">
             <a:spAutoFit/>
           </a:bodyPr>
           <a:lstStyle/>
@@ -21033,7 +21200,7 @@
           <a:noFill/>
         </p:spPr>
         <p:txBody>
-          <a:bodyPr wrap="square" anchor="t" lIns="0" rIns="0" tIns="0" bIns="0">
+          <a:bodyPr wrap="square" lIns="0" tIns="0" rIns="0" bIns="0" anchor="t">
             <a:spAutoFit/>
           </a:bodyPr>
           <a:lstStyle/>

--- a/kyverno-demo.pptx
+++ b/kyverno-demo.pptx
@@ -151,6 +151,7 @@
 <p1510:revInfo xmlns:a="http://schemas.openxmlformats.org/drawingml/2006/main" xmlns:r="http://schemas.openxmlformats.org/officeDocument/2006/relationships" xmlns:p1510="http://schemas.microsoft.com/office/powerpoint/2015/10/main">
   <p1510:revLst>
     <p1510:client id="{5C7A7C19-17A7-2556-668E-9128A0750CC5}" v="65" dt="2026-10-29T15:29:00.119"/>
+    <p1510:client id="{E14687BD-7748-D53A-2EAA-443C3BB2FFDA}" v="18" dt="2026-10-29T15:48:11.650"/>
   </p1510:revLst>
 </p1510:revInfo>
 </file>
@@ -5364,7 +5365,7 @@
         <p:spPr>
           <a:xfrm>
             <a:off x="7763256" y="4315968"/>
-            <a:ext cx="3895344" cy="685800"/>
+            <a:ext cx="3895344" cy="725711"/>
           </a:xfrm>
           <a:prstGeom prst="rect">
             <a:avLst/>
@@ -5377,11 +5378,19 @@
           </a:bodyPr>
           <a:lstStyle/>
           <a:p>
-            <a:pPr algn="l">
+            <a:pPr>
               <a:lnSpc>
                 <a:spcPct val="115000"/>
               </a:lnSpc>
             </a:pPr>
+            <a:br>
+              <a:rPr lang="en-US" sz="1400" dirty="0">
+                <a:solidFill>
+                  <a:srgbClr val="1A1B1F"/>
+                </a:solidFill>
+                <a:latin typeface="Montserrat"/>
+              </a:rPr>
+            </a:br>
             <a:r>
               <a:rPr sz="1400" b="0" i="0">
                 <a:solidFill>
@@ -8949,53 +8958,6 @@
       </p:sp>
       <p:sp>
         <p:nvSpPr>
-          <p:cNvPr id="3" name="Rounded Rectangle 2"/>
-          <p:cNvSpPr/>
-          <p:nvPr/>
-        </p:nvSpPr>
-        <p:spPr>
-          <a:xfrm rot="1080000">
-            <a:off x="10911535" y="-457200"/>
-            <a:ext cx="1737360" cy="1737360"/>
-          </a:xfrm>
-          <a:prstGeom prst="roundRect">
-            <a:avLst>
-              <a:gd name="adj" fmla="val 22000"/>
-            </a:avLst>
-          </a:prstGeom>
-          <a:solidFill>
-            <a:srgbClr val="EF4023"/>
-          </a:solidFill>
-          <a:ln>
-            <a:noFill/>
-          </a:ln>
-          <a:effectLst/>
-        </p:spPr>
-        <p:style>
-          <a:lnRef idx="1">
-            <a:schemeClr val="accent1"/>
-          </a:lnRef>
-          <a:fillRef idx="3">
-            <a:schemeClr val="accent1"/>
-          </a:fillRef>
-          <a:effectRef idx="2">
-            <a:schemeClr val="accent1"/>
-          </a:effectRef>
-          <a:fontRef idx="minor">
-            <a:schemeClr val="lt1"/>
-          </a:fontRef>
-        </p:style>
-        <p:txBody>
-          <a:bodyPr rtlCol="0" anchor="ctr"/>
-          <a:lstStyle/>
-          <a:p>
-            <a:pPr algn="ctr"/>
-            <a:endParaRPr/>
-          </a:p>
-        </p:txBody>
-      </p:sp>
-      <p:sp>
-        <p:nvSpPr>
           <p:cNvPr id="4" name="Rounded Rectangle 3"/>
           <p:cNvSpPr/>
           <p:nvPr/>
@@ -17056,53 +17018,6 @@
           </a:p>
         </p:txBody>
       </p:sp>
-      <p:sp>
-        <p:nvSpPr>
-          <p:cNvPr id="3" name="Rounded Rectangle 2"/>
-          <p:cNvSpPr/>
-          <p:nvPr/>
-        </p:nvSpPr>
-        <p:spPr>
-          <a:xfrm rot="1080000">
-            <a:off x="10271455" y="-457200"/>
-            <a:ext cx="2377440" cy="2377440"/>
-          </a:xfrm>
-          <a:prstGeom prst="roundRect">
-            <a:avLst>
-              <a:gd name="adj" fmla="val 22000"/>
-            </a:avLst>
-          </a:prstGeom>
-          <a:solidFill>
-            <a:srgbClr val="EF4023"/>
-          </a:solidFill>
-          <a:ln>
-            <a:noFill/>
-          </a:ln>
-          <a:effectLst/>
-        </p:spPr>
-        <p:style>
-          <a:lnRef idx="1">
-            <a:schemeClr val="accent1"/>
-          </a:lnRef>
-          <a:fillRef idx="3">
-            <a:schemeClr val="accent1"/>
-          </a:fillRef>
-          <a:effectRef idx="2">
-            <a:schemeClr val="accent1"/>
-          </a:effectRef>
-          <a:fontRef idx="minor">
-            <a:schemeClr val="lt1"/>
-          </a:fontRef>
-        </p:style>
-        <p:txBody>
-          <a:bodyPr rtlCol="0" anchor="ctr"/>
-          <a:lstStyle/>
-          <a:p>
-            <a:pPr algn="ctr"/>
-            <a:endParaRPr/>
-          </a:p>
-        </p:txBody>
-      </p:sp>
       <p:pic>
         <p:nvPicPr>
           <p:cNvPr id="4" name="Picture 3" descr="mitesp-mark.png"/>
@@ -17135,8 +17050,8 @@
         </p:nvSpPr>
         <p:spPr>
           <a:xfrm>
-            <a:off x="1143000" y="457200"/>
-            <a:ext cx="3657600" cy="457200"/>
+            <a:off x="1143000" y="570384"/>
+            <a:ext cx="3657600" cy="230832"/>
           </a:xfrm>
           <a:prstGeom prst="rect">
             <a:avLst/>
@@ -17149,19 +17064,32 @@
           </a:bodyPr>
           <a:lstStyle/>
           <a:p>
-            <a:pPr algn="l">
-              <a:lnSpc>
-                <a:spcPct val="100000"/>
-              </a:lnSpc>
-            </a:pPr>
-            <a:r>
-              <a:rPr sz="1500" b="1" i="0">
+            <a:r>
+              <a:rPr lang="en-US" sz="1500" b="1" dirty="0">
                 <a:solidFill>
                   <a:srgbClr val="FFFFFF"/>
                 </a:solidFill>
                 <a:latin typeface="Montserrat"/>
               </a:rPr>
-              <a:t>MillenniumIT ESP</a:t>
+              <a:t>          </a:t>
+            </a:r>
+            <a:r>
+              <a:rPr sz="1500" b="1" i="0" dirty="0" err="1">
+                <a:solidFill>
+                  <a:srgbClr val="FFFFFF"/>
+                </a:solidFill>
+                <a:latin typeface="Montserrat"/>
+              </a:rPr>
+              <a:t>MillenniumIT</a:t>
+            </a:r>
+            <a:r>
+              <a:rPr sz="1500" b="1" i="0" dirty="0">
+                <a:solidFill>
+                  <a:srgbClr val="FFFFFF"/>
+                </a:solidFill>
+                <a:latin typeface="Montserrat"/>
+              </a:rPr>
+              <a:t> ESP</a:t>
             </a:r>
           </a:p>
         </p:txBody>
@@ -19940,53 +19868,6 @@
           </a:prstGeom>
           <a:solidFill>
             <a:srgbClr val="14171A"/>
-          </a:solidFill>
-          <a:ln>
-            <a:noFill/>
-          </a:ln>
-          <a:effectLst/>
-        </p:spPr>
-        <p:style>
-          <a:lnRef idx="1">
-            <a:schemeClr val="accent1"/>
-          </a:lnRef>
-          <a:fillRef idx="3">
-            <a:schemeClr val="accent1"/>
-          </a:fillRef>
-          <a:effectRef idx="2">
-            <a:schemeClr val="accent1"/>
-          </a:effectRef>
-          <a:fontRef idx="minor">
-            <a:schemeClr val="lt1"/>
-          </a:fontRef>
-        </p:style>
-        <p:txBody>
-          <a:bodyPr rtlCol="0" anchor="ctr"/>
-          <a:lstStyle/>
-          <a:p>
-            <a:pPr algn="ctr"/>
-            <a:endParaRPr/>
-          </a:p>
-        </p:txBody>
-      </p:sp>
-      <p:sp>
-        <p:nvSpPr>
-          <p:cNvPr id="3" name="Rounded Rectangle 2"/>
-          <p:cNvSpPr/>
-          <p:nvPr/>
-        </p:nvSpPr>
-        <p:spPr>
-          <a:xfrm rot="1080000">
-            <a:off x="10911535" y="-457200"/>
-            <a:ext cx="1737360" cy="1737360"/>
-          </a:xfrm>
-          <a:prstGeom prst="roundRect">
-            <a:avLst>
-              <a:gd name="adj" fmla="val 22000"/>
-            </a:avLst>
-          </a:prstGeom>
-          <a:solidFill>
-            <a:srgbClr val="EF4023"/>
           </a:solidFill>
           <a:ln>
             <a:noFill/>
